--- a/Fall chum GSI.pptx
+++ b/Fall chum GSI.pptx
@@ -5,8 +5,7 @@
     <p:sldMasterId id="2147483648" r:id="rId1"/>
   </p:sldMasterIdLst>
   <p:sldIdLst>
-    <p:sldId id="256" r:id="rId2"/>
-    <p:sldId id="257" r:id="rId3"/>
+    <p:sldId id="257" r:id="rId2"/>
   </p:sldIdLst>
   <p:sldSz cx="12192000" cy="6858000"/>
   <p:notesSz cx="6858000" cy="9144000"/>
@@ -260,7 +259,7 @@
           <a:p>
             <a:fld id="{ACD65198-149D-4EAE-A523-F70D75FEEA64}" type="datetimeFigureOut">
               <a:rPr lang="en-US" smtClean="0"/>
-              <a:t>10/25/2023</a:t>
+              <a:t>10/30/2026</a:t>
             </a:fld>
             <a:endParaRPr lang="en-US"/>
           </a:p>
@@ -458,7 +457,7 @@
           <a:p>
             <a:fld id="{ACD65198-149D-4EAE-A523-F70D75FEEA64}" type="datetimeFigureOut">
               <a:rPr lang="en-US" smtClean="0"/>
-              <a:t>10/25/2023</a:t>
+              <a:t>10/30/2026</a:t>
             </a:fld>
             <a:endParaRPr lang="en-US"/>
           </a:p>
@@ -666,7 +665,7 @@
           <a:p>
             <a:fld id="{ACD65198-149D-4EAE-A523-F70D75FEEA64}" type="datetimeFigureOut">
               <a:rPr lang="en-US" smtClean="0"/>
-              <a:t>10/25/2023</a:t>
+              <a:t>10/30/2026</a:t>
             </a:fld>
             <a:endParaRPr lang="en-US"/>
           </a:p>
@@ -864,7 +863,7 @@
           <a:p>
             <a:fld id="{ACD65198-149D-4EAE-A523-F70D75FEEA64}" type="datetimeFigureOut">
               <a:rPr lang="en-US" smtClean="0"/>
-              <a:t>10/25/2023</a:t>
+              <a:t>10/30/2026</a:t>
             </a:fld>
             <a:endParaRPr lang="en-US"/>
           </a:p>
@@ -1139,7 +1138,7 @@
           <a:p>
             <a:fld id="{ACD65198-149D-4EAE-A523-F70D75FEEA64}" type="datetimeFigureOut">
               <a:rPr lang="en-US" smtClean="0"/>
-              <a:t>10/25/2023</a:t>
+              <a:t>10/30/2026</a:t>
             </a:fld>
             <a:endParaRPr lang="en-US"/>
           </a:p>
@@ -1404,7 +1403,7 @@
           <a:p>
             <a:fld id="{ACD65198-149D-4EAE-A523-F70D75FEEA64}" type="datetimeFigureOut">
               <a:rPr lang="en-US" smtClean="0"/>
-              <a:t>10/25/2023</a:t>
+              <a:t>10/30/2026</a:t>
             </a:fld>
             <a:endParaRPr lang="en-US"/>
           </a:p>
@@ -1816,7 +1815,7 @@
           <a:p>
             <a:fld id="{ACD65198-149D-4EAE-A523-F70D75FEEA64}" type="datetimeFigureOut">
               <a:rPr lang="en-US" smtClean="0"/>
-              <a:t>10/25/2023</a:t>
+              <a:t>10/30/2026</a:t>
             </a:fld>
             <a:endParaRPr lang="en-US"/>
           </a:p>
@@ -1957,7 +1956,7 @@
           <a:p>
             <a:fld id="{ACD65198-149D-4EAE-A523-F70D75FEEA64}" type="datetimeFigureOut">
               <a:rPr lang="en-US" smtClean="0"/>
-              <a:t>10/25/2023</a:t>
+              <a:t>10/30/2026</a:t>
             </a:fld>
             <a:endParaRPr lang="en-US"/>
           </a:p>
@@ -2070,7 +2069,7 @@
           <a:p>
             <a:fld id="{ACD65198-149D-4EAE-A523-F70D75FEEA64}" type="datetimeFigureOut">
               <a:rPr lang="en-US" smtClean="0"/>
-              <a:t>10/25/2023</a:t>
+              <a:t>10/30/2026</a:t>
             </a:fld>
             <a:endParaRPr lang="en-US"/>
           </a:p>
@@ -2381,7 +2380,7 @@
           <a:p>
             <a:fld id="{ACD65198-149D-4EAE-A523-F70D75FEEA64}" type="datetimeFigureOut">
               <a:rPr lang="en-US" smtClean="0"/>
-              <a:t>10/25/2023</a:t>
+              <a:t>10/30/2026</a:t>
             </a:fld>
             <a:endParaRPr lang="en-US"/>
           </a:p>
@@ -2669,7 +2668,7 @@
           <a:p>
             <a:fld id="{ACD65198-149D-4EAE-A523-F70D75FEEA64}" type="datetimeFigureOut">
               <a:rPr lang="en-US" smtClean="0"/>
-              <a:t>10/25/2023</a:t>
+              <a:t>10/30/2026</a:t>
             </a:fld>
             <a:endParaRPr lang="en-US"/>
           </a:p>
@@ -2910,7 +2909,7 @@
           <a:p>
             <a:fld id="{ACD65198-149D-4EAE-A523-F70D75FEEA64}" type="datetimeFigureOut">
               <a:rPr lang="en-US" smtClean="0"/>
-              <a:t>10/25/2023</a:t>
+              <a:t>10/30/2026</a:t>
             </a:fld>
             <a:endParaRPr lang="en-US"/>
           </a:p>
@@ -3341,8 +3340,8 @@
         </p:nvSpPr>
         <p:spPr>
           <a:xfrm>
-            <a:off x="1883127" y="1026691"/>
-            <a:ext cx="2702560" cy="5607348"/>
+            <a:off x="1852194" y="962392"/>
+            <a:ext cx="2670712" cy="5734286"/>
           </a:xfrm>
           <a:prstGeom prst="roundRect">
             <a:avLst/>
@@ -3385,8 +3384,8 @@
         </p:nvSpPr>
         <p:spPr>
           <a:xfrm>
-            <a:off x="4912799" y="1026691"/>
-            <a:ext cx="2702560" cy="5607348"/>
+            <a:off x="5019692" y="900021"/>
+            <a:ext cx="2702560" cy="5734018"/>
           </a:xfrm>
           <a:prstGeom prst="roundRect">
             <a:avLst/>
@@ -3429,8 +3428,8 @@
         </p:nvSpPr>
         <p:spPr>
           <a:xfrm>
-            <a:off x="8655722" y="991142"/>
-            <a:ext cx="2702560" cy="5678446"/>
+            <a:off x="8240587" y="846275"/>
+            <a:ext cx="2517433" cy="5787763"/>
           </a:xfrm>
           <a:prstGeom prst="roundRect">
             <a:avLst/>
@@ -3489,7 +3488,7 @@
           <a:p>
             <a:r>
               <a:rPr lang="en-US" dirty="0"/>
-              <a:t>1992 -2002</a:t>
+              <a:t>1999 -2002</a:t>
             </a:r>
           </a:p>
         </p:txBody>
@@ -3508,7 +3507,7 @@
         </p:nvSpPr>
         <p:spPr>
           <a:xfrm>
-            <a:off x="5572259" y="572305"/>
+            <a:off x="5605052" y="570815"/>
             <a:ext cx="1244251" cy="369332"/>
           </a:xfrm>
           <a:prstGeom prst="rect">
@@ -3543,2970 +3542,7 @@
         </p:nvSpPr>
         <p:spPr>
           <a:xfrm>
-            <a:off x="9282881" y="601849"/>
-            <a:ext cx="1546686" cy="369332"/>
-          </a:xfrm>
-          <a:prstGeom prst="rect">
-            <a:avLst/>
-          </a:prstGeom>
-          <a:noFill/>
-        </p:spPr>
-        <p:txBody>
-          <a:bodyPr wrap="square" rtlCol="0">
-            <a:spAutoFit/>
-          </a:bodyPr>
-          <a:lstStyle/>
-          <a:p>
-            <a:r>
-              <a:rPr lang="en-US" dirty="0"/>
-              <a:t>2008 -Present</a:t>
-            </a:r>
-          </a:p>
-        </p:txBody>
-      </p:sp>
-      <p:grpSp>
-        <p:nvGrpSpPr>
-          <p:cNvPr id="20" name="Group 19">
-            <a:extLst>
-              <a:ext uri="{FF2B5EF4-FFF2-40B4-BE49-F238E27FC236}">
-                <a16:creationId xmlns:a16="http://schemas.microsoft.com/office/drawing/2014/main" id="{85DE8DBB-FEB3-5E7B-F942-7F3BB39C544E}"/>
-              </a:ext>
-            </a:extLst>
-          </p:cNvPr>
-          <p:cNvGrpSpPr/>
-          <p:nvPr/>
-        </p:nvGrpSpPr>
-        <p:grpSpPr>
-          <a:xfrm>
-            <a:off x="1982513" y="1197602"/>
-            <a:ext cx="2203726" cy="1900178"/>
-            <a:chOff x="1582435" y="1249422"/>
-            <a:chExt cx="1567165" cy="1900178"/>
-          </a:xfrm>
-        </p:grpSpPr>
-        <p:sp>
-          <p:nvSpPr>
-            <p:cNvPr id="13" name="TextBox 12">
-              <a:extLst>
-                <a:ext uri="{FF2B5EF4-FFF2-40B4-BE49-F238E27FC236}">
-                  <a16:creationId xmlns:a16="http://schemas.microsoft.com/office/drawing/2014/main" id="{F1C7366A-1113-EB9E-F65D-CADD620B1465}"/>
-                </a:ext>
-              </a:extLst>
-            </p:cNvPr>
-            <p:cNvSpPr txBox="1"/>
-            <p:nvPr/>
-          </p:nvSpPr>
-          <p:spPr>
-            <a:xfrm>
-              <a:off x="1924869" y="1672570"/>
-              <a:ext cx="807337" cy="369332"/>
-            </a:xfrm>
-            <a:prstGeom prst="rect">
-              <a:avLst/>
-            </a:prstGeom>
-            <a:noFill/>
-          </p:spPr>
-          <p:txBody>
-            <a:bodyPr wrap="square" rtlCol="0">
-              <a:spAutoFit/>
-            </a:bodyPr>
-            <a:lstStyle/>
-            <a:p>
-              <a:r>
-                <a:rPr lang="en-US" dirty="0"/>
-                <a:t>White </a:t>
-              </a:r>
-            </a:p>
-          </p:txBody>
-        </p:sp>
-        <p:sp>
-          <p:nvSpPr>
-            <p:cNvPr id="14" name="TextBox 13">
-              <a:extLst>
-                <a:ext uri="{FF2B5EF4-FFF2-40B4-BE49-F238E27FC236}">
-                  <a16:creationId xmlns:a16="http://schemas.microsoft.com/office/drawing/2014/main" id="{EAAAD452-B870-9CE6-77B0-FDD8A9B97A3A}"/>
-                </a:ext>
-              </a:extLst>
-            </p:cNvPr>
-            <p:cNvSpPr txBox="1"/>
-            <p:nvPr/>
-          </p:nvSpPr>
-          <p:spPr>
-            <a:xfrm>
-              <a:off x="1924869" y="1980168"/>
-              <a:ext cx="762068" cy="369332"/>
-            </a:xfrm>
-            <a:prstGeom prst="rect">
-              <a:avLst/>
-            </a:prstGeom>
-            <a:noFill/>
-          </p:spPr>
-          <p:txBody>
-            <a:bodyPr wrap="none" rtlCol="0">
-              <a:spAutoFit/>
-            </a:bodyPr>
-            <a:lstStyle/>
-            <a:p>
-              <a:r>
-                <a:rPr lang="en-US" dirty="0"/>
-                <a:t>Teslin </a:t>
-              </a:r>
-            </a:p>
-          </p:txBody>
-        </p:sp>
-        <p:sp>
-          <p:nvSpPr>
-            <p:cNvPr id="15" name="Rectangle: Rounded Corners 14">
-              <a:extLst>
-                <a:ext uri="{FF2B5EF4-FFF2-40B4-BE49-F238E27FC236}">
-                  <a16:creationId xmlns:a16="http://schemas.microsoft.com/office/drawing/2014/main" id="{AB08B69A-922D-054E-9558-ACFD5F75484B}"/>
-                </a:ext>
-              </a:extLst>
-            </p:cNvPr>
-            <p:cNvSpPr/>
-            <p:nvPr/>
-          </p:nvSpPr>
-          <p:spPr>
-            <a:xfrm>
-              <a:off x="1582435" y="1271984"/>
-              <a:ext cx="1567165" cy="1877616"/>
-            </a:xfrm>
-            <a:prstGeom prst="roundRect">
-              <a:avLst/>
-            </a:prstGeom>
-            <a:noFill/>
-            <a:ln w="28575">
-              <a:solidFill>
-                <a:schemeClr val="tx1">
-                  <a:lumMod val="95000"/>
-                  <a:lumOff val="5000"/>
-                </a:schemeClr>
-              </a:solidFill>
-            </a:ln>
-          </p:spPr>
-          <p:style>
-            <a:lnRef idx="2">
-              <a:schemeClr val="accent6"/>
-            </a:lnRef>
-            <a:fillRef idx="1">
-              <a:schemeClr val="lt1"/>
-            </a:fillRef>
-            <a:effectRef idx="0">
-              <a:schemeClr val="accent6"/>
-            </a:effectRef>
-            <a:fontRef idx="minor">
-              <a:schemeClr val="dk1"/>
-            </a:fontRef>
-          </p:style>
-          <p:txBody>
-            <a:bodyPr rtlCol="0" anchor="ctr"/>
-            <a:lstStyle/>
-            <a:p>
-              <a:pPr algn="ctr"/>
-              <a:endParaRPr lang="en-US" dirty="0"/>
-            </a:p>
-          </p:txBody>
-        </p:sp>
-        <p:sp>
-          <p:nvSpPr>
-            <p:cNvPr id="16" name="TextBox 15">
-              <a:extLst>
-                <a:ext uri="{FF2B5EF4-FFF2-40B4-BE49-F238E27FC236}">
-                  <a16:creationId xmlns:a16="http://schemas.microsoft.com/office/drawing/2014/main" id="{CC5B0691-77B9-D9B2-3C9F-86964ADDE3FE}"/>
-                </a:ext>
-              </a:extLst>
-            </p:cNvPr>
-            <p:cNvSpPr txBox="1"/>
-            <p:nvPr/>
-          </p:nvSpPr>
-          <p:spPr>
-            <a:xfrm>
-              <a:off x="1716360" y="1249422"/>
-              <a:ext cx="1350050" cy="523220"/>
-            </a:xfrm>
-            <a:prstGeom prst="rect">
-              <a:avLst/>
-            </a:prstGeom>
-            <a:noFill/>
-          </p:spPr>
-          <p:txBody>
-            <a:bodyPr wrap="none" rtlCol="0">
-              <a:spAutoFit/>
-            </a:bodyPr>
-            <a:lstStyle/>
-            <a:p>
-              <a:r>
-                <a:rPr lang="en-US" sz="2800" dirty="0"/>
-                <a:t>Canada </a:t>
-              </a:r>
-            </a:p>
-          </p:txBody>
-        </p:sp>
-      </p:grpSp>
-      <p:sp>
-        <p:nvSpPr>
-          <p:cNvPr id="17" name="Rectangle: Rounded Corners 16">
-            <a:extLst>
-              <a:ext uri="{FF2B5EF4-FFF2-40B4-BE49-F238E27FC236}">
-                <a16:creationId xmlns:a16="http://schemas.microsoft.com/office/drawing/2014/main" id="{98985915-FB1E-8B23-53D8-EA2FE0224DF0}"/>
-              </a:ext>
-            </a:extLst>
-          </p:cNvPr>
-          <p:cNvSpPr/>
-          <p:nvPr/>
-        </p:nvSpPr>
-        <p:spPr>
-          <a:xfrm>
-            <a:off x="2011897" y="2393135"/>
-            <a:ext cx="2161053" cy="4109261"/>
-          </a:xfrm>
-          <a:prstGeom prst="roundRect">
-            <a:avLst/>
-          </a:prstGeom>
-          <a:noFill/>
-          <a:ln w="28575">
-            <a:solidFill>
-              <a:schemeClr val="tx1"/>
-            </a:solidFill>
-            <a:prstDash val="dash"/>
-          </a:ln>
-        </p:spPr>
-        <p:style>
-          <a:lnRef idx="2">
-            <a:schemeClr val="accent6"/>
-          </a:lnRef>
-          <a:fillRef idx="1">
-            <a:schemeClr val="lt1"/>
-          </a:fillRef>
-          <a:effectRef idx="0">
-            <a:schemeClr val="accent6"/>
-          </a:effectRef>
-          <a:fontRef idx="minor">
-            <a:schemeClr val="dk1"/>
-          </a:fontRef>
-        </p:style>
-        <p:txBody>
-          <a:bodyPr rtlCol="0" anchor="ctr"/>
-          <a:lstStyle/>
-          <a:p>
-            <a:pPr algn="ctr"/>
-            <a:endParaRPr lang="en-US" dirty="0"/>
-          </a:p>
-        </p:txBody>
-      </p:sp>
-      <p:sp>
-        <p:nvSpPr>
-          <p:cNvPr id="18" name="TextBox 17">
-            <a:extLst>
-              <a:ext uri="{FF2B5EF4-FFF2-40B4-BE49-F238E27FC236}">
-                <a16:creationId xmlns:a16="http://schemas.microsoft.com/office/drawing/2014/main" id="{B38BDD09-61ED-D361-7B53-3A9AC29233C1}"/>
-              </a:ext>
-            </a:extLst>
-          </p:cNvPr>
-          <p:cNvSpPr txBox="1"/>
-          <p:nvPr/>
-        </p:nvSpPr>
-        <p:spPr>
-          <a:xfrm>
-            <a:off x="2337483" y="6022434"/>
-            <a:ext cx="662361" cy="523220"/>
-          </a:xfrm>
-          <a:prstGeom prst="rect">
-            <a:avLst/>
-          </a:prstGeom>
-          <a:noFill/>
-        </p:spPr>
-        <p:txBody>
-          <a:bodyPr wrap="none" rtlCol="0">
-            <a:spAutoFit/>
-          </a:bodyPr>
-          <a:lstStyle/>
-          <a:p>
-            <a:r>
-              <a:rPr lang="en-US" sz="2800" dirty="0"/>
-              <a:t>US </a:t>
-            </a:r>
-          </a:p>
-        </p:txBody>
-      </p:sp>
-      <p:sp>
-        <p:nvSpPr>
-          <p:cNvPr id="19" name="TextBox 18">
-            <a:extLst>
-              <a:ext uri="{FF2B5EF4-FFF2-40B4-BE49-F238E27FC236}">
-                <a16:creationId xmlns:a16="http://schemas.microsoft.com/office/drawing/2014/main" id="{9D23E96B-D1C8-B567-A350-033096E5D02F}"/>
-              </a:ext>
-            </a:extLst>
-          </p:cNvPr>
-          <p:cNvSpPr txBox="1"/>
-          <p:nvPr/>
-        </p:nvSpPr>
-        <p:spPr>
-          <a:xfrm>
-            <a:off x="2450684" y="2562112"/>
-            <a:ext cx="878830" cy="369332"/>
-          </a:xfrm>
-          <a:prstGeom prst="rect">
-            <a:avLst/>
-          </a:prstGeom>
-          <a:noFill/>
-        </p:spPr>
-        <p:txBody>
-          <a:bodyPr wrap="none" rtlCol="0">
-            <a:spAutoFit/>
-          </a:bodyPr>
-          <a:lstStyle/>
-          <a:p>
-            <a:r>
-              <a:rPr lang="en-US" dirty="0"/>
-              <a:t>Border </a:t>
-            </a:r>
-          </a:p>
-        </p:txBody>
-      </p:sp>
-      <p:grpSp>
-        <p:nvGrpSpPr>
-          <p:cNvPr id="21" name="Group 20">
-            <a:extLst>
-              <a:ext uri="{FF2B5EF4-FFF2-40B4-BE49-F238E27FC236}">
-                <a16:creationId xmlns:a16="http://schemas.microsoft.com/office/drawing/2014/main" id="{67F939F2-F49F-4A48-A81C-46A1100A132D}"/>
-              </a:ext>
-            </a:extLst>
-          </p:cNvPr>
-          <p:cNvGrpSpPr/>
-          <p:nvPr/>
-        </p:nvGrpSpPr>
-        <p:grpSpPr>
-          <a:xfrm>
-            <a:off x="5164318" y="1162925"/>
-            <a:ext cx="2206585" cy="1900178"/>
-            <a:chOff x="1582435" y="1249422"/>
-            <a:chExt cx="1567165" cy="1900178"/>
-          </a:xfrm>
-        </p:grpSpPr>
-        <p:sp>
-          <p:nvSpPr>
-            <p:cNvPr id="22" name="TextBox 21">
-              <a:extLst>
-                <a:ext uri="{FF2B5EF4-FFF2-40B4-BE49-F238E27FC236}">
-                  <a16:creationId xmlns:a16="http://schemas.microsoft.com/office/drawing/2014/main" id="{4F802D20-C6C5-712A-BEC1-9B81C31CD2FA}"/>
-                </a:ext>
-              </a:extLst>
-            </p:cNvPr>
-            <p:cNvSpPr txBox="1"/>
-            <p:nvPr/>
-          </p:nvSpPr>
-          <p:spPr>
-            <a:xfrm>
-              <a:off x="1924869" y="1672570"/>
-              <a:ext cx="807337" cy="369332"/>
-            </a:xfrm>
-            <a:prstGeom prst="rect">
-              <a:avLst/>
-            </a:prstGeom>
-            <a:noFill/>
-          </p:spPr>
-          <p:txBody>
-            <a:bodyPr wrap="square" rtlCol="0">
-              <a:spAutoFit/>
-            </a:bodyPr>
-            <a:lstStyle/>
-            <a:p>
-              <a:r>
-                <a:rPr lang="en-US" dirty="0"/>
-                <a:t>White </a:t>
-              </a:r>
-            </a:p>
-          </p:txBody>
-        </p:sp>
-        <p:sp>
-          <p:nvSpPr>
-            <p:cNvPr id="23" name="TextBox 22">
-              <a:extLst>
-                <a:ext uri="{FF2B5EF4-FFF2-40B4-BE49-F238E27FC236}">
-                  <a16:creationId xmlns:a16="http://schemas.microsoft.com/office/drawing/2014/main" id="{5F530840-DB43-777C-8F1D-0B58906A6A70}"/>
-                </a:ext>
-              </a:extLst>
-            </p:cNvPr>
-            <p:cNvSpPr txBox="1"/>
-            <p:nvPr/>
-          </p:nvSpPr>
-          <p:spPr>
-            <a:xfrm>
-              <a:off x="1924869" y="1980168"/>
-              <a:ext cx="762068" cy="369332"/>
-            </a:xfrm>
-            <a:prstGeom prst="rect">
-              <a:avLst/>
-            </a:prstGeom>
-            <a:noFill/>
-          </p:spPr>
-          <p:txBody>
-            <a:bodyPr wrap="none" rtlCol="0">
-              <a:spAutoFit/>
-            </a:bodyPr>
-            <a:lstStyle/>
-            <a:p>
-              <a:r>
-                <a:rPr lang="en-US" dirty="0"/>
-                <a:t>Teslin </a:t>
-              </a:r>
-            </a:p>
-          </p:txBody>
-        </p:sp>
-        <p:sp>
-          <p:nvSpPr>
-            <p:cNvPr id="24" name="Rectangle: Rounded Corners 23">
-              <a:extLst>
-                <a:ext uri="{FF2B5EF4-FFF2-40B4-BE49-F238E27FC236}">
-                  <a16:creationId xmlns:a16="http://schemas.microsoft.com/office/drawing/2014/main" id="{FA951125-8275-78B5-BD67-B0C09D586BBF}"/>
-                </a:ext>
-              </a:extLst>
-            </p:cNvPr>
-            <p:cNvSpPr/>
-            <p:nvPr/>
-          </p:nvSpPr>
-          <p:spPr>
-            <a:xfrm>
-              <a:off x="1582435" y="1271984"/>
-              <a:ext cx="1567165" cy="1877616"/>
-            </a:xfrm>
-            <a:prstGeom prst="roundRect">
-              <a:avLst/>
-            </a:prstGeom>
-            <a:noFill/>
-            <a:ln w="28575">
-              <a:solidFill>
-                <a:schemeClr val="tx1">
-                  <a:lumMod val="95000"/>
-                  <a:lumOff val="5000"/>
-                </a:schemeClr>
-              </a:solidFill>
-            </a:ln>
-          </p:spPr>
-          <p:style>
-            <a:lnRef idx="2">
-              <a:schemeClr val="accent6"/>
-            </a:lnRef>
-            <a:fillRef idx="1">
-              <a:schemeClr val="lt1"/>
-            </a:fillRef>
-            <a:effectRef idx="0">
-              <a:schemeClr val="accent6"/>
-            </a:effectRef>
-            <a:fontRef idx="minor">
-              <a:schemeClr val="dk1"/>
-            </a:fontRef>
-          </p:style>
-          <p:txBody>
-            <a:bodyPr rtlCol="0" anchor="ctr"/>
-            <a:lstStyle/>
-            <a:p>
-              <a:pPr algn="ctr"/>
-              <a:endParaRPr lang="en-US" dirty="0"/>
-            </a:p>
-          </p:txBody>
-        </p:sp>
-        <p:sp>
-          <p:nvSpPr>
-            <p:cNvPr id="25" name="TextBox 24">
-              <a:extLst>
-                <a:ext uri="{FF2B5EF4-FFF2-40B4-BE49-F238E27FC236}">
-                  <a16:creationId xmlns:a16="http://schemas.microsoft.com/office/drawing/2014/main" id="{EB99B18F-6066-5FF7-FC09-D508862FC995}"/>
-                </a:ext>
-              </a:extLst>
-            </p:cNvPr>
-            <p:cNvSpPr txBox="1"/>
-            <p:nvPr/>
-          </p:nvSpPr>
-          <p:spPr>
-            <a:xfrm>
-              <a:off x="1716360" y="1249422"/>
-              <a:ext cx="1350050" cy="523220"/>
-            </a:xfrm>
-            <a:prstGeom prst="rect">
-              <a:avLst/>
-            </a:prstGeom>
-            <a:noFill/>
-          </p:spPr>
-          <p:txBody>
-            <a:bodyPr wrap="none" rtlCol="0">
-              <a:spAutoFit/>
-            </a:bodyPr>
-            <a:lstStyle/>
-            <a:p>
-              <a:r>
-                <a:rPr lang="en-US" sz="2800" dirty="0"/>
-                <a:t>Canada </a:t>
-              </a:r>
-            </a:p>
-          </p:txBody>
-        </p:sp>
-      </p:grpSp>
-      <p:grpSp>
-        <p:nvGrpSpPr>
-          <p:cNvPr id="26" name="Group 25">
-            <a:extLst>
-              <a:ext uri="{FF2B5EF4-FFF2-40B4-BE49-F238E27FC236}">
-                <a16:creationId xmlns:a16="http://schemas.microsoft.com/office/drawing/2014/main" id="{14B7C8A0-334F-8D3D-929E-021E8B948599}"/>
-              </a:ext>
-            </a:extLst>
-          </p:cNvPr>
-          <p:cNvGrpSpPr/>
-          <p:nvPr/>
-        </p:nvGrpSpPr>
-        <p:grpSpPr>
-          <a:xfrm>
-            <a:off x="8890881" y="1134771"/>
-            <a:ext cx="2254638" cy="1900178"/>
-            <a:chOff x="1582435" y="1249422"/>
-            <a:chExt cx="1567165" cy="1900178"/>
-          </a:xfrm>
-        </p:grpSpPr>
-        <p:sp>
-          <p:nvSpPr>
-            <p:cNvPr id="27" name="TextBox 26">
-              <a:extLst>
-                <a:ext uri="{FF2B5EF4-FFF2-40B4-BE49-F238E27FC236}">
-                  <a16:creationId xmlns:a16="http://schemas.microsoft.com/office/drawing/2014/main" id="{7C4A669A-2739-D47B-A207-48280B6E052A}"/>
-                </a:ext>
-              </a:extLst>
-            </p:cNvPr>
-            <p:cNvSpPr txBox="1"/>
-            <p:nvPr/>
-          </p:nvSpPr>
-          <p:spPr>
-            <a:xfrm>
-              <a:off x="2024054" y="1683298"/>
-              <a:ext cx="807337" cy="369332"/>
-            </a:xfrm>
-            <a:prstGeom prst="rect">
-              <a:avLst/>
-            </a:prstGeom>
-            <a:noFill/>
-          </p:spPr>
-          <p:txBody>
-            <a:bodyPr wrap="square" rtlCol="0">
-              <a:spAutoFit/>
-            </a:bodyPr>
-            <a:lstStyle/>
-            <a:p>
-              <a:r>
-                <a:rPr lang="en-US" dirty="0"/>
-                <a:t>White </a:t>
-              </a:r>
-            </a:p>
-          </p:txBody>
-        </p:sp>
-        <p:sp>
-          <p:nvSpPr>
-            <p:cNvPr id="28" name="TextBox 27">
-              <a:extLst>
-                <a:ext uri="{FF2B5EF4-FFF2-40B4-BE49-F238E27FC236}">
-                  <a16:creationId xmlns:a16="http://schemas.microsoft.com/office/drawing/2014/main" id="{452CB252-AFA8-B14C-481B-E33ACE7DF442}"/>
-                </a:ext>
-              </a:extLst>
-            </p:cNvPr>
-            <p:cNvSpPr txBox="1"/>
-            <p:nvPr/>
-          </p:nvSpPr>
-          <p:spPr>
-            <a:xfrm>
-              <a:off x="2024054" y="2000247"/>
-              <a:ext cx="762068" cy="369332"/>
-            </a:xfrm>
-            <a:prstGeom prst="rect">
-              <a:avLst/>
-            </a:prstGeom>
-            <a:noFill/>
-          </p:spPr>
-          <p:txBody>
-            <a:bodyPr wrap="none" rtlCol="0">
-              <a:spAutoFit/>
-            </a:bodyPr>
-            <a:lstStyle/>
-            <a:p>
-              <a:r>
-                <a:rPr lang="en-US" dirty="0"/>
-                <a:t>Teslin </a:t>
-              </a:r>
-            </a:p>
-          </p:txBody>
-        </p:sp>
-        <p:sp>
-          <p:nvSpPr>
-            <p:cNvPr id="29" name="Rectangle: Rounded Corners 28">
-              <a:extLst>
-                <a:ext uri="{FF2B5EF4-FFF2-40B4-BE49-F238E27FC236}">
-                  <a16:creationId xmlns:a16="http://schemas.microsoft.com/office/drawing/2014/main" id="{65FE5041-4876-8170-F9C1-4FEB91768058}"/>
-                </a:ext>
-              </a:extLst>
-            </p:cNvPr>
-            <p:cNvSpPr/>
-            <p:nvPr/>
-          </p:nvSpPr>
-          <p:spPr>
-            <a:xfrm>
-              <a:off x="1582435" y="1271984"/>
-              <a:ext cx="1567165" cy="1877616"/>
-            </a:xfrm>
-            <a:prstGeom prst="roundRect">
-              <a:avLst/>
-            </a:prstGeom>
-            <a:noFill/>
-            <a:ln w="28575">
-              <a:solidFill>
-                <a:schemeClr val="tx1">
-                  <a:lumMod val="95000"/>
-                  <a:lumOff val="5000"/>
-                </a:schemeClr>
-              </a:solidFill>
-            </a:ln>
-          </p:spPr>
-          <p:style>
-            <a:lnRef idx="2">
-              <a:schemeClr val="accent6"/>
-            </a:lnRef>
-            <a:fillRef idx="1">
-              <a:schemeClr val="lt1"/>
-            </a:fillRef>
-            <a:effectRef idx="0">
-              <a:schemeClr val="accent6"/>
-            </a:effectRef>
-            <a:fontRef idx="minor">
-              <a:schemeClr val="dk1"/>
-            </a:fontRef>
-          </p:style>
-          <p:txBody>
-            <a:bodyPr rtlCol="0" anchor="ctr"/>
-            <a:lstStyle/>
-            <a:p>
-              <a:pPr algn="ctr"/>
-              <a:endParaRPr lang="en-US" dirty="0"/>
-            </a:p>
-          </p:txBody>
-        </p:sp>
-        <p:sp>
-          <p:nvSpPr>
-            <p:cNvPr id="30" name="TextBox 29">
-              <a:extLst>
-                <a:ext uri="{FF2B5EF4-FFF2-40B4-BE49-F238E27FC236}">
-                  <a16:creationId xmlns:a16="http://schemas.microsoft.com/office/drawing/2014/main" id="{162873D0-A95A-C667-DB0F-B8B573ECC4CE}"/>
-                </a:ext>
-              </a:extLst>
-            </p:cNvPr>
-            <p:cNvSpPr txBox="1"/>
-            <p:nvPr/>
-          </p:nvSpPr>
-          <p:spPr>
-            <a:xfrm>
-              <a:off x="1716360" y="1249422"/>
-              <a:ext cx="1350050" cy="523220"/>
-            </a:xfrm>
-            <a:prstGeom prst="rect">
-              <a:avLst/>
-            </a:prstGeom>
-            <a:noFill/>
-          </p:spPr>
-          <p:txBody>
-            <a:bodyPr wrap="none" rtlCol="0">
-              <a:spAutoFit/>
-            </a:bodyPr>
-            <a:lstStyle/>
-            <a:p>
-              <a:r>
-                <a:rPr lang="en-US" sz="2800" dirty="0"/>
-                <a:t>Canada </a:t>
-              </a:r>
-            </a:p>
-          </p:txBody>
-        </p:sp>
-      </p:grpSp>
-      <p:sp>
-        <p:nvSpPr>
-          <p:cNvPr id="32" name="TextBox 31">
-            <a:extLst>
-              <a:ext uri="{FF2B5EF4-FFF2-40B4-BE49-F238E27FC236}">
-                <a16:creationId xmlns:a16="http://schemas.microsoft.com/office/drawing/2014/main" id="{337EAA1A-79C2-1BF5-7780-AA0883DEA4F5}"/>
-              </a:ext>
-            </a:extLst>
-          </p:cNvPr>
-          <p:cNvSpPr txBox="1"/>
-          <p:nvPr/>
-        </p:nvSpPr>
-        <p:spPr>
-          <a:xfrm>
-            <a:off x="5689734" y="2369057"/>
-            <a:ext cx="1250727" cy="369332"/>
-          </a:xfrm>
-          <a:prstGeom prst="rect">
-            <a:avLst/>
-          </a:prstGeom>
-          <a:noFill/>
-        </p:spPr>
-        <p:txBody>
-          <a:bodyPr wrap="none" rtlCol="0">
-            <a:spAutoFit/>
-          </a:bodyPr>
-          <a:lstStyle/>
-          <a:p>
-            <a:r>
-              <a:rPr lang="en-US" dirty="0"/>
-              <a:t>Border: CA </a:t>
-            </a:r>
-          </a:p>
-        </p:txBody>
-      </p:sp>
-      <p:grpSp>
-        <p:nvGrpSpPr>
-          <p:cNvPr id="36" name="Group 35">
-            <a:extLst>
-              <a:ext uri="{FF2B5EF4-FFF2-40B4-BE49-F238E27FC236}">
-                <a16:creationId xmlns:a16="http://schemas.microsoft.com/office/drawing/2014/main" id="{323BFF64-C701-9F35-EF7E-DCE20D5EC7FE}"/>
-              </a:ext>
-            </a:extLst>
-          </p:cNvPr>
-          <p:cNvGrpSpPr/>
-          <p:nvPr/>
-        </p:nvGrpSpPr>
-        <p:grpSpPr>
-          <a:xfrm>
-            <a:off x="5159223" y="3277575"/>
-            <a:ext cx="2220231" cy="3224821"/>
-            <a:chOff x="5435491" y="3277576"/>
-            <a:chExt cx="1567165" cy="2810586"/>
-          </a:xfrm>
-        </p:grpSpPr>
-        <p:sp>
-          <p:nvSpPr>
-            <p:cNvPr id="31" name="Rectangle: Rounded Corners 30">
-              <a:extLst>
-                <a:ext uri="{FF2B5EF4-FFF2-40B4-BE49-F238E27FC236}">
-                  <a16:creationId xmlns:a16="http://schemas.microsoft.com/office/drawing/2014/main" id="{81181AB2-A2BA-EC0A-243B-6B0B927C96FE}"/>
-                </a:ext>
-              </a:extLst>
-            </p:cNvPr>
-            <p:cNvSpPr/>
-            <p:nvPr/>
-          </p:nvSpPr>
-          <p:spPr>
-            <a:xfrm>
-              <a:off x="5435491" y="3277576"/>
-              <a:ext cx="1567165" cy="2769656"/>
-            </a:xfrm>
-            <a:prstGeom prst="roundRect">
-              <a:avLst/>
-            </a:prstGeom>
-            <a:noFill/>
-            <a:ln w="28575">
-              <a:solidFill>
-                <a:schemeClr val="tx1"/>
-              </a:solidFill>
-              <a:prstDash val="dash"/>
-            </a:ln>
-          </p:spPr>
-          <p:style>
-            <a:lnRef idx="2">
-              <a:schemeClr val="accent6"/>
-            </a:lnRef>
-            <a:fillRef idx="1">
-              <a:schemeClr val="lt1"/>
-            </a:fillRef>
-            <a:effectRef idx="0">
-              <a:schemeClr val="accent6"/>
-            </a:effectRef>
-            <a:fontRef idx="minor">
-              <a:schemeClr val="dk1"/>
-            </a:fontRef>
-          </p:style>
-          <p:txBody>
-            <a:bodyPr rtlCol="0" anchor="ctr"/>
-            <a:lstStyle/>
-            <a:p>
-              <a:pPr algn="ctr"/>
-              <a:endParaRPr lang="en-US" dirty="0"/>
-            </a:p>
-          </p:txBody>
-        </p:sp>
-        <p:sp>
-          <p:nvSpPr>
-            <p:cNvPr id="33" name="TextBox 32">
-              <a:extLst>
-                <a:ext uri="{FF2B5EF4-FFF2-40B4-BE49-F238E27FC236}">
-                  <a16:creationId xmlns:a16="http://schemas.microsoft.com/office/drawing/2014/main" id="{335AFB5E-A09A-AE19-E8BF-99894FE73115}"/>
-                </a:ext>
-              </a:extLst>
-            </p:cNvPr>
-            <p:cNvSpPr txBox="1"/>
-            <p:nvPr/>
-          </p:nvSpPr>
-          <p:spPr>
-            <a:xfrm>
-              <a:off x="5727035" y="3420586"/>
-              <a:ext cx="1247521" cy="369332"/>
-            </a:xfrm>
-            <a:prstGeom prst="rect">
-              <a:avLst/>
-            </a:prstGeom>
-            <a:noFill/>
-          </p:spPr>
-          <p:txBody>
-            <a:bodyPr wrap="none" rtlCol="0">
-              <a:spAutoFit/>
-            </a:bodyPr>
-            <a:lstStyle/>
-            <a:p>
-              <a:r>
-                <a:rPr lang="en-US" dirty="0"/>
-                <a:t>Border: US </a:t>
-              </a:r>
-            </a:p>
-          </p:txBody>
-        </p:sp>
-        <p:sp>
-          <p:nvSpPr>
-            <p:cNvPr id="34" name="TextBox 33">
-              <a:extLst>
-                <a:ext uri="{FF2B5EF4-FFF2-40B4-BE49-F238E27FC236}">
-                  <a16:creationId xmlns:a16="http://schemas.microsoft.com/office/drawing/2014/main" id="{A2416B91-FE9D-61C6-D61B-F321456BD283}"/>
-                </a:ext>
-              </a:extLst>
-            </p:cNvPr>
-            <p:cNvSpPr txBox="1"/>
-            <p:nvPr/>
-          </p:nvSpPr>
-          <p:spPr>
-            <a:xfrm>
-              <a:off x="5764819" y="5564942"/>
-              <a:ext cx="662361" cy="523220"/>
-            </a:xfrm>
-            <a:prstGeom prst="rect">
-              <a:avLst/>
-            </a:prstGeom>
-            <a:noFill/>
-          </p:spPr>
-          <p:txBody>
-            <a:bodyPr wrap="none" rtlCol="0">
-              <a:spAutoFit/>
-            </a:bodyPr>
-            <a:lstStyle/>
-            <a:p>
-              <a:r>
-                <a:rPr lang="en-US" sz="2800" dirty="0"/>
-                <a:t>US </a:t>
-              </a:r>
-            </a:p>
-          </p:txBody>
-        </p:sp>
-      </p:grpSp>
-      <p:grpSp>
-        <p:nvGrpSpPr>
-          <p:cNvPr id="37" name="Group 36">
-            <a:extLst>
-              <a:ext uri="{FF2B5EF4-FFF2-40B4-BE49-F238E27FC236}">
-                <a16:creationId xmlns:a16="http://schemas.microsoft.com/office/drawing/2014/main" id="{5C539A01-A08E-3417-7763-B853EA6B26FA}"/>
-              </a:ext>
-            </a:extLst>
-          </p:cNvPr>
-          <p:cNvGrpSpPr/>
-          <p:nvPr/>
-        </p:nvGrpSpPr>
-        <p:grpSpPr>
-          <a:xfrm>
-            <a:off x="8890881" y="3379472"/>
-            <a:ext cx="2496785" cy="3075962"/>
-            <a:chOff x="5435491" y="3277576"/>
-            <a:chExt cx="1735478" cy="2810586"/>
-          </a:xfrm>
-        </p:grpSpPr>
-        <p:sp>
-          <p:nvSpPr>
-            <p:cNvPr id="38" name="Rectangle: Rounded Corners 37">
-              <a:extLst>
-                <a:ext uri="{FF2B5EF4-FFF2-40B4-BE49-F238E27FC236}">
-                  <a16:creationId xmlns:a16="http://schemas.microsoft.com/office/drawing/2014/main" id="{B06A5508-2195-BE78-E75D-6F60F1757A79}"/>
-                </a:ext>
-              </a:extLst>
-            </p:cNvPr>
-            <p:cNvSpPr/>
-            <p:nvPr/>
-          </p:nvSpPr>
-          <p:spPr>
-            <a:xfrm>
-              <a:off x="5435491" y="3277576"/>
-              <a:ext cx="1567165" cy="2769656"/>
-            </a:xfrm>
-            <a:prstGeom prst="roundRect">
-              <a:avLst/>
-            </a:prstGeom>
-            <a:noFill/>
-            <a:ln w="28575">
-              <a:solidFill>
-                <a:schemeClr val="tx1"/>
-              </a:solidFill>
-              <a:prstDash val="dash"/>
-            </a:ln>
-          </p:spPr>
-          <p:style>
-            <a:lnRef idx="2">
-              <a:schemeClr val="accent6"/>
-            </a:lnRef>
-            <a:fillRef idx="1">
-              <a:schemeClr val="lt1"/>
-            </a:fillRef>
-            <a:effectRef idx="0">
-              <a:schemeClr val="accent6"/>
-            </a:effectRef>
-            <a:fontRef idx="minor">
-              <a:schemeClr val="dk1"/>
-            </a:fontRef>
-          </p:style>
-          <p:txBody>
-            <a:bodyPr rtlCol="0" anchor="ctr"/>
-            <a:lstStyle/>
-            <a:p>
-              <a:pPr algn="ctr"/>
-              <a:endParaRPr lang="en-US" dirty="0"/>
-            </a:p>
-          </p:txBody>
-        </p:sp>
-        <p:sp>
-          <p:nvSpPr>
-            <p:cNvPr id="39" name="TextBox 38">
-              <a:extLst>
-                <a:ext uri="{FF2B5EF4-FFF2-40B4-BE49-F238E27FC236}">
-                  <a16:creationId xmlns:a16="http://schemas.microsoft.com/office/drawing/2014/main" id="{D4C740A2-743E-785C-DB31-DAAC2EDA02AE}"/>
-                </a:ext>
-              </a:extLst>
-            </p:cNvPr>
-            <p:cNvSpPr txBox="1"/>
-            <p:nvPr/>
-          </p:nvSpPr>
-          <p:spPr>
-            <a:xfrm>
-              <a:off x="5923448" y="3320237"/>
-              <a:ext cx="1247521" cy="369332"/>
-            </a:xfrm>
-            <a:prstGeom prst="rect">
-              <a:avLst/>
-            </a:prstGeom>
-            <a:noFill/>
-          </p:spPr>
-          <p:txBody>
-            <a:bodyPr wrap="none" rtlCol="0">
-              <a:spAutoFit/>
-            </a:bodyPr>
-            <a:lstStyle/>
-            <a:p>
-              <a:r>
-                <a:rPr lang="en-US" dirty="0"/>
-                <a:t>Border: US </a:t>
-              </a:r>
-            </a:p>
-          </p:txBody>
-        </p:sp>
-        <p:sp>
-          <p:nvSpPr>
-            <p:cNvPr id="40" name="TextBox 39">
-              <a:extLst>
-                <a:ext uri="{FF2B5EF4-FFF2-40B4-BE49-F238E27FC236}">
-                  <a16:creationId xmlns:a16="http://schemas.microsoft.com/office/drawing/2014/main" id="{AE20CB52-6484-ED5E-2C62-E2649B69FF5F}"/>
-                </a:ext>
-              </a:extLst>
-            </p:cNvPr>
-            <p:cNvSpPr txBox="1"/>
-            <p:nvPr/>
-          </p:nvSpPr>
-          <p:spPr>
-            <a:xfrm>
-              <a:off x="5764819" y="5564942"/>
-              <a:ext cx="662361" cy="523220"/>
-            </a:xfrm>
-            <a:prstGeom prst="rect">
-              <a:avLst/>
-            </a:prstGeom>
-            <a:noFill/>
-          </p:spPr>
-          <p:txBody>
-            <a:bodyPr wrap="none" rtlCol="0">
-              <a:spAutoFit/>
-            </a:bodyPr>
-            <a:lstStyle/>
-            <a:p>
-              <a:r>
-                <a:rPr lang="en-US" sz="2800" dirty="0"/>
-                <a:t>US </a:t>
-              </a:r>
-            </a:p>
-          </p:txBody>
-        </p:sp>
-      </p:grpSp>
-      <p:cxnSp>
-        <p:nvCxnSpPr>
-          <p:cNvPr id="42" name="Straight Arrow Connector 41">
-            <a:extLst>
-              <a:ext uri="{FF2B5EF4-FFF2-40B4-BE49-F238E27FC236}">
-                <a16:creationId xmlns:a16="http://schemas.microsoft.com/office/drawing/2014/main" id="{DC62243A-8767-0DC4-3C7D-0E810D0BD376}"/>
-              </a:ext>
-            </a:extLst>
-          </p:cNvPr>
-          <p:cNvCxnSpPr>
-            <a:cxnSpLocks/>
-            <a:stCxn id="13" idx="3"/>
-          </p:cNvCxnSpPr>
-          <p:nvPr/>
-        </p:nvCxnSpPr>
-        <p:spPr>
-          <a:xfrm>
-            <a:off x="3599305" y="1805416"/>
-            <a:ext cx="2142929" cy="2308"/>
-          </a:xfrm>
-          <a:prstGeom prst="straightConnector1">
-            <a:avLst/>
-          </a:prstGeom>
-          <a:ln w="50800">
-            <a:solidFill>
-              <a:schemeClr val="tx1"/>
-            </a:solidFill>
-            <a:tailEnd type="triangle"/>
-          </a:ln>
-        </p:spPr>
-        <p:style>
-          <a:lnRef idx="1">
-            <a:schemeClr val="dk1"/>
-          </a:lnRef>
-          <a:fillRef idx="0">
-            <a:schemeClr val="dk1"/>
-          </a:fillRef>
-          <a:effectRef idx="0">
-            <a:schemeClr val="dk1"/>
-          </a:effectRef>
-          <a:fontRef idx="minor">
-            <a:schemeClr val="tx1"/>
-          </a:fontRef>
-        </p:style>
-      </p:cxnSp>
-      <p:cxnSp>
-        <p:nvCxnSpPr>
-          <p:cNvPr id="43" name="Straight Arrow Connector 42">
-            <a:extLst>
-              <a:ext uri="{FF2B5EF4-FFF2-40B4-BE49-F238E27FC236}">
-                <a16:creationId xmlns:a16="http://schemas.microsoft.com/office/drawing/2014/main" id="{763A6BFC-E274-638E-0399-50C056778B3D}"/>
-              </a:ext>
-            </a:extLst>
-          </p:cNvPr>
-          <p:cNvCxnSpPr>
-            <a:cxnSpLocks/>
-          </p:cNvCxnSpPr>
-          <p:nvPr/>
-        </p:nvCxnSpPr>
-        <p:spPr>
-          <a:xfrm>
-            <a:off x="6519055" y="1773933"/>
-            <a:ext cx="3032613" cy="0"/>
-          </a:xfrm>
-          <a:prstGeom prst="straightConnector1">
-            <a:avLst/>
-          </a:prstGeom>
-          <a:ln w="50800">
-            <a:solidFill>
-              <a:schemeClr val="tx1"/>
-            </a:solidFill>
-            <a:tailEnd type="triangle"/>
-          </a:ln>
-        </p:spPr>
-        <p:style>
-          <a:lnRef idx="1">
-            <a:schemeClr val="dk1"/>
-          </a:lnRef>
-          <a:fillRef idx="0">
-            <a:schemeClr val="dk1"/>
-          </a:fillRef>
-          <a:effectRef idx="0">
-            <a:schemeClr val="dk1"/>
-          </a:effectRef>
-          <a:fontRef idx="minor">
-            <a:schemeClr val="tx1"/>
-          </a:fontRef>
-        </p:style>
-      </p:cxnSp>
-      <p:cxnSp>
-        <p:nvCxnSpPr>
-          <p:cNvPr id="44" name="Straight Arrow Connector 43">
-            <a:extLst>
-              <a:ext uri="{FF2B5EF4-FFF2-40B4-BE49-F238E27FC236}">
-                <a16:creationId xmlns:a16="http://schemas.microsoft.com/office/drawing/2014/main" id="{E2F5D9AA-284B-5C2D-E4DC-05076AFB0FA2}"/>
-              </a:ext>
-            </a:extLst>
-          </p:cNvPr>
-          <p:cNvCxnSpPr>
-            <a:cxnSpLocks/>
-          </p:cNvCxnSpPr>
-          <p:nvPr/>
-        </p:nvCxnSpPr>
-        <p:spPr>
-          <a:xfrm>
-            <a:off x="3674330" y="2123398"/>
-            <a:ext cx="2035540" cy="0"/>
-          </a:xfrm>
-          <a:prstGeom prst="straightConnector1">
-            <a:avLst/>
-          </a:prstGeom>
-          <a:ln w="50800">
-            <a:solidFill>
-              <a:schemeClr val="tx1"/>
-            </a:solidFill>
-            <a:tailEnd type="triangle"/>
-          </a:ln>
-        </p:spPr>
-        <p:style>
-          <a:lnRef idx="1">
-            <a:schemeClr val="dk1"/>
-          </a:lnRef>
-          <a:fillRef idx="0">
-            <a:schemeClr val="dk1"/>
-          </a:fillRef>
-          <a:effectRef idx="0">
-            <a:schemeClr val="dk1"/>
-          </a:effectRef>
-          <a:fontRef idx="minor">
-            <a:schemeClr val="tx1"/>
-          </a:fontRef>
-        </p:style>
-      </p:cxnSp>
-      <p:cxnSp>
-        <p:nvCxnSpPr>
-          <p:cNvPr id="45" name="Straight Arrow Connector 44">
-            <a:extLst>
-              <a:ext uri="{FF2B5EF4-FFF2-40B4-BE49-F238E27FC236}">
-                <a16:creationId xmlns:a16="http://schemas.microsoft.com/office/drawing/2014/main" id="{44741ABD-B140-A391-2851-4FD07612BED7}"/>
-              </a:ext>
-            </a:extLst>
-          </p:cNvPr>
-          <p:cNvCxnSpPr>
-            <a:cxnSpLocks/>
-          </p:cNvCxnSpPr>
-          <p:nvPr/>
-        </p:nvCxnSpPr>
-        <p:spPr>
-          <a:xfrm>
-            <a:off x="6541468" y="2065594"/>
-            <a:ext cx="3032613" cy="0"/>
-          </a:xfrm>
-          <a:prstGeom prst="straightConnector1">
-            <a:avLst/>
-          </a:prstGeom>
-          <a:ln w="50800">
-            <a:solidFill>
-              <a:schemeClr val="tx1"/>
-            </a:solidFill>
-            <a:tailEnd type="triangle"/>
-          </a:ln>
-        </p:spPr>
-        <p:style>
-          <a:lnRef idx="1">
-            <a:schemeClr val="dk1"/>
-          </a:lnRef>
-          <a:fillRef idx="0">
-            <a:schemeClr val="dk1"/>
-          </a:fillRef>
-          <a:effectRef idx="0">
-            <a:schemeClr val="dk1"/>
-          </a:effectRef>
-          <a:fontRef idx="minor">
-            <a:schemeClr val="tx1"/>
-          </a:fontRef>
-        </p:style>
-      </p:cxnSp>
-      <p:cxnSp>
-        <p:nvCxnSpPr>
-          <p:cNvPr id="46" name="Straight Arrow Connector 45">
-            <a:extLst>
-              <a:ext uri="{FF2B5EF4-FFF2-40B4-BE49-F238E27FC236}">
-                <a16:creationId xmlns:a16="http://schemas.microsoft.com/office/drawing/2014/main" id="{0B73B69E-E1EF-A79F-B8CA-20ECC5313A56}"/>
-              </a:ext>
-            </a:extLst>
-          </p:cNvPr>
-          <p:cNvCxnSpPr>
-            <a:cxnSpLocks/>
-          </p:cNvCxnSpPr>
-          <p:nvPr/>
-        </p:nvCxnSpPr>
-        <p:spPr>
-          <a:xfrm flipV="1">
-            <a:off x="3927704" y="2542857"/>
-            <a:ext cx="1782297" cy="238941"/>
-          </a:xfrm>
-          <a:prstGeom prst="straightConnector1">
-            <a:avLst/>
-          </a:prstGeom>
-          <a:ln w="50800">
-            <a:solidFill>
-              <a:schemeClr val="tx1"/>
-            </a:solidFill>
-            <a:tailEnd type="triangle"/>
-          </a:ln>
-        </p:spPr>
-        <p:style>
-          <a:lnRef idx="1">
-            <a:schemeClr val="dk1"/>
-          </a:lnRef>
-          <a:fillRef idx="0">
-            <a:schemeClr val="dk1"/>
-          </a:fillRef>
-          <a:effectRef idx="0">
-            <a:schemeClr val="dk1"/>
-          </a:effectRef>
-          <a:fontRef idx="minor">
-            <a:schemeClr val="tx1"/>
-          </a:fontRef>
-        </p:style>
-      </p:cxnSp>
-      <p:cxnSp>
-        <p:nvCxnSpPr>
-          <p:cNvPr id="47" name="Straight Arrow Connector 46">
-            <a:extLst>
-              <a:ext uri="{FF2B5EF4-FFF2-40B4-BE49-F238E27FC236}">
-                <a16:creationId xmlns:a16="http://schemas.microsoft.com/office/drawing/2014/main" id="{82C7542B-8C5B-9675-65A6-DE9D1241B775}"/>
-              </a:ext>
-            </a:extLst>
-          </p:cNvPr>
-          <p:cNvCxnSpPr>
-            <a:cxnSpLocks/>
-          </p:cNvCxnSpPr>
-          <p:nvPr/>
-        </p:nvCxnSpPr>
-        <p:spPr>
-          <a:xfrm>
-            <a:off x="3908574" y="2865310"/>
-            <a:ext cx="1715563" cy="757811"/>
-          </a:xfrm>
-          <a:prstGeom prst="straightConnector1">
-            <a:avLst/>
-          </a:prstGeom>
-          <a:ln w="50800">
-            <a:solidFill>
-              <a:schemeClr val="tx1"/>
-            </a:solidFill>
-            <a:tailEnd type="triangle"/>
-          </a:ln>
-        </p:spPr>
-        <p:style>
-          <a:lnRef idx="1">
-            <a:schemeClr val="dk1"/>
-          </a:lnRef>
-          <a:fillRef idx="0">
-            <a:schemeClr val="dk1"/>
-          </a:fillRef>
-          <a:effectRef idx="0">
-            <a:schemeClr val="dk1"/>
-          </a:effectRef>
-          <a:fontRef idx="minor">
-            <a:schemeClr val="tx1"/>
-          </a:fontRef>
-        </p:style>
-      </p:cxnSp>
-      <p:cxnSp>
-        <p:nvCxnSpPr>
-          <p:cNvPr id="53" name="Straight Arrow Connector 52">
-            <a:extLst>
-              <a:ext uri="{FF2B5EF4-FFF2-40B4-BE49-F238E27FC236}">
-                <a16:creationId xmlns:a16="http://schemas.microsoft.com/office/drawing/2014/main" id="{0D3813BC-BC76-B6CF-A101-7BA7432837C6}"/>
-              </a:ext>
-            </a:extLst>
-          </p:cNvPr>
-          <p:cNvCxnSpPr>
-            <a:cxnSpLocks/>
-          </p:cNvCxnSpPr>
-          <p:nvPr/>
-        </p:nvCxnSpPr>
-        <p:spPr>
-          <a:xfrm flipV="1">
-            <a:off x="7058506" y="2540015"/>
-            <a:ext cx="2431810" cy="13708"/>
-          </a:xfrm>
-          <a:prstGeom prst="straightConnector1">
-            <a:avLst/>
-          </a:prstGeom>
-          <a:ln w="50800">
-            <a:solidFill>
-              <a:schemeClr val="tx1"/>
-            </a:solidFill>
-            <a:tailEnd type="triangle"/>
-          </a:ln>
-        </p:spPr>
-        <p:style>
-          <a:lnRef idx="1">
-            <a:schemeClr val="dk1"/>
-          </a:lnRef>
-          <a:fillRef idx="0">
-            <a:schemeClr val="dk1"/>
-          </a:fillRef>
-          <a:effectRef idx="0">
-            <a:schemeClr val="dk1"/>
-          </a:effectRef>
-          <a:fontRef idx="minor">
-            <a:schemeClr val="tx1"/>
-          </a:fontRef>
-        </p:style>
-      </p:cxnSp>
-      <p:cxnSp>
-        <p:nvCxnSpPr>
-          <p:cNvPr id="55" name="Straight Arrow Connector 54">
-            <a:extLst>
-              <a:ext uri="{FF2B5EF4-FFF2-40B4-BE49-F238E27FC236}">
-                <a16:creationId xmlns:a16="http://schemas.microsoft.com/office/drawing/2014/main" id="{55DCDD96-1A44-8483-D6DB-3E594A57938E}"/>
-              </a:ext>
-            </a:extLst>
-          </p:cNvPr>
-          <p:cNvCxnSpPr>
-            <a:cxnSpLocks/>
-          </p:cNvCxnSpPr>
-          <p:nvPr/>
-        </p:nvCxnSpPr>
-        <p:spPr>
-          <a:xfrm>
-            <a:off x="6895115" y="3605252"/>
-            <a:ext cx="2715772" cy="0"/>
-          </a:xfrm>
-          <a:prstGeom prst="straightConnector1">
-            <a:avLst/>
-          </a:prstGeom>
-          <a:ln w="50800">
-            <a:solidFill>
-              <a:schemeClr val="tx1"/>
-            </a:solidFill>
-            <a:tailEnd type="triangle"/>
-          </a:ln>
-        </p:spPr>
-        <p:style>
-          <a:lnRef idx="1">
-            <a:schemeClr val="dk1"/>
-          </a:lnRef>
-          <a:fillRef idx="0">
-            <a:schemeClr val="dk1"/>
-          </a:fillRef>
-          <a:effectRef idx="0">
-            <a:schemeClr val="dk1"/>
-          </a:effectRef>
-          <a:fontRef idx="minor">
-            <a:schemeClr val="tx1"/>
-          </a:fontRef>
-        </p:style>
-      </p:cxnSp>
-      <p:sp>
-        <p:nvSpPr>
-          <p:cNvPr id="56" name="TextBox 55">
-            <a:extLst>
-              <a:ext uri="{FF2B5EF4-FFF2-40B4-BE49-F238E27FC236}">
-                <a16:creationId xmlns:a16="http://schemas.microsoft.com/office/drawing/2014/main" id="{DF82E786-3EF5-EE09-EECD-7801033B0899}"/>
-              </a:ext>
-            </a:extLst>
-          </p:cNvPr>
-          <p:cNvSpPr txBox="1"/>
-          <p:nvPr/>
-        </p:nvSpPr>
-        <p:spPr>
-          <a:xfrm>
-            <a:off x="9490316" y="2368423"/>
-            <a:ext cx="1250727" cy="369332"/>
-          </a:xfrm>
-          <a:prstGeom prst="rect">
-            <a:avLst/>
-          </a:prstGeom>
-          <a:noFill/>
-        </p:spPr>
-        <p:txBody>
-          <a:bodyPr wrap="none" rtlCol="0">
-            <a:spAutoFit/>
-          </a:bodyPr>
-          <a:lstStyle/>
-          <a:p>
-            <a:r>
-              <a:rPr lang="en-US" dirty="0"/>
-              <a:t>Border: CA </a:t>
-            </a:r>
-          </a:p>
-        </p:txBody>
-      </p:sp>
-      <p:sp>
-        <p:nvSpPr>
-          <p:cNvPr id="59" name="Rectangle: Rounded Corners 58">
-            <a:extLst>
-              <a:ext uri="{FF2B5EF4-FFF2-40B4-BE49-F238E27FC236}">
-                <a16:creationId xmlns:a16="http://schemas.microsoft.com/office/drawing/2014/main" id="{4A617BC4-7A15-E3FF-B03D-A4D00440EDED}"/>
-              </a:ext>
-            </a:extLst>
-          </p:cNvPr>
-          <p:cNvSpPr/>
-          <p:nvPr/>
-        </p:nvSpPr>
-        <p:spPr>
-          <a:xfrm>
-            <a:off x="2341911" y="3206972"/>
-            <a:ext cx="1291753" cy="1138158"/>
-          </a:xfrm>
-          <a:prstGeom prst="roundRect">
-            <a:avLst/>
-          </a:prstGeom>
-        </p:spPr>
-        <p:style>
-          <a:lnRef idx="2">
-            <a:schemeClr val="accent6"/>
-          </a:lnRef>
-          <a:fillRef idx="1">
-            <a:schemeClr val="lt1"/>
-          </a:fillRef>
-          <a:effectRef idx="0">
-            <a:schemeClr val="accent6"/>
-          </a:effectRef>
-          <a:fontRef idx="minor">
-            <a:schemeClr val="dk1"/>
-          </a:fontRef>
-        </p:style>
-        <p:txBody>
-          <a:bodyPr rtlCol="0" anchor="ctr"/>
-          <a:lstStyle/>
-          <a:p>
-            <a:pPr algn="ctr"/>
-            <a:endParaRPr lang="en-US"/>
-          </a:p>
-        </p:txBody>
-      </p:sp>
-      <p:sp>
-        <p:nvSpPr>
-          <p:cNvPr id="57" name="TextBox 56">
-            <a:extLst>
-              <a:ext uri="{FF2B5EF4-FFF2-40B4-BE49-F238E27FC236}">
-                <a16:creationId xmlns:a16="http://schemas.microsoft.com/office/drawing/2014/main" id="{964205CF-9681-9C45-972A-8F4CB28C6E96}"/>
-              </a:ext>
-            </a:extLst>
-          </p:cNvPr>
-          <p:cNvSpPr txBox="1"/>
-          <p:nvPr/>
-        </p:nvSpPr>
-        <p:spPr>
-          <a:xfrm>
-            <a:off x="2378463" y="3203384"/>
-            <a:ext cx="1130438" cy="461665"/>
-          </a:xfrm>
-          <a:prstGeom prst="rect">
-            <a:avLst/>
-          </a:prstGeom>
-          <a:noFill/>
-        </p:spPr>
-        <p:txBody>
-          <a:bodyPr wrap="none" rtlCol="0">
-            <a:spAutoFit/>
-          </a:bodyPr>
-          <a:lstStyle/>
-          <a:p>
-            <a:r>
-              <a:rPr lang="en-US" sz="2400" dirty="0"/>
-              <a:t>Tanana</a:t>
-            </a:r>
-            <a:r>
-              <a:rPr lang="en-US" dirty="0"/>
-              <a:t> </a:t>
-            </a:r>
-          </a:p>
-        </p:txBody>
-      </p:sp>
-      <p:sp>
-        <p:nvSpPr>
-          <p:cNvPr id="61" name="TextBox 60">
-            <a:extLst>
-              <a:ext uri="{FF2B5EF4-FFF2-40B4-BE49-F238E27FC236}">
-                <a16:creationId xmlns:a16="http://schemas.microsoft.com/office/drawing/2014/main" id="{DA57FDB9-8199-1330-2A2A-6B36B7C5EDD7}"/>
-              </a:ext>
-            </a:extLst>
-          </p:cNvPr>
-          <p:cNvSpPr txBox="1"/>
-          <p:nvPr/>
-        </p:nvSpPr>
-        <p:spPr>
-          <a:xfrm>
-            <a:off x="5534260" y="2724129"/>
-            <a:ext cx="1553630" cy="369332"/>
-          </a:xfrm>
-          <a:prstGeom prst="rect">
-            <a:avLst/>
-          </a:prstGeom>
-          <a:noFill/>
-        </p:spPr>
-        <p:txBody>
-          <a:bodyPr wrap="none" rtlCol="0">
-            <a:spAutoFit/>
-          </a:bodyPr>
-          <a:lstStyle/>
-          <a:p>
-            <a:r>
-              <a:rPr lang="en-US" dirty="0"/>
-              <a:t>Porcupine: CA </a:t>
-            </a:r>
-          </a:p>
-        </p:txBody>
-      </p:sp>
-      <p:cxnSp>
-        <p:nvCxnSpPr>
-          <p:cNvPr id="62" name="Straight Arrow Connector 61">
-            <a:extLst>
-              <a:ext uri="{FF2B5EF4-FFF2-40B4-BE49-F238E27FC236}">
-                <a16:creationId xmlns:a16="http://schemas.microsoft.com/office/drawing/2014/main" id="{2DBF2338-804F-54D6-4259-32EC0E81A59D}"/>
-              </a:ext>
-            </a:extLst>
-          </p:cNvPr>
-          <p:cNvCxnSpPr>
-            <a:cxnSpLocks/>
-          </p:cNvCxnSpPr>
-          <p:nvPr/>
-        </p:nvCxnSpPr>
-        <p:spPr>
-          <a:xfrm>
-            <a:off x="3917656" y="2846308"/>
-            <a:ext cx="1689030" cy="68592"/>
-          </a:xfrm>
-          <a:prstGeom prst="straightConnector1">
-            <a:avLst/>
-          </a:prstGeom>
-          <a:ln w="50800">
-            <a:solidFill>
-              <a:schemeClr val="tx1"/>
-            </a:solidFill>
-            <a:tailEnd type="triangle"/>
-          </a:ln>
-        </p:spPr>
-        <p:style>
-          <a:lnRef idx="1">
-            <a:schemeClr val="dk1"/>
-          </a:lnRef>
-          <a:fillRef idx="0">
-            <a:schemeClr val="dk1"/>
-          </a:fillRef>
-          <a:effectRef idx="0">
-            <a:schemeClr val="dk1"/>
-          </a:effectRef>
-          <a:fontRef idx="minor">
-            <a:schemeClr val="tx1"/>
-          </a:fontRef>
-        </p:style>
-      </p:cxnSp>
-      <p:sp>
-        <p:nvSpPr>
-          <p:cNvPr id="65" name="TextBox 64">
-            <a:extLst>
-              <a:ext uri="{FF2B5EF4-FFF2-40B4-BE49-F238E27FC236}">
-                <a16:creationId xmlns:a16="http://schemas.microsoft.com/office/drawing/2014/main" id="{14810F25-770F-8A5D-99B0-32445327381A}"/>
-              </a:ext>
-            </a:extLst>
-          </p:cNvPr>
-          <p:cNvSpPr txBox="1"/>
-          <p:nvPr/>
-        </p:nvSpPr>
-        <p:spPr>
-          <a:xfrm>
-            <a:off x="9490316" y="2653711"/>
-            <a:ext cx="1553630" cy="369332"/>
-          </a:xfrm>
-          <a:prstGeom prst="rect">
-            <a:avLst/>
-          </a:prstGeom>
-          <a:noFill/>
-        </p:spPr>
-        <p:txBody>
-          <a:bodyPr wrap="none" rtlCol="0">
-            <a:spAutoFit/>
-          </a:bodyPr>
-          <a:lstStyle/>
-          <a:p>
-            <a:r>
-              <a:rPr lang="en-US" dirty="0"/>
-              <a:t>Porcupine: CA </a:t>
-            </a:r>
-          </a:p>
-        </p:txBody>
-      </p:sp>
-      <p:cxnSp>
-        <p:nvCxnSpPr>
-          <p:cNvPr id="66" name="Straight Arrow Connector 65">
-            <a:extLst>
-              <a:ext uri="{FF2B5EF4-FFF2-40B4-BE49-F238E27FC236}">
-                <a16:creationId xmlns:a16="http://schemas.microsoft.com/office/drawing/2014/main" id="{E8A4CB82-838F-B3EC-C2B8-1F965A79AC4E}"/>
-              </a:ext>
-            </a:extLst>
-          </p:cNvPr>
-          <p:cNvCxnSpPr>
-            <a:cxnSpLocks/>
-            <a:endCxn id="65" idx="1"/>
-          </p:cNvCxnSpPr>
-          <p:nvPr/>
-        </p:nvCxnSpPr>
-        <p:spPr>
-          <a:xfrm flipV="1">
-            <a:off x="7058506" y="2838377"/>
-            <a:ext cx="2431810" cy="20097"/>
-          </a:xfrm>
-          <a:prstGeom prst="straightConnector1">
-            <a:avLst/>
-          </a:prstGeom>
-          <a:ln w="50800">
-            <a:solidFill>
-              <a:schemeClr val="tx1"/>
-            </a:solidFill>
-            <a:tailEnd type="triangle"/>
-          </a:ln>
-        </p:spPr>
-        <p:style>
-          <a:lnRef idx="1">
-            <a:schemeClr val="dk1"/>
-          </a:lnRef>
-          <a:fillRef idx="0">
-            <a:schemeClr val="dk1"/>
-          </a:fillRef>
-          <a:effectRef idx="0">
-            <a:schemeClr val="dk1"/>
-          </a:effectRef>
-          <a:fontRef idx="minor">
-            <a:schemeClr val="tx1"/>
-          </a:fontRef>
-        </p:style>
-      </p:cxnSp>
-      <p:sp>
-        <p:nvSpPr>
-          <p:cNvPr id="68" name="TextBox 67">
-            <a:extLst>
-              <a:ext uri="{FF2B5EF4-FFF2-40B4-BE49-F238E27FC236}">
-                <a16:creationId xmlns:a16="http://schemas.microsoft.com/office/drawing/2014/main" id="{FBC17857-9398-45F7-FA3E-FD3A854D614B}"/>
-              </a:ext>
-            </a:extLst>
-          </p:cNvPr>
-          <p:cNvSpPr txBox="1"/>
-          <p:nvPr/>
-        </p:nvSpPr>
-        <p:spPr>
-          <a:xfrm>
-            <a:off x="2498527" y="3624304"/>
-            <a:ext cx="793615" cy="369332"/>
-          </a:xfrm>
-          <a:prstGeom prst="rect">
-            <a:avLst/>
-          </a:prstGeom>
-          <a:noFill/>
-        </p:spPr>
-        <p:txBody>
-          <a:bodyPr wrap="none" rtlCol="0">
-            <a:spAutoFit/>
-          </a:bodyPr>
-          <a:lstStyle/>
-          <a:p>
-            <a:r>
-              <a:rPr lang="en-US" dirty="0"/>
-              <a:t>Toklat </a:t>
-            </a:r>
-          </a:p>
-        </p:txBody>
-      </p:sp>
-      <p:sp>
-        <p:nvSpPr>
-          <p:cNvPr id="69" name="TextBox 68">
-            <a:extLst>
-              <a:ext uri="{FF2B5EF4-FFF2-40B4-BE49-F238E27FC236}">
-                <a16:creationId xmlns:a16="http://schemas.microsoft.com/office/drawing/2014/main" id="{45B456B8-D869-C4BC-E9E1-E6834632C879}"/>
-              </a:ext>
-            </a:extLst>
-          </p:cNvPr>
-          <p:cNvSpPr txBox="1"/>
-          <p:nvPr/>
-        </p:nvSpPr>
-        <p:spPr>
-          <a:xfrm>
-            <a:off x="2515219" y="3921877"/>
-            <a:ext cx="824265" cy="369332"/>
-          </a:xfrm>
-          <a:prstGeom prst="rect">
-            <a:avLst/>
-          </a:prstGeom>
-          <a:noFill/>
-        </p:spPr>
-        <p:txBody>
-          <a:bodyPr wrap="none" rtlCol="0">
-            <a:spAutoFit/>
-          </a:bodyPr>
-          <a:lstStyle/>
-          <a:p>
-            <a:r>
-              <a:rPr lang="en-US" dirty="0"/>
-              <a:t>Upper </a:t>
-            </a:r>
-          </a:p>
-        </p:txBody>
-      </p:sp>
-      <p:sp>
-        <p:nvSpPr>
-          <p:cNvPr id="70" name="Rectangle: Rounded Corners 69">
-            <a:extLst>
-              <a:ext uri="{FF2B5EF4-FFF2-40B4-BE49-F238E27FC236}">
-                <a16:creationId xmlns:a16="http://schemas.microsoft.com/office/drawing/2014/main" id="{926A97F7-1BA7-3D64-130B-FA1CC53540E0}"/>
-              </a:ext>
-            </a:extLst>
-          </p:cNvPr>
-          <p:cNvSpPr/>
-          <p:nvPr/>
-        </p:nvSpPr>
-        <p:spPr>
-          <a:xfrm>
-            <a:off x="2301920" y="4569630"/>
-            <a:ext cx="1291753" cy="770153"/>
-          </a:xfrm>
-          <a:prstGeom prst="roundRect">
-            <a:avLst/>
-          </a:prstGeom>
-          <a:ln w="19050">
-            <a:solidFill>
-              <a:schemeClr val="tx1"/>
-            </a:solidFill>
-            <a:prstDash val="sysDash"/>
-          </a:ln>
-        </p:spPr>
-        <p:style>
-          <a:lnRef idx="2">
-            <a:schemeClr val="accent6"/>
-          </a:lnRef>
-          <a:fillRef idx="1">
-            <a:schemeClr val="lt1"/>
-          </a:fillRef>
-          <a:effectRef idx="0">
-            <a:schemeClr val="accent6"/>
-          </a:effectRef>
-          <a:fontRef idx="minor">
-            <a:schemeClr val="dk1"/>
-          </a:fontRef>
-        </p:style>
-        <p:txBody>
-          <a:bodyPr rtlCol="0" anchor="ctr"/>
-          <a:lstStyle/>
-          <a:p>
-            <a:pPr algn="ctr"/>
-            <a:r>
-              <a:rPr lang="en-US" dirty="0"/>
-              <a:t>Middle</a:t>
-            </a:r>
-          </a:p>
-        </p:txBody>
-      </p:sp>
-      <p:sp>
-        <p:nvSpPr>
-          <p:cNvPr id="71" name="Rectangle: Rounded Corners 70">
-            <a:extLst>
-              <a:ext uri="{FF2B5EF4-FFF2-40B4-BE49-F238E27FC236}">
-                <a16:creationId xmlns:a16="http://schemas.microsoft.com/office/drawing/2014/main" id="{6AB7FAED-A695-D164-ACEC-55E77DAE5E93}"/>
-              </a:ext>
-            </a:extLst>
-          </p:cNvPr>
-          <p:cNvSpPr/>
-          <p:nvPr/>
-        </p:nvSpPr>
-        <p:spPr>
-          <a:xfrm>
-            <a:off x="2358644" y="5467484"/>
-            <a:ext cx="1291753" cy="535730"/>
-          </a:xfrm>
-          <a:prstGeom prst="roundRect">
-            <a:avLst/>
-          </a:prstGeom>
-        </p:spPr>
-        <p:style>
-          <a:lnRef idx="2">
-            <a:schemeClr val="accent6"/>
-          </a:lnRef>
-          <a:fillRef idx="1">
-            <a:schemeClr val="lt1"/>
-          </a:fillRef>
-          <a:effectRef idx="0">
-            <a:schemeClr val="accent6"/>
-          </a:effectRef>
-          <a:fontRef idx="minor">
-            <a:schemeClr val="dk1"/>
-          </a:fontRef>
-        </p:style>
-        <p:txBody>
-          <a:bodyPr rtlCol="0" anchor="ctr"/>
-          <a:lstStyle/>
-          <a:p>
-            <a:pPr algn="ctr"/>
-            <a:r>
-              <a:rPr lang="en-US" dirty="0"/>
-              <a:t>Lower</a:t>
-            </a:r>
-          </a:p>
-        </p:txBody>
-      </p:sp>
-      <p:sp>
-        <p:nvSpPr>
-          <p:cNvPr id="73" name="Rectangle: Rounded Corners 72">
-            <a:extLst>
-              <a:ext uri="{FF2B5EF4-FFF2-40B4-BE49-F238E27FC236}">
-                <a16:creationId xmlns:a16="http://schemas.microsoft.com/office/drawing/2014/main" id="{6C852E51-9268-C6F8-FC20-D07DF405639B}"/>
-              </a:ext>
-            </a:extLst>
-          </p:cNvPr>
-          <p:cNvSpPr/>
-          <p:nvPr/>
-        </p:nvSpPr>
-        <p:spPr>
-          <a:xfrm>
-            <a:off x="5428503" y="5137546"/>
-            <a:ext cx="1730571" cy="799509"/>
-          </a:xfrm>
-          <a:prstGeom prst="roundRect">
-            <a:avLst/>
-          </a:prstGeom>
-        </p:spPr>
-        <p:style>
-          <a:lnRef idx="2">
-            <a:schemeClr val="accent6"/>
-          </a:lnRef>
-          <a:fillRef idx="1">
-            <a:schemeClr val="lt1"/>
-          </a:fillRef>
-          <a:effectRef idx="0">
-            <a:schemeClr val="accent6"/>
-          </a:effectRef>
-          <a:fontRef idx="minor">
-            <a:schemeClr val="dk1"/>
-          </a:fontRef>
-        </p:style>
-        <p:txBody>
-          <a:bodyPr rtlCol="0" anchor="ctr"/>
-          <a:lstStyle/>
-          <a:p>
-            <a:pPr algn="ctr"/>
-            <a:endParaRPr lang="en-US" dirty="0"/>
-          </a:p>
-        </p:txBody>
-      </p:sp>
-      <p:sp>
-        <p:nvSpPr>
-          <p:cNvPr id="76" name="TextBox 75">
-            <a:extLst>
-              <a:ext uri="{FF2B5EF4-FFF2-40B4-BE49-F238E27FC236}">
-                <a16:creationId xmlns:a16="http://schemas.microsoft.com/office/drawing/2014/main" id="{0685941C-C21F-A984-1142-264FC266771F}"/>
-              </a:ext>
-            </a:extLst>
-          </p:cNvPr>
-          <p:cNvSpPr txBox="1"/>
-          <p:nvPr/>
-        </p:nvSpPr>
-        <p:spPr>
-          <a:xfrm>
-            <a:off x="5871254" y="5574450"/>
-            <a:ext cx="814903" cy="369332"/>
-          </a:xfrm>
-          <a:prstGeom prst="rect">
-            <a:avLst/>
-          </a:prstGeom>
-          <a:noFill/>
-        </p:spPr>
-        <p:txBody>
-          <a:bodyPr wrap="none" rtlCol="0">
-            <a:spAutoFit/>
-          </a:bodyPr>
-          <a:lstStyle/>
-          <a:p>
-            <a:r>
-              <a:rPr lang="en-US" dirty="0"/>
-              <a:t>Lower </a:t>
-            </a:r>
-          </a:p>
-        </p:txBody>
-      </p:sp>
-      <p:sp>
-        <p:nvSpPr>
-          <p:cNvPr id="79" name="Rectangle: Rounded Corners 78">
-            <a:extLst>
-              <a:ext uri="{FF2B5EF4-FFF2-40B4-BE49-F238E27FC236}">
-                <a16:creationId xmlns:a16="http://schemas.microsoft.com/office/drawing/2014/main" id="{A952DCBE-52F9-C99A-6975-8D1C68DF5DAA}"/>
-              </a:ext>
-            </a:extLst>
-          </p:cNvPr>
-          <p:cNvSpPr/>
-          <p:nvPr/>
-        </p:nvSpPr>
-        <p:spPr>
-          <a:xfrm>
-            <a:off x="9187147" y="5609572"/>
-            <a:ext cx="1882198" cy="378127"/>
-          </a:xfrm>
-          <a:prstGeom prst="roundRect">
-            <a:avLst/>
-          </a:prstGeom>
-        </p:spPr>
-        <p:style>
-          <a:lnRef idx="2">
-            <a:schemeClr val="accent6"/>
-          </a:lnRef>
-          <a:fillRef idx="1">
-            <a:schemeClr val="lt1"/>
-          </a:fillRef>
-          <a:effectRef idx="0">
-            <a:schemeClr val="accent6"/>
-          </a:effectRef>
-          <a:fontRef idx="minor">
-            <a:schemeClr val="dk1"/>
-          </a:fontRef>
-        </p:style>
-        <p:txBody>
-          <a:bodyPr rtlCol="0" anchor="ctr"/>
-          <a:lstStyle/>
-          <a:p>
-            <a:pPr algn="ctr"/>
-            <a:endParaRPr lang="en-US" dirty="0"/>
-          </a:p>
-        </p:txBody>
-      </p:sp>
-      <p:sp>
-        <p:nvSpPr>
-          <p:cNvPr id="81" name="TextBox 80">
-            <a:extLst>
-              <a:ext uri="{FF2B5EF4-FFF2-40B4-BE49-F238E27FC236}">
-                <a16:creationId xmlns:a16="http://schemas.microsoft.com/office/drawing/2014/main" id="{89C4B7D8-EC05-AECC-47EC-C3C3BEC7FCAA}"/>
-              </a:ext>
-            </a:extLst>
-          </p:cNvPr>
-          <p:cNvSpPr txBox="1"/>
-          <p:nvPr/>
-        </p:nvSpPr>
-        <p:spPr>
-          <a:xfrm>
-            <a:off x="9659925" y="5588648"/>
-            <a:ext cx="814903" cy="369332"/>
-          </a:xfrm>
-          <a:prstGeom prst="rect">
-            <a:avLst/>
-          </a:prstGeom>
-          <a:noFill/>
-        </p:spPr>
-        <p:txBody>
-          <a:bodyPr wrap="none" rtlCol="0">
-            <a:spAutoFit/>
-          </a:bodyPr>
-          <a:lstStyle/>
-          <a:p>
-            <a:r>
-              <a:rPr lang="en-US" dirty="0"/>
-              <a:t>Lower </a:t>
-            </a:r>
-          </a:p>
-        </p:txBody>
-      </p:sp>
-      <p:cxnSp>
-        <p:nvCxnSpPr>
-          <p:cNvPr id="82" name="Straight Arrow Connector 81">
-            <a:extLst>
-              <a:ext uri="{FF2B5EF4-FFF2-40B4-BE49-F238E27FC236}">
-                <a16:creationId xmlns:a16="http://schemas.microsoft.com/office/drawing/2014/main" id="{2144B327-A61B-B05A-83C1-CAFF4F9B98F6}"/>
-              </a:ext>
-            </a:extLst>
-          </p:cNvPr>
-          <p:cNvCxnSpPr>
-            <a:cxnSpLocks/>
-          </p:cNvCxnSpPr>
-          <p:nvPr/>
-        </p:nvCxnSpPr>
-        <p:spPr>
-          <a:xfrm>
-            <a:off x="3749040" y="5759116"/>
-            <a:ext cx="1655012" cy="26092"/>
-          </a:xfrm>
-          <a:prstGeom prst="straightConnector1">
-            <a:avLst/>
-          </a:prstGeom>
-          <a:ln w="50800">
-            <a:solidFill>
-              <a:schemeClr val="tx1"/>
-            </a:solidFill>
-            <a:tailEnd type="triangle"/>
-          </a:ln>
-        </p:spPr>
-        <p:style>
-          <a:lnRef idx="1">
-            <a:schemeClr val="dk1"/>
-          </a:lnRef>
-          <a:fillRef idx="0">
-            <a:schemeClr val="dk1"/>
-          </a:fillRef>
-          <a:effectRef idx="0">
-            <a:schemeClr val="dk1"/>
-          </a:effectRef>
-          <a:fontRef idx="minor">
-            <a:schemeClr val="tx1"/>
-          </a:fontRef>
-        </p:style>
-      </p:cxnSp>
-      <p:cxnSp>
-        <p:nvCxnSpPr>
-          <p:cNvPr id="86" name="Straight Arrow Connector 85">
-            <a:extLst>
-              <a:ext uri="{FF2B5EF4-FFF2-40B4-BE49-F238E27FC236}">
-                <a16:creationId xmlns:a16="http://schemas.microsoft.com/office/drawing/2014/main" id="{701EBA47-4108-5211-CB45-EBA91997EC6E}"/>
-              </a:ext>
-            </a:extLst>
-          </p:cNvPr>
-          <p:cNvCxnSpPr>
-            <a:cxnSpLocks/>
-          </p:cNvCxnSpPr>
-          <p:nvPr/>
-        </p:nvCxnSpPr>
-        <p:spPr>
-          <a:xfrm flipV="1">
-            <a:off x="7244139" y="5331158"/>
-            <a:ext cx="1883262" cy="243292"/>
-          </a:xfrm>
-          <a:prstGeom prst="straightConnector1">
-            <a:avLst/>
-          </a:prstGeom>
-          <a:ln w="50800">
-            <a:solidFill>
-              <a:schemeClr val="tx1"/>
-            </a:solidFill>
-            <a:tailEnd type="triangle"/>
-          </a:ln>
-        </p:spPr>
-        <p:style>
-          <a:lnRef idx="1">
-            <a:schemeClr val="dk1"/>
-          </a:lnRef>
-          <a:fillRef idx="0">
-            <a:schemeClr val="dk1"/>
-          </a:fillRef>
-          <a:effectRef idx="0">
-            <a:schemeClr val="dk1"/>
-          </a:effectRef>
-          <a:fontRef idx="minor">
-            <a:schemeClr val="tx1"/>
-          </a:fontRef>
-        </p:style>
-      </p:cxnSp>
-      <p:cxnSp>
-        <p:nvCxnSpPr>
-          <p:cNvPr id="88" name="Straight Arrow Connector 87">
-            <a:extLst>
-              <a:ext uri="{FF2B5EF4-FFF2-40B4-BE49-F238E27FC236}">
-                <a16:creationId xmlns:a16="http://schemas.microsoft.com/office/drawing/2014/main" id="{12A8E7AC-323B-D771-B47E-B6284C69E01D}"/>
-              </a:ext>
-            </a:extLst>
-          </p:cNvPr>
-          <p:cNvCxnSpPr>
-            <a:cxnSpLocks/>
-            <a:endCxn id="79" idx="1"/>
-          </p:cNvCxnSpPr>
-          <p:nvPr/>
-        </p:nvCxnSpPr>
-        <p:spPr>
-          <a:xfrm>
-            <a:off x="7237272" y="5604766"/>
-            <a:ext cx="1949875" cy="193870"/>
-          </a:xfrm>
-          <a:prstGeom prst="straightConnector1">
-            <a:avLst/>
-          </a:prstGeom>
-          <a:ln w="50800">
-            <a:solidFill>
-              <a:schemeClr val="tx1"/>
-            </a:solidFill>
-            <a:tailEnd type="triangle"/>
-          </a:ln>
-        </p:spPr>
-        <p:style>
-          <a:lnRef idx="1">
-            <a:schemeClr val="dk1"/>
-          </a:lnRef>
-          <a:fillRef idx="0">
-            <a:schemeClr val="dk1"/>
-          </a:fillRef>
-          <a:effectRef idx="0">
-            <a:schemeClr val="dk1"/>
-          </a:effectRef>
-          <a:fontRef idx="minor">
-            <a:schemeClr val="tx1"/>
-          </a:fontRef>
-        </p:style>
-      </p:cxnSp>
-      <p:sp>
-        <p:nvSpPr>
-          <p:cNvPr id="96" name="Rectangle: Rounded Corners 95">
-            <a:extLst>
-              <a:ext uri="{FF2B5EF4-FFF2-40B4-BE49-F238E27FC236}">
-                <a16:creationId xmlns:a16="http://schemas.microsoft.com/office/drawing/2014/main" id="{07F21AC1-FBC9-3B0E-DE55-EED7FCF8D833}"/>
-              </a:ext>
-            </a:extLst>
-          </p:cNvPr>
-          <p:cNvSpPr/>
-          <p:nvPr/>
-        </p:nvSpPr>
-        <p:spPr>
-          <a:xfrm>
-            <a:off x="9191851" y="5173849"/>
-            <a:ext cx="1730571" cy="327482"/>
-          </a:xfrm>
-          <a:prstGeom prst="roundRect">
-            <a:avLst/>
-          </a:prstGeom>
-        </p:spPr>
-        <p:style>
-          <a:lnRef idx="2">
-            <a:schemeClr val="accent6"/>
-          </a:lnRef>
-          <a:fillRef idx="1">
-            <a:schemeClr val="lt1"/>
-          </a:fillRef>
-          <a:effectRef idx="0">
-            <a:schemeClr val="accent6"/>
-          </a:effectRef>
-          <a:fontRef idx="minor">
-            <a:schemeClr val="dk1"/>
-          </a:fontRef>
-        </p:style>
-        <p:txBody>
-          <a:bodyPr rtlCol="0" anchor="ctr"/>
-          <a:lstStyle/>
-          <a:p>
-            <a:pPr algn="ctr"/>
-            <a:r>
-              <a:rPr lang="en-US" dirty="0" err="1"/>
-              <a:t>Koyukuk+Main</a:t>
-            </a:r>
-            <a:endParaRPr lang="en-US" dirty="0"/>
-          </a:p>
-        </p:txBody>
-      </p:sp>
-      <p:sp>
-        <p:nvSpPr>
-          <p:cNvPr id="101" name="Rectangle: Rounded Corners 100">
-            <a:extLst>
-              <a:ext uri="{FF2B5EF4-FFF2-40B4-BE49-F238E27FC236}">
-                <a16:creationId xmlns:a16="http://schemas.microsoft.com/office/drawing/2014/main" id="{2047B8BF-9BF2-2C21-80C9-D722C0B9EF8C}"/>
-              </a:ext>
-            </a:extLst>
-          </p:cNvPr>
-          <p:cNvSpPr/>
-          <p:nvPr/>
-        </p:nvSpPr>
-        <p:spPr>
-          <a:xfrm>
-            <a:off x="5445789" y="4725010"/>
-            <a:ext cx="1730571" cy="327482"/>
-          </a:xfrm>
-          <a:prstGeom prst="roundRect">
-            <a:avLst/>
-          </a:prstGeom>
-        </p:spPr>
-        <p:style>
-          <a:lnRef idx="2">
-            <a:schemeClr val="accent6"/>
-          </a:lnRef>
-          <a:fillRef idx="1">
-            <a:schemeClr val="lt1"/>
-          </a:fillRef>
-          <a:effectRef idx="0">
-            <a:schemeClr val="accent6"/>
-          </a:effectRef>
-          <a:fontRef idx="minor">
-            <a:schemeClr val="dk1"/>
-          </a:fontRef>
-        </p:style>
-        <p:txBody>
-          <a:bodyPr rtlCol="0" anchor="ctr"/>
-          <a:lstStyle/>
-          <a:p>
-            <a:pPr algn="ctr"/>
-            <a:r>
-              <a:rPr lang="en-US" dirty="0"/>
-              <a:t>Tanana Summer</a:t>
-            </a:r>
-          </a:p>
-        </p:txBody>
-      </p:sp>
-      <p:sp>
-        <p:nvSpPr>
-          <p:cNvPr id="102" name="Rectangle: Rounded Corners 101">
-            <a:extLst>
-              <a:ext uri="{FF2B5EF4-FFF2-40B4-BE49-F238E27FC236}">
-                <a16:creationId xmlns:a16="http://schemas.microsoft.com/office/drawing/2014/main" id="{891A229F-17F5-F72E-9B40-205E19B459B3}"/>
-              </a:ext>
-            </a:extLst>
-          </p:cNvPr>
-          <p:cNvSpPr/>
-          <p:nvPr/>
-        </p:nvSpPr>
-        <p:spPr>
-          <a:xfrm>
-            <a:off x="9187147" y="4705003"/>
-            <a:ext cx="1730571" cy="327482"/>
-          </a:xfrm>
-          <a:prstGeom prst="roundRect">
-            <a:avLst/>
-          </a:prstGeom>
-        </p:spPr>
-        <p:style>
-          <a:lnRef idx="2">
-            <a:schemeClr val="accent6"/>
-          </a:lnRef>
-          <a:fillRef idx="1">
-            <a:schemeClr val="lt1"/>
-          </a:fillRef>
-          <a:effectRef idx="0">
-            <a:schemeClr val="accent6"/>
-          </a:effectRef>
-          <a:fontRef idx="minor">
-            <a:schemeClr val="dk1"/>
-          </a:fontRef>
-        </p:style>
-        <p:txBody>
-          <a:bodyPr rtlCol="0" anchor="ctr"/>
-          <a:lstStyle/>
-          <a:p>
-            <a:pPr algn="ctr"/>
-            <a:r>
-              <a:rPr lang="en-US" dirty="0"/>
-              <a:t>Tanana Summer</a:t>
-            </a:r>
-          </a:p>
-        </p:txBody>
-      </p:sp>
-      <p:cxnSp>
-        <p:nvCxnSpPr>
-          <p:cNvPr id="103" name="Straight Arrow Connector 102">
-            <a:extLst>
-              <a:ext uri="{FF2B5EF4-FFF2-40B4-BE49-F238E27FC236}">
-                <a16:creationId xmlns:a16="http://schemas.microsoft.com/office/drawing/2014/main" id="{54B03188-24D3-C2A0-8B09-65B6E76A3C29}"/>
-              </a:ext>
-            </a:extLst>
-          </p:cNvPr>
-          <p:cNvCxnSpPr>
-            <a:cxnSpLocks/>
-          </p:cNvCxnSpPr>
-          <p:nvPr/>
-        </p:nvCxnSpPr>
-        <p:spPr>
-          <a:xfrm flipV="1">
-            <a:off x="7244139" y="4911951"/>
-            <a:ext cx="1890538" cy="17597"/>
-          </a:xfrm>
-          <a:prstGeom prst="straightConnector1">
-            <a:avLst/>
-          </a:prstGeom>
-          <a:ln w="50800">
-            <a:solidFill>
-              <a:schemeClr val="tx1"/>
-            </a:solidFill>
-            <a:tailEnd type="triangle"/>
-          </a:ln>
-        </p:spPr>
-        <p:style>
-          <a:lnRef idx="1">
-            <a:schemeClr val="dk1"/>
-          </a:lnRef>
-          <a:fillRef idx="0">
-            <a:schemeClr val="dk1"/>
-          </a:fillRef>
-          <a:effectRef idx="0">
-            <a:schemeClr val="dk1"/>
-          </a:effectRef>
-          <a:fontRef idx="minor">
-            <a:schemeClr val="tx1"/>
-          </a:fontRef>
-        </p:style>
-      </p:cxnSp>
-      <p:cxnSp>
-        <p:nvCxnSpPr>
-          <p:cNvPr id="104" name="Straight Arrow Connector 103">
-            <a:extLst>
-              <a:ext uri="{FF2B5EF4-FFF2-40B4-BE49-F238E27FC236}">
-                <a16:creationId xmlns:a16="http://schemas.microsoft.com/office/drawing/2014/main" id="{294FBFE2-6E9F-6225-AABE-199D00C94E0C}"/>
-              </a:ext>
-            </a:extLst>
-          </p:cNvPr>
-          <p:cNvCxnSpPr>
-            <a:cxnSpLocks/>
-          </p:cNvCxnSpPr>
-          <p:nvPr/>
-        </p:nvCxnSpPr>
-        <p:spPr>
-          <a:xfrm flipV="1">
-            <a:off x="3633664" y="4865258"/>
-            <a:ext cx="1794839" cy="17561"/>
-          </a:xfrm>
-          <a:prstGeom prst="straightConnector1">
-            <a:avLst/>
-          </a:prstGeom>
-          <a:ln w="50800">
-            <a:solidFill>
-              <a:schemeClr val="tx1"/>
-            </a:solidFill>
-            <a:tailEnd type="triangle"/>
-          </a:ln>
-        </p:spPr>
-        <p:style>
-          <a:lnRef idx="1">
-            <a:schemeClr val="dk1"/>
-          </a:lnRef>
-          <a:fillRef idx="0">
-            <a:schemeClr val="dk1"/>
-          </a:fillRef>
-          <a:effectRef idx="0">
-            <a:schemeClr val="dk1"/>
-          </a:effectRef>
-          <a:fontRef idx="minor">
-            <a:schemeClr val="tx1"/>
-          </a:fontRef>
-        </p:style>
-      </p:cxnSp>
-      <p:sp>
-        <p:nvSpPr>
-          <p:cNvPr id="113" name="Rectangle: Rounded Corners 112">
-            <a:extLst>
-              <a:ext uri="{FF2B5EF4-FFF2-40B4-BE49-F238E27FC236}">
-                <a16:creationId xmlns:a16="http://schemas.microsoft.com/office/drawing/2014/main" id="{F83737AF-0639-C3E7-9A17-3AC512CB7A44}"/>
-              </a:ext>
-            </a:extLst>
-          </p:cNvPr>
-          <p:cNvSpPr/>
-          <p:nvPr/>
-        </p:nvSpPr>
-        <p:spPr>
-          <a:xfrm>
-            <a:off x="5372167" y="3791979"/>
-            <a:ext cx="1730571" cy="628424"/>
-          </a:xfrm>
-          <a:prstGeom prst="roundRect">
-            <a:avLst/>
-          </a:prstGeom>
-        </p:spPr>
-        <p:style>
-          <a:lnRef idx="2">
-            <a:schemeClr val="accent6"/>
-          </a:lnRef>
-          <a:fillRef idx="1">
-            <a:schemeClr val="lt1"/>
-          </a:fillRef>
-          <a:effectRef idx="0">
-            <a:schemeClr val="accent6"/>
-          </a:effectRef>
-          <a:fontRef idx="minor">
-            <a:schemeClr val="dk1"/>
-          </a:fontRef>
-        </p:style>
-        <p:txBody>
-          <a:bodyPr rtlCol="0" anchor="ctr"/>
-          <a:lstStyle/>
-          <a:p>
-            <a:pPr algn="ctr"/>
-            <a:r>
-              <a:rPr lang="en-US" dirty="0"/>
-              <a:t>Tanana Fall</a:t>
-            </a:r>
-          </a:p>
-        </p:txBody>
-      </p:sp>
-      <p:cxnSp>
-        <p:nvCxnSpPr>
-          <p:cNvPr id="114" name="Straight Arrow Connector 113">
-            <a:extLst>
-              <a:ext uri="{FF2B5EF4-FFF2-40B4-BE49-F238E27FC236}">
-                <a16:creationId xmlns:a16="http://schemas.microsoft.com/office/drawing/2014/main" id="{B06A44D9-58DE-B8AE-0350-787EE4AA444E}"/>
-              </a:ext>
-            </a:extLst>
-          </p:cNvPr>
-          <p:cNvCxnSpPr>
-            <a:cxnSpLocks/>
-          </p:cNvCxnSpPr>
-          <p:nvPr/>
-        </p:nvCxnSpPr>
-        <p:spPr>
-          <a:xfrm>
-            <a:off x="3607900" y="3928051"/>
-            <a:ext cx="1683702" cy="244445"/>
-          </a:xfrm>
-          <a:prstGeom prst="straightConnector1">
-            <a:avLst/>
-          </a:prstGeom>
-          <a:ln w="50800">
-            <a:solidFill>
-              <a:schemeClr val="tx1"/>
-            </a:solidFill>
-            <a:tailEnd type="triangle"/>
-          </a:ln>
-        </p:spPr>
-        <p:style>
-          <a:lnRef idx="1">
-            <a:schemeClr val="dk1"/>
-          </a:lnRef>
-          <a:fillRef idx="0">
-            <a:schemeClr val="dk1"/>
-          </a:fillRef>
-          <a:effectRef idx="0">
-            <a:schemeClr val="dk1"/>
-          </a:effectRef>
-          <a:fontRef idx="minor">
-            <a:schemeClr val="tx1"/>
-          </a:fontRef>
-        </p:style>
-      </p:cxnSp>
-      <p:sp>
-        <p:nvSpPr>
-          <p:cNvPr id="116" name="Rectangle: Rounded Corners 115">
-            <a:extLst>
-              <a:ext uri="{FF2B5EF4-FFF2-40B4-BE49-F238E27FC236}">
-                <a16:creationId xmlns:a16="http://schemas.microsoft.com/office/drawing/2014/main" id="{7569FF6A-9700-966C-0AC6-95381D52F535}"/>
-              </a:ext>
-            </a:extLst>
-          </p:cNvPr>
-          <p:cNvSpPr/>
-          <p:nvPr/>
-        </p:nvSpPr>
-        <p:spPr>
-          <a:xfrm>
-            <a:off x="9106974" y="3811499"/>
-            <a:ext cx="1822452" cy="485107"/>
-          </a:xfrm>
-          <a:prstGeom prst="roundRect">
-            <a:avLst/>
-          </a:prstGeom>
-        </p:spPr>
-        <p:style>
-          <a:lnRef idx="2">
-            <a:schemeClr val="accent6"/>
-          </a:lnRef>
-          <a:fillRef idx="1">
-            <a:schemeClr val="lt1"/>
-          </a:fillRef>
-          <a:effectRef idx="0">
-            <a:schemeClr val="accent6"/>
-          </a:effectRef>
-          <a:fontRef idx="minor">
-            <a:schemeClr val="dk1"/>
-          </a:fontRef>
-        </p:style>
-        <p:txBody>
-          <a:bodyPr rtlCol="0" anchor="ctr"/>
-          <a:lstStyle/>
-          <a:p>
-            <a:pPr algn="ctr"/>
-            <a:r>
-              <a:rPr lang="en-US" dirty="0"/>
-              <a:t>Tanana Fall</a:t>
-            </a:r>
-          </a:p>
-        </p:txBody>
-      </p:sp>
-      <p:cxnSp>
-        <p:nvCxnSpPr>
-          <p:cNvPr id="117" name="Straight Arrow Connector 116">
-            <a:extLst>
-              <a:ext uri="{FF2B5EF4-FFF2-40B4-BE49-F238E27FC236}">
-                <a16:creationId xmlns:a16="http://schemas.microsoft.com/office/drawing/2014/main" id="{DA71CD0B-FD5A-7F0D-3540-ECEE55AC50D8}"/>
-              </a:ext>
-            </a:extLst>
-          </p:cNvPr>
-          <p:cNvCxnSpPr>
-            <a:cxnSpLocks/>
-          </p:cNvCxnSpPr>
-          <p:nvPr/>
-        </p:nvCxnSpPr>
-        <p:spPr>
-          <a:xfrm flipV="1">
-            <a:off x="7183929" y="4097392"/>
-            <a:ext cx="1890538" cy="17597"/>
-          </a:xfrm>
-          <a:prstGeom prst="straightConnector1">
-            <a:avLst/>
-          </a:prstGeom>
-          <a:ln w="50800">
-            <a:solidFill>
-              <a:schemeClr val="tx1"/>
-            </a:solidFill>
-            <a:tailEnd type="triangle"/>
-          </a:ln>
-        </p:spPr>
-        <p:style>
-          <a:lnRef idx="1">
-            <a:schemeClr val="dk1"/>
-          </a:lnRef>
-          <a:fillRef idx="0">
-            <a:schemeClr val="dk1"/>
-          </a:fillRef>
-          <a:effectRef idx="0">
-            <a:schemeClr val="dk1"/>
-          </a:effectRef>
-          <a:fontRef idx="minor">
-            <a:schemeClr val="tx1"/>
-          </a:fontRef>
-        </p:style>
-      </p:cxnSp>
-      <p:cxnSp>
-        <p:nvCxnSpPr>
-          <p:cNvPr id="123" name="Straight Connector 122">
-            <a:extLst>
-              <a:ext uri="{FF2B5EF4-FFF2-40B4-BE49-F238E27FC236}">
-                <a16:creationId xmlns:a16="http://schemas.microsoft.com/office/drawing/2014/main" id="{789C1B69-502A-CC2F-0290-1B69C94FCBDF}"/>
-              </a:ext>
-            </a:extLst>
-          </p:cNvPr>
-          <p:cNvCxnSpPr>
-            <a:cxnSpLocks/>
-          </p:cNvCxnSpPr>
-          <p:nvPr/>
-        </p:nvCxnSpPr>
-        <p:spPr>
-          <a:xfrm flipV="1">
-            <a:off x="152400" y="4431646"/>
-            <a:ext cx="11785600" cy="88498"/>
-          </a:xfrm>
-          <a:prstGeom prst="line">
-            <a:avLst/>
-          </a:prstGeom>
-          <a:ln w="50800">
-            <a:solidFill>
-              <a:schemeClr val="tx1"/>
-            </a:solidFill>
-            <a:prstDash val="lgDash"/>
-          </a:ln>
-        </p:spPr>
-        <p:style>
-          <a:lnRef idx="1">
-            <a:schemeClr val="accent1"/>
-          </a:lnRef>
-          <a:fillRef idx="0">
-            <a:schemeClr val="accent1"/>
-          </a:fillRef>
-          <a:effectRef idx="0">
-            <a:schemeClr val="accent1"/>
-          </a:effectRef>
-          <a:fontRef idx="minor">
-            <a:schemeClr val="tx1"/>
-          </a:fontRef>
-        </p:style>
-      </p:cxnSp>
-      <p:sp>
-        <p:nvSpPr>
-          <p:cNvPr id="127" name="TextBox 126">
-            <a:extLst>
-              <a:ext uri="{FF2B5EF4-FFF2-40B4-BE49-F238E27FC236}">
-                <a16:creationId xmlns:a16="http://schemas.microsoft.com/office/drawing/2014/main" id="{B2724AC9-E2A3-2726-8E17-3AF4893A482F}"/>
-              </a:ext>
-            </a:extLst>
-          </p:cNvPr>
-          <p:cNvSpPr txBox="1"/>
-          <p:nvPr/>
-        </p:nvSpPr>
-        <p:spPr>
-          <a:xfrm>
-            <a:off x="39839" y="4725010"/>
-            <a:ext cx="1593706" cy="584775"/>
-          </a:xfrm>
-          <a:prstGeom prst="rect">
-            <a:avLst/>
-          </a:prstGeom>
-          <a:noFill/>
-        </p:spPr>
-        <p:txBody>
-          <a:bodyPr wrap="none" rtlCol="0">
-            <a:spAutoFit/>
-          </a:bodyPr>
-          <a:lstStyle/>
-          <a:p>
-            <a:r>
-              <a:rPr lang="en-US" sz="3200" dirty="0"/>
-              <a:t>Summer</a:t>
-            </a:r>
-          </a:p>
-        </p:txBody>
-      </p:sp>
-      <p:sp>
-        <p:nvSpPr>
-          <p:cNvPr id="128" name="TextBox 127">
-            <a:extLst>
-              <a:ext uri="{FF2B5EF4-FFF2-40B4-BE49-F238E27FC236}">
-                <a16:creationId xmlns:a16="http://schemas.microsoft.com/office/drawing/2014/main" id="{73244D75-7B12-60F4-94DE-033E87AA87AA}"/>
-              </a:ext>
-            </a:extLst>
-          </p:cNvPr>
-          <p:cNvSpPr txBox="1"/>
-          <p:nvPr/>
-        </p:nvSpPr>
-        <p:spPr>
-          <a:xfrm>
-            <a:off x="98303" y="1267302"/>
-            <a:ext cx="816698" cy="646331"/>
-          </a:xfrm>
-          <a:prstGeom prst="rect">
-            <a:avLst/>
-          </a:prstGeom>
-          <a:noFill/>
-        </p:spPr>
-        <p:txBody>
-          <a:bodyPr wrap="none" rtlCol="0">
-            <a:spAutoFit/>
-          </a:bodyPr>
-          <a:lstStyle/>
-          <a:p>
-            <a:r>
-              <a:rPr lang="en-US" sz="3600" dirty="0"/>
-              <a:t>Fall</a:t>
-            </a:r>
-          </a:p>
-        </p:txBody>
-      </p:sp>
-      <p:sp>
-        <p:nvSpPr>
-          <p:cNvPr id="149" name="Rectangle: Rounded Corners 148">
-            <a:extLst>
-              <a:ext uri="{FF2B5EF4-FFF2-40B4-BE49-F238E27FC236}">
-                <a16:creationId xmlns:a16="http://schemas.microsoft.com/office/drawing/2014/main" id="{CEAF3456-E149-3325-BA30-C3377D928448}"/>
-              </a:ext>
-            </a:extLst>
-          </p:cNvPr>
-          <p:cNvSpPr/>
-          <p:nvPr/>
-        </p:nvSpPr>
-        <p:spPr>
-          <a:xfrm>
-            <a:off x="9127401" y="4655185"/>
-            <a:ext cx="1898435" cy="897778"/>
-          </a:xfrm>
-          <a:prstGeom prst="roundRect">
-            <a:avLst/>
-          </a:prstGeom>
-          <a:noFill/>
-          <a:ln w="19050">
-            <a:solidFill>
-              <a:schemeClr val="tx1"/>
-            </a:solidFill>
-            <a:prstDash val="sysDash"/>
-          </a:ln>
-        </p:spPr>
-        <p:style>
-          <a:lnRef idx="2">
-            <a:schemeClr val="accent6"/>
-          </a:lnRef>
-          <a:fillRef idx="1">
-            <a:schemeClr val="lt1"/>
-          </a:fillRef>
-          <a:effectRef idx="0">
-            <a:schemeClr val="accent6"/>
-          </a:effectRef>
-          <a:fontRef idx="minor">
-            <a:schemeClr val="dk1"/>
-          </a:fontRef>
-        </p:style>
-        <p:txBody>
-          <a:bodyPr rtlCol="0" anchor="ctr"/>
-          <a:lstStyle/>
-          <a:p>
-            <a:pPr algn="ctr"/>
-            <a:endParaRPr lang="en-US" dirty="0"/>
-          </a:p>
-        </p:txBody>
-      </p:sp>
-      <p:sp>
-        <p:nvSpPr>
-          <p:cNvPr id="150" name="Rectangle: Rounded Corners 149">
-            <a:extLst>
-              <a:ext uri="{FF2B5EF4-FFF2-40B4-BE49-F238E27FC236}">
-                <a16:creationId xmlns:a16="http://schemas.microsoft.com/office/drawing/2014/main" id="{A23D2486-750A-063F-A37F-8E5A4C62D199}"/>
-              </a:ext>
-            </a:extLst>
-          </p:cNvPr>
-          <p:cNvSpPr/>
-          <p:nvPr/>
-        </p:nvSpPr>
-        <p:spPr>
-          <a:xfrm>
-            <a:off x="5387340" y="4655185"/>
-            <a:ext cx="1883262" cy="897778"/>
-          </a:xfrm>
-          <a:prstGeom prst="roundRect">
-            <a:avLst/>
-          </a:prstGeom>
-          <a:noFill/>
-          <a:ln w="19050">
-            <a:solidFill>
-              <a:schemeClr val="tx1"/>
-            </a:solidFill>
-            <a:prstDash val="sysDash"/>
-          </a:ln>
-        </p:spPr>
-        <p:style>
-          <a:lnRef idx="2">
-            <a:schemeClr val="accent6"/>
-          </a:lnRef>
-          <a:fillRef idx="1">
-            <a:schemeClr val="lt1"/>
-          </a:fillRef>
-          <a:effectRef idx="0">
-            <a:schemeClr val="accent6"/>
-          </a:effectRef>
-          <a:fontRef idx="minor">
-            <a:schemeClr val="dk1"/>
-          </a:fontRef>
-        </p:style>
-        <p:txBody>
-          <a:bodyPr rtlCol="0" anchor="ctr"/>
-          <a:lstStyle/>
-          <a:p>
-            <a:pPr algn="ctr"/>
-            <a:endParaRPr lang="en-US" dirty="0"/>
-          </a:p>
-        </p:txBody>
-      </p:sp>
-    </p:spTree>
-    <p:extLst>
-      <p:ext uri="{BB962C8B-B14F-4D97-AF65-F5344CB8AC3E}">
-        <p14:creationId xmlns:p14="http://schemas.microsoft.com/office/powerpoint/2010/main" val="2556955737"/>
-      </p:ext>
-    </p:extLst>
-  </p:cSld>
-  <p:clrMapOvr>
-    <a:masterClrMapping/>
-  </p:clrMapOvr>
-</p:sld>
-</file>
-
-<file path=ppt/slides/slide2.xml><?xml version="1.0" encoding="utf-8"?>
-<p:sld xmlns:a="http://schemas.openxmlformats.org/drawingml/2006/main" xmlns:r="http://schemas.openxmlformats.org/officeDocument/2006/relationships" xmlns:p="http://schemas.openxmlformats.org/presentationml/2006/main">
-  <p:cSld>
-    <p:spTree>
-      <p:nvGrpSpPr>
-        <p:cNvPr id="1" name=""/>
-        <p:cNvGrpSpPr/>
-        <p:nvPr/>
-      </p:nvGrpSpPr>
-      <p:grpSpPr>
-        <a:xfrm>
-          <a:off x="0" y="0"/>
-          <a:ext cx="0" cy="0"/>
-          <a:chOff x="0" y="0"/>
-          <a:chExt cx="0" cy="0"/>
-        </a:xfrm>
-      </p:grpSpPr>
-      <p:sp>
-        <p:nvSpPr>
-          <p:cNvPr id="4" name="Rectangle: Rounded Corners 3">
-            <a:extLst>
-              <a:ext uri="{FF2B5EF4-FFF2-40B4-BE49-F238E27FC236}">
-                <a16:creationId xmlns:a16="http://schemas.microsoft.com/office/drawing/2014/main" id="{7A93656B-349E-882A-3B56-417BCF30D9E3}"/>
-              </a:ext>
-            </a:extLst>
-          </p:cNvPr>
-          <p:cNvSpPr/>
-          <p:nvPr/>
-        </p:nvSpPr>
-        <p:spPr>
-          <a:xfrm>
-            <a:off x="1853102" y="899752"/>
-            <a:ext cx="2670712" cy="5734286"/>
-          </a:xfrm>
-          <a:prstGeom prst="roundRect">
-            <a:avLst/>
-          </a:prstGeom>
-        </p:spPr>
-        <p:style>
-          <a:lnRef idx="2">
-            <a:schemeClr val="accent6"/>
-          </a:lnRef>
-          <a:fillRef idx="1">
-            <a:schemeClr val="lt1"/>
-          </a:fillRef>
-          <a:effectRef idx="0">
-            <a:schemeClr val="accent6"/>
-          </a:effectRef>
-          <a:fontRef idx="minor">
-            <a:schemeClr val="dk1"/>
-          </a:fontRef>
-        </p:style>
-        <p:txBody>
-          <a:bodyPr rtlCol="0" anchor="ctr"/>
-          <a:lstStyle/>
-          <a:p>
-            <a:pPr algn="ctr"/>
-            <a:endParaRPr lang="en-US" dirty="0"/>
-          </a:p>
-        </p:txBody>
-      </p:sp>
-      <p:sp>
-        <p:nvSpPr>
-          <p:cNvPr id="5" name="Rectangle: Rounded Corners 4">
-            <a:extLst>
-              <a:ext uri="{FF2B5EF4-FFF2-40B4-BE49-F238E27FC236}">
-                <a16:creationId xmlns:a16="http://schemas.microsoft.com/office/drawing/2014/main" id="{917B4C6E-F5F1-B698-C00D-31C6C30AA3D3}"/>
-              </a:ext>
-            </a:extLst>
-          </p:cNvPr>
-          <p:cNvSpPr/>
-          <p:nvPr/>
-        </p:nvSpPr>
-        <p:spPr>
-          <a:xfrm>
-            <a:off x="5073746" y="947248"/>
-            <a:ext cx="2702560" cy="5734018"/>
-          </a:xfrm>
-          <a:prstGeom prst="roundRect">
-            <a:avLst/>
-          </a:prstGeom>
-        </p:spPr>
-        <p:style>
-          <a:lnRef idx="2">
-            <a:schemeClr val="accent6"/>
-          </a:lnRef>
-          <a:fillRef idx="1">
-            <a:schemeClr val="lt1"/>
-          </a:fillRef>
-          <a:effectRef idx="0">
-            <a:schemeClr val="accent6"/>
-          </a:effectRef>
-          <a:fontRef idx="minor">
-            <a:schemeClr val="dk1"/>
-          </a:fontRef>
-        </p:style>
-        <p:txBody>
-          <a:bodyPr rtlCol="0" anchor="ctr"/>
-          <a:lstStyle/>
-          <a:p>
-            <a:pPr algn="ctr"/>
-            <a:endParaRPr lang="en-US"/>
-          </a:p>
-        </p:txBody>
-      </p:sp>
-      <p:sp>
-        <p:nvSpPr>
-          <p:cNvPr id="6" name="Rectangle: Rounded Corners 5">
-            <a:extLst>
-              <a:ext uri="{FF2B5EF4-FFF2-40B4-BE49-F238E27FC236}">
-                <a16:creationId xmlns:a16="http://schemas.microsoft.com/office/drawing/2014/main" id="{0999C7AC-AB9C-6CCB-E835-E1AEC1D9EBE6}"/>
-              </a:ext>
-            </a:extLst>
-          </p:cNvPr>
-          <p:cNvSpPr/>
-          <p:nvPr/>
-        </p:nvSpPr>
-        <p:spPr>
-          <a:xfrm>
-            <a:off x="8270689" y="899752"/>
-            <a:ext cx="2702560" cy="5734018"/>
-          </a:xfrm>
-          <a:prstGeom prst="roundRect">
-            <a:avLst/>
-          </a:prstGeom>
-        </p:spPr>
-        <p:style>
-          <a:lnRef idx="2">
-            <a:schemeClr val="accent6"/>
-          </a:lnRef>
-          <a:fillRef idx="1">
-            <a:schemeClr val="lt1"/>
-          </a:fillRef>
-          <a:effectRef idx="0">
-            <a:schemeClr val="accent6"/>
-          </a:effectRef>
-          <a:fontRef idx="minor">
-            <a:schemeClr val="dk1"/>
-          </a:fontRef>
-        </p:style>
-        <p:txBody>
-          <a:bodyPr rtlCol="0" anchor="ctr"/>
-          <a:lstStyle/>
-          <a:p>
-            <a:pPr algn="ctr"/>
-            <a:endParaRPr lang="en-US"/>
-          </a:p>
-        </p:txBody>
-      </p:sp>
-      <p:sp>
-        <p:nvSpPr>
-          <p:cNvPr id="7" name="TextBox 6">
-            <a:extLst>
-              <a:ext uri="{FF2B5EF4-FFF2-40B4-BE49-F238E27FC236}">
-                <a16:creationId xmlns:a16="http://schemas.microsoft.com/office/drawing/2014/main" id="{F1B7FF9B-739F-4CBC-D24E-D65E3C0A8C2A}"/>
-              </a:ext>
-            </a:extLst>
-          </p:cNvPr>
-          <p:cNvSpPr txBox="1"/>
-          <p:nvPr/>
-        </p:nvSpPr>
-        <p:spPr>
-          <a:xfrm>
-            <a:off x="2365661" y="566459"/>
-            <a:ext cx="1244251" cy="369332"/>
-          </a:xfrm>
-          <a:prstGeom prst="rect">
-            <a:avLst/>
-          </a:prstGeom>
-          <a:noFill/>
-        </p:spPr>
-        <p:txBody>
-          <a:bodyPr wrap="none" rtlCol="0">
-            <a:spAutoFit/>
-          </a:bodyPr>
-          <a:lstStyle/>
-          <a:p>
-            <a:r>
-              <a:rPr lang="en-US" dirty="0"/>
-              <a:t>1999 -2002</a:t>
-            </a:r>
-          </a:p>
-        </p:txBody>
-      </p:sp>
-      <p:sp>
-        <p:nvSpPr>
-          <p:cNvPr id="8" name="TextBox 7">
-            <a:extLst>
-              <a:ext uri="{FF2B5EF4-FFF2-40B4-BE49-F238E27FC236}">
-                <a16:creationId xmlns:a16="http://schemas.microsoft.com/office/drawing/2014/main" id="{95D7ED6D-2B1D-008B-2252-ED8CECD6135F}"/>
-              </a:ext>
-            </a:extLst>
-          </p:cNvPr>
-          <p:cNvSpPr txBox="1"/>
-          <p:nvPr/>
-        </p:nvSpPr>
-        <p:spPr>
-          <a:xfrm>
-            <a:off x="5605052" y="570815"/>
-            <a:ext cx="1244251" cy="369332"/>
-          </a:xfrm>
-          <a:prstGeom prst="rect">
-            <a:avLst/>
-          </a:prstGeom>
-          <a:noFill/>
-        </p:spPr>
-        <p:txBody>
-          <a:bodyPr wrap="square" rtlCol="0">
-            <a:spAutoFit/>
-          </a:bodyPr>
-          <a:lstStyle/>
-          <a:p>
-            <a:r>
-              <a:rPr lang="en-US" dirty="0"/>
-              <a:t>2004 -2007</a:t>
-            </a:r>
-          </a:p>
-        </p:txBody>
-      </p:sp>
-      <p:sp>
-        <p:nvSpPr>
-          <p:cNvPr id="9" name="TextBox 8">
-            <a:extLst>
-              <a:ext uri="{FF2B5EF4-FFF2-40B4-BE49-F238E27FC236}">
-                <a16:creationId xmlns:a16="http://schemas.microsoft.com/office/drawing/2014/main" id="{1E80FED4-A2C3-FC5A-6773-036C0ABD5562}"/>
-              </a:ext>
-            </a:extLst>
-          </p:cNvPr>
-          <p:cNvSpPr txBox="1"/>
-          <p:nvPr/>
-        </p:nvSpPr>
-        <p:spPr>
-          <a:xfrm>
-            <a:off x="9282881" y="601849"/>
+            <a:off x="8742073" y="482032"/>
             <a:ext cx="1546686" cy="369332"/>
           </a:xfrm>
           <a:prstGeom prst="rect">
@@ -6570,11 +3606,9 @@
             <a:noFill/>
             <a:ln w="28575">
               <a:solidFill>
-                <a:schemeClr val="tx1">
-                  <a:lumMod val="95000"/>
-                  <a:lumOff val="5000"/>
-                </a:schemeClr>
+                <a:srgbClr val="FF0000"/>
               </a:solidFill>
+              <a:prstDash val="dash"/>
             </a:ln>
           </p:spPr>
           <p:style>
@@ -6621,6 +3655,9 @@
               <a:avLst/>
             </a:prstGeom>
             <a:noFill/>
+            <a:ln>
+              <a:noFill/>
+            </a:ln>
           </p:spPr>
           <p:txBody>
             <a:bodyPr wrap="none" rtlCol="0">
@@ -6659,7 +3696,7 @@
           <a:noFill/>
           <a:ln w="28575">
             <a:solidFill>
-              <a:schemeClr val="tx1"/>
+              <a:srgbClr val="0070C0"/>
             </a:solidFill>
             <a:prstDash val="dash"/>
           </a:ln>
@@ -6737,7 +3774,7 @@
         <p:grpSpPr>
           <a:xfrm>
             <a:off x="5241085" y="4439920"/>
-            <a:ext cx="2206585" cy="2307668"/>
+            <a:ext cx="2343684" cy="2307668"/>
             <a:chOff x="1582435" y="1271984"/>
             <a:chExt cx="1567165" cy="2024373"/>
           </a:xfrm>
@@ -6765,11 +3802,9 @@
             <a:noFill/>
             <a:ln w="28575">
               <a:solidFill>
-                <a:schemeClr val="tx1">
-                  <a:lumMod val="95000"/>
-                  <a:lumOff val="5000"/>
-                </a:schemeClr>
+                <a:srgbClr val="FF0000"/>
               </a:solidFill>
+              <a:prstDash val="dash"/>
             </a:ln>
           </p:spPr>
           <p:style>
@@ -6816,6 +3851,10 @@
               <a:avLst/>
             </a:prstGeom>
             <a:noFill/>
+            <a:ln>
+              <a:noFill/>
+              <a:prstDash val="dash"/>
+            </a:ln>
           </p:spPr>
           <p:txBody>
             <a:bodyPr wrap="none" rtlCol="0">
@@ -6845,8 +3884,8 @@
         </p:nvGrpSpPr>
         <p:grpSpPr>
           <a:xfrm>
-            <a:off x="8389676" y="4403346"/>
-            <a:ext cx="2254638" cy="2232105"/>
+            <a:off x="8389675" y="4403346"/>
+            <a:ext cx="2261279" cy="2232105"/>
             <a:chOff x="1582435" y="1271984"/>
             <a:chExt cx="1567165" cy="1984769"/>
           </a:xfrm>
@@ -6874,11 +3913,9 @@
             <a:noFill/>
             <a:ln w="28575">
               <a:solidFill>
-                <a:schemeClr val="tx1">
-                  <a:lumMod val="95000"/>
-                  <a:lumOff val="5000"/>
-                </a:schemeClr>
+                <a:srgbClr val="FF0000"/>
               </a:solidFill>
+              <a:prstDash val="dash"/>
             </a:ln>
           </p:spPr>
           <p:style>
@@ -6925,6 +3962,10 @@
               <a:avLst/>
             </a:prstGeom>
             <a:noFill/>
+            <a:ln>
+              <a:noFill/>
+              <a:prstDash val="dash"/>
+            </a:ln>
           </p:spPr>
           <p:txBody>
             <a:bodyPr wrap="none" rtlCol="0">
@@ -6983,7 +4024,7 @@
             <a:noFill/>
             <a:ln w="28575">
               <a:solidFill>
-                <a:schemeClr val="tx1"/>
+                <a:srgbClr val="0070C0"/>
               </a:solidFill>
               <a:prstDash val="dash"/>
             </a:ln>
@@ -7032,6 +4073,9 @@
               <a:avLst/>
             </a:prstGeom>
             <a:noFill/>
+            <a:ln>
+              <a:noFill/>
+            </a:ln>
           </p:spPr>
           <p:txBody>
             <a:bodyPr wrap="none" rtlCol="0">
@@ -7062,7 +4106,7 @@
         <p:grpSpPr>
           <a:xfrm>
             <a:off x="8416844" y="1063704"/>
-            <a:ext cx="2254638" cy="3284294"/>
+            <a:ext cx="2197144" cy="3284294"/>
             <a:chOff x="5457140" y="3361710"/>
             <a:chExt cx="1567165" cy="2769656"/>
           </a:xfrm>
@@ -7259,7 +4303,7 @@
         <p:spPr>
           <a:xfrm>
             <a:off x="3925438" y="2608364"/>
-            <a:ext cx="1301319" cy="11895"/>
+            <a:ext cx="1508317" cy="198206"/>
           </a:xfrm>
           <a:prstGeom prst="straightConnector1">
             <a:avLst/>
@@ -7405,7 +4449,7 @@
         </p:nvSpPr>
         <p:spPr>
           <a:xfrm>
-            <a:off x="5438646" y="1603748"/>
+            <a:off x="5468360" y="1505498"/>
             <a:ext cx="1805224" cy="1001870"/>
           </a:xfrm>
           <a:prstGeom prst="roundRect">
@@ -7443,19 +4487,19 @@
           </a:p>
           <a:p>
             <a:pPr algn="ctr"/>
-            <a:endParaRPr lang="en-US" sz="1100" dirty="0"/>
+            <a:endParaRPr lang="en-US" sz="1000" dirty="0"/>
           </a:p>
           <a:p>
             <a:pPr algn="ctr"/>
             <a:r>
-              <a:rPr lang="en-US" sz="1600" dirty="0"/>
+              <a:rPr lang="en-US" dirty="0"/>
               <a:t>+Upper </a:t>
             </a:r>
             <a:r>
-              <a:rPr lang="en-US" sz="1600" dirty="0" err="1"/>
+              <a:rPr lang="en-US" dirty="0" err="1"/>
               <a:t>Koykuk+Main</a:t>
             </a:r>
-            <a:endParaRPr lang="en-US" sz="1600" dirty="0"/>
+            <a:endParaRPr lang="en-US" dirty="0"/>
           </a:p>
         </p:txBody>
       </p:sp>
@@ -7501,14 +4545,14 @@
           <a:p>
             <a:pPr algn="ctr"/>
             <a:r>
-              <a:rPr lang="en-US" sz="1600" dirty="0"/>
+              <a:rPr lang="en-US" dirty="0"/>
               <a:t>Upper </a:t>
             </a:r>
             <a:r>
-              <a:rPr lang="en-US" sz="1600" dirty="0" err="1"/>
+              <a:rPr lang="en-US" dirty="0" err="1"/>
               <a:t>Koyukuk+Main</a:t>
             </a:r>
-            <a:endParaRPr lang="en-US" sz="1600" dirty="0"/>
+            <a:endParaRPr lang="en-US" dirty="0"/>
           </a:p>
         </p:txBody>
       </p:sp>
@@ -7560,25 +4604,580 @@
           </a:p>
         </p:txBody>
       </p:sp>
+      <p:sp>
+        <p:nvSpPr>
+          <p:cNvPr id="113" name="Rectangle: Rounded Corners 112">
+            <a:extLst>
+              <a:ext uri="{FF2B5EF4-FFF2-40B4-BE49-F238E27FC236}">
+                <a16:creationId xmlns:a16="http://schemas.microsoft.com/office/drawing/2014/main" id="{F83737AF-0639-C3E7-9A17-3AC512CB7A44}"/>
+              </a:ext>
+            </a:extLst>
+          </p:cNvPr>
+          <p:cNvSpPr/>
+          <p:nvPr/>
+        </p:nvSpPr>
+        <p:spPr>
+          <a:xfrm>
+            <a:off x="5479213" y="3452579"/>
+            <a:ext cx="1295357" cy="338625"/>
+          </a:xfrm>
+          <a:prstGeom prst="roundRect">
+            <a:avLst/>
+          </a:prstGeom>
+          <a:ln w="28575"/>
+        </p:spPr>
+        <p:style>
+          <a:lnRef idx="2">
+            <a:schemeClr val="accent2"/>
+          </a:lnRef>
+          <a:fillRef idx="1">
+            <a:schemeClr val="lt1"/>
+          </a:fillRef>
+          <a:effectRef idx="0">
+            <a:schemeClr val="accent2"/>
+          </a:effectRef>
+          <a:fontRef idx="minor">
+            <a:schemeClr val="dk1"/>
+          </a:fontRef>
+        </p:style>
+        <p:txBody>
+          <a:bodyPr rtlCol="0" anchor="ctr"/>
+          <a:lstStyle/>
+          <a:p>
+            <a:pPr algn="ctr"/>
+            <a:r>
+              <a:rPr lang="en-US" dirty="0"/>
+              <a:t>Tanana Fall</a:t>
+            </a:r>
+          </a:p>
+        </p:txBody>
+      </p:sp>
       <p:cxnSp>
         <p:nvCxnSpPr>
-          <p:cNvPr id="104" name="Straight Arrow Connector 103">
-            <a:extLst>
-              <a:ext uri="{FF2B5EF4-FFF2-40B4-BE49-F238E27FC236}">
-                <a16:creationId xmlns:a16="http://schemas.microsoft.com/office/drawing/2014/main" id="{294FBFE2-6E9F-6225-AABE-199D00C94E0C}"/>
+          <p:cNvPr id="123" name="Straight Connector 122">
+            <a:extLst>
+              <a:ext uri="{FF2B5EF4-FFF2-40B4-BE49-F238E27FC236}">
+                <a16:creationId xmlns:a16="http://schemas.microsoft.com/office/drawing/2014/main" id="{789C1B69-502A-CC2F-0290-1B69C94FCBDF}"/>
               </a:ext>
             </a:extLst>
           </p:cNvPr>
           <p:cNvCxnSpPr>
             <a:cxnSpLocks/>
-            <a:stCxn id="48" idx="3"/>
           </p:cNvCxnSpPr>
           <p:nvPr/>
         </p:nvCxnSpPr>
         <p:spPr>
-          <a:xfrm>
-            <a:off x="3830320" y="4958731"/>
-            <a:ext cx="1615468" cy="320886"/>
+          <a:xfrm flipV="1">
+            <a:off x="166464" y="3212947"/>
+            <a:ext cx="11785600" cy="88498"/>
+          </a:xfrm>
+          <a:prstGeom prst="line">
+            <a:avLst/>
+          </a:prstGeom>
+          <a:ln w="50800">
+            <a:solidFill>
+              <a:schemeClr val="tx1"/>
+            </a:solidFill>
+            <a:prstDash val="lgDash"/>
+          </a:ln>
+        </p:spPr>
+        <p:style>
+          <a:lnRef idx="1">
+            <a:schemeClr val="accent1"/>
+          </a:lnRef>
+          <a:fillRef idx="0">
+            <a:schemeClr val="accent1"/>
+          </a:fillRef>
+          <a:effectRef idx="0">
+            <a:schemeClr val="accent1"/>
+          </a:effectRef>
+          <a:fontRef idx="minor">
+            <a:schemeClr val="tx1"/>
+          </a:fontRef>
+        </p:style>
+      </p:cxnSp>
+      <p:sp>
+        <p:nvSpPr>
+          <p:cNvPr id="127" name="TextBox 126">
+            <a:extLst>
+              <a:ext uri="{FF2B5EF4-FFF2-40B4-BE49-F238E27FC236}">
+                <a16:creationId xmlns:a16="http://schemas.microsoft.com/office/drawing/2014/main" id="{B2724AC9-E2A3-2726-8E17-3AF4893A482F}"/>
+              </a:ext>
+            </a:extLst>
+          </p:cNvPr>
+          <p:cNvSpPr txBox="1"/>
+          <p:nvPr/>
+        </p:nvSpPr>
+        <p:spPr>
+          <a:xfrm>
+            <a:off x="131009" y="983872"/>
+            <a:ext cx="1593706" cy="584775"/>
+          </a:xfrm>
+          <a:prstGeom prst="rect">
+            <a:avLst/>
+          </a:prstGeom>
+          <a:noFill/>
+        </p:spPr>
+        <p:txBody>
+          <a:bodyPr wrap="none" rtlCol="0">
+            <a:spAutoFit/>
+          </a:bodyPr>
+          <a:lstStyle/>
+          <a:p>
+            <a:r>
+              <a:rPr lang="en-US" sz="3200" dirty="0"/>
+              <a:t>Summer</a:t>
+            </a:r>
+          </a:p>
+        </p:txBody>
+      </p:sp>
+      <p:sp>
+        <p:nvSpPr>
+          <p:cNvPr id="128" name="TextBox 127">
+            <a:extLst>
+              <a:ext uri="{FF2B5EF4-FFF2-40B4-BE49-F238E27FC236}">
+                <a16:creationId xmlns:a16="http://schemas.microsoft.com/office/drawing/2014/main" id="{73244D75-7B12-60F4-94DE-033E87AA87AA}"/>
+              </a:ext>
+            </a:extLst>
+          </p:cNvPr>
+          <p:cNvSpPr txBox="1"/>
+          <p:nvPr/>
+        </p:nvSpPr>
+        <p:spPr>
+          <a:xfrm>
+            <a:off x="604415" y="4681594"/>
+            <a:ext cx="816698" cy="646331"/>
+          </a:xfrm>
+          <a:prstGeom prst="rect">
+            <a:avLst/>
+          </a:prstGeom>
+          <a:noFill/>
+        </p:spPr>
+        <p:txBody>
+          <a:bodyPr wrap="none" rtlCol="0">
+            <a:spAutoFit/>
+          </a:bodyPr>
+          <a:lstStyle/>
+          <a:p>
+            <a:r>
+              <a:rPr lang="en-US" sz="3600" dirty="0"/>
+              <a:t>Fall</a:t>
+            </a:r>
+          </a:p>
+        </p:txBody>
+      </p:sp>
+      <p:sp>
+        <p:nvSpPr>
+          <p:cNvPr id="149" name="Rectangle: Rounded Corners 148">
+            <a:extLst>
+              <a:ext uri="{FF2B5EF4-FFF2-40B4-BE49-F238E27FC236}">
+                <a16:creationId xmlns:a16="http://schemas.microsoft.com/office/drawing/2014/main" id="{CEAF3456-E149-3325-BA30-C3377D928448}"/>
+              </a:ext>
+            </a:extLst>
+          </p:cNvPr>
+          <p:cNvSpPr/>
+          <p:nvPr/>
+        </p:nvSpPr>
+        <p:spPr>
+          <a:xfrm>
+            <a:off x="5349794" y="1959682"/>
+            <a:ext cx="1957862" cy="1205144"/>
+          </a:xfrm>
+          <a:prstGeom prst="roundRect">
+            <a:avLst/>
+          </a:prstGeom>
+          <a:noFill/>
+          <a:ln w="19050">
+            <a:solidFill>
+              <a:schemeClr val="tx1"/>
+            </a:solidFill>
+            <a:prstDash val="sysDash"/>
+          </a:ln>
+        </p:spPr>
+        <p:style>
+          <a:lnRef idx="2">
+            <a:schemeClr val="accent6"/>
+          </a:lnRef>
+          <a:fillRef idx="1">
+            <a:schemeClr val="lt1"/>
+          </a:fillRef>
+          <a:effectRef idx="0">
+            <a:schemeClr val="accent6"/>
+          </a:effectRef>
+          <a:fontRef idx="minor">
+            <a:schemeClr val="dk1"/>
+          </a:fontRef>
+        </p:style>
+        <p:txBody>
+          <a:bodyPr rtlCol="0" anchor="ctr"/>
+          <a:lstStyle/>
+          <a:p>
+            <a:pPr algn="ctr"/>
+            <a:endParaRPr lang="en-US" dirty="0"/>
+          </a:p>
+        </p:txBody>
+      </p:sp>
+      <p:sp>
+        <p:nvSpPr>
+          <p:cNvPr id="2" name="Rectangle: Rounded Corners 1">
+            <a:extLst>
+              <a:ext uri="{FF2B5EF4-FFF2-40B4-BE49-F238E27FC236}">
+                <a16:creationId xmlns:a16="http://schemas.microsoft.com/office/drawing/2014/main" id="{30B9341B-00F6-33E7-12A8-8FEBDF61CD43}"/>
+              </a:ext>
+            </a:extLst>
+          </p:cNvPr>
+          <p:cNvSpPr/>
+          <p:nvPr/>
+        </p:nvSpPr>
+        <p:spPr>
+          <a:xfrm>
+            <a:off x="2351067" y="5799423"/>
+            <a:ext cx="1175549" cy="333561"/>
+          </a:xfrm>
+          <a:prstGeom prst="roundRect">
+            <a:avLst/>
+          </a:prstGeom>
+          <a:ln w="19050"/>
+        </p:spPr>
+        <p:style>
+          <a:lnRef idx="2">
+            <a:schemeClr val="accent1"/>
+          </a:lnRef>
+          <a:fillRef idx="1">
+            <a:schemeClr val="lt1"/>
+          </a:fillRef>
+          <a:effectRef idx="0">
+            <a:schemeClr val="accent1"/>
+          </a:effectRef>
+          <a:fontRef idx="minor">
+            <a:schemeClr val="dk1"/>
+          </a:fontRef>
+        </p:style>
+        <p:txBody>
+          <a:bodyPr rtlCol="0" anchor="ctr"/>
+          <a:lstStyle/>
+          <a:p>
+            <a:pPr algn="ctr"/>
+            <a:r>
+              <a:rPr lang="en-US" dirty="0"/>
+              <a:t>Teslin</a:t>
+            </a:r>
+          </a:p>
+        </p:txBody>
+      </p:sp>
+      <p:sp>
+        <p:nvSpPr>
+          <p:cNvPr id="10" name="Rectangle: Rounded Corners 9">
+            <a:extLst>
+              <a:ext uri="{FF2B5EF4-FFF2-40B4-BE49-F238E27FC236}">
+                <a16:creationId xmlns:a16="http://schemas.microsoft.com/office/drawing/2014/main" id="{64C1C636-4F89-06C1-4E67-CF7ECADE2BD9}"/>
+              </a:ext>
+            </a:extLst>
+          </p:cNvPr>
+          <p:cNvSpPr/>
+          <p:nvPr/>
+        </p:nvSpPr>
+        <p:spPr>
+          <a:xfrm>
+            <a:off x="5508225" y="5874765"/>
+            <a:ext cx="1175549" cy="333561"/>
+          </a:xfrm>
+          <a:prstGeom prst="roundRect">
+            <a:avLst/>
+          </a:prstGeom>
+          <a:ln w="19050"/>
+        </p:spPr>
+        <p:style>
+          <a:lnRef idx="2">
+            <a:schemeClr val="accent1"/>
+          </a:lnRef>
+          <a:fillRef idx="1">
+            <a:schemeClr val="lt1"/>
+          </a:fillRef>
+          <a:effectRef idx="0">
+            <a:schemeClr val="accent1"/>
+          </a:effectRef>
+          <a:fontRef idx="minor">
+            <a:schemeClr val="dk1"/>
+          </a:fontRef>
+        </p:style>
+        <p:txBody>
+          <a:bodyPr rtlCol="0" anchor="ctr"/>
+          <a:lstStyle/>
+          <a:p>
+            <a:pPr algn="ctr"/>
+            <a:r>
+              <a:rPr lang="en-US" dirty="0"/>
+              <a:t>Teslin</a:t>
+            </a:r>
+          </a:p>
+        </p:txBody>
+      </p:sp>
+      <p:sp>
+        <p:nvSpPr>
+          <p:cNvPr id="35" name="Rectangle: Rounded Corners 34">
+            <a:extLst>
+              <a:ext uri="{FF2B5EF4-FFF2-40B4-BE49-F238E27FC236}">
+                <a16:creationId xmlns:a16="http://schemas.microsoft.com/office/drawing/2014/main" id="{4ADE7DA0-4A2F-4239-436D-3E18D4B662B8}"/>
+              </a:ext>
+            </a:extLst>
+          </p:cNvPr>
+          <p:cNvSpPr/>
+          <p:nvPr/>
+        </p:nvSpPr>
+        <p:spPr>
+          <a:xfrm>
+            <a:off x="2356418" y="5411403"/>
+            <a:ext cx="1175549" cy="316523"/>
+          </a:xfrm>
+          <a:prstGeom prst="roundRect">
+            <a:avLst/>
+          </a:prstGeom>
+          <a:ln w="19050"/>
+        </p:spPr>
+        <p:style>
+          <a:lnRef idx="2">
+            <a:schemeClr val="accent1"/>
+          </a:lnRef>
+          <a:fillRef idx="1">
+            <a:schemeClr val="lt1"/>
+          </a:fillRef>
+          <a:effectRef idx="0">
+            <a:schemeClr val="accent1"/>
+          </a:effectRef>
+          <a:fontRef idx="minor">
+            <a:schemeClr val="dk1"/>
+          </a:fontRef>
+        </p:style>
+        <p:txBody>
+          <a:bodyPr rtlCol="0" anchor="ctr"/>
+          <a:lstStyle/>
+          <a:p>
+            <a:pPr algn="ctr"/>
+            <a:r>
+              <a:rPr lang="en-US" dirty="0"/>
+              <a:t>White</a:t>
+            </a:r>
+          </a:p>
+        </p:txBody>
+      </p:sp>
+      <p:sp>
+        <p:nvSpPr>
+          <p:cNvPr id="41" name="Rectangle: Rounded Corners 40">
+            <a:extLst>
+              <a:ext uri="{FF2B5EF4-FFF2-40B4-BE49-F238E27FC236}">
+                <a16:creationId xmlns:a16="http://schemas.microsoft.com/office/drawing/2014/main" id="{17D50926-94F8-CA0B-8B57-E73F7D5E66C5}"/>
+              </a:ext>
+            </a:extLst>
+          </p:cNvPr>
+          <p:cNvSpPr/>
+          <p:nvPr/>
+        </p:nvSpPr>
+        <p:spPr>
+          <a:xfrm>
+            <a:off x="2131394" y="3401877"/>
+            <a:ext cx="1784603" cy="1001469"/>
+          </a:xfrm>
+          <a:prstGeom prst="roundRect">
+            <a:avLst/>
+          </a:prstGeom>
+          <a:ln w="28575">
+            <a:solidFill>
+              <a:srgbClr val="FFC000"/>
+            </a:solidFill>
+            <a:prstDash val="dash"/>
+          </a:ln>
+        </p:spPr>
+        <p:style>
+          <a:lnRef idx="2">
+            <a:schemeClr val="accent6"/>
+          </a:lnRef>
+          <a:fillRef idx="1">
+            <a:schemeClr val="lt1"/>
+          </a:fillRef>
+          <a:effectRef idx="0">
+            <a:schemeClr val="accent6"/>
+          </a:effectRef>
+          <a:fontRef idx="minor">
+            <a:schemeClr val="dk1"/>
+          </a:fontRef>
+        </p:style>
+        <p:txBody>
+          <a:bodyPr rtlCol="0" anchor="ctr"/>
+          <a:lstStyle/>
+          <a:p>
+            <a:pPr algn="ctr"/>
+            <a:endParaRPr lang="en-US" dirty="0"/>
+          </a:p>
+        </p:txBody>
+      </p:sp>
+      <p:sp>
+        <p:nvSpPr>
+          <p:cNvPr id="48" name="Rectangle: Rounded Corners 47">
+            <a:extLst>
+              <a:ext uri="{FF2B5EF4-FFF2-40B4-BE49-F238E27FC236}">
+                <a16:creationId xmlns:a16="http://schemas.microsoft.com/office/drawing/2014/main" id="{13C4F5B7-B239-9D45-D50B-6E11A8C6FFDD}"/>
+              </a:ext>
+            </a:extLst>
+          </p:cNvPr>
+          <p:cNvSpPr/>
+          <p:nvPr/>
+        </p:nvSpPr>
+        <p:spPr>
+          <a:xfrm>
+            <a:off x="2255546" y="4652451"/>
+            <a:ext cx="1574774" cy="612560"/>
+          </a:xfrm>
+          <a:prstGeom prst="roundRect">
+            <a:avLst/>
+          </a:prstGeom>
+          <a:ln>
+            <a:solidFill>
+              <a:srgbClr val="C00000"/>
+            </a:solidFill>
+          </a:ln>
+        </p:spPr>
+        <p:style>
+          <a:lnRef idx="2">
+            <a:schemeClr val="dk1"/>
+          </a:lnRef>
+          <a:fillRef idx="1">
+            <a:schemeClr val="lt1"/>
+          </a:fillRef>
+          <a:effectRef idx="0">
+            <a:schemeClr val="dk1"/>
+          </a:effectRef>
+          <a:fontRef idx="minor">
+            <a:schemeClr val="dk1"/>
+          </a:fontRef>
+        </p:style>
+        <p:txBody>
+          <a:bodyPr rtlCol="0" anchor="ctr"/>
+          <a:lstStyle/>
+          <a:p>
+            <a:pPr algn="ctr"/>
+            <a:r>
+              <a:rPr lang="en-US" dirty="0"/>
+              <a:t>Border US+CA</a:t>
+            </a:r>
+          </a:p>
+        </p:txBody>
+      </p:sp>
+      <p:sp>
+        <p:nvSpPr>
+          <p:cNvPr id="64" name="Rectangle: Rounded Corners 63">
+            <a:extLst>
+              <a:ext uri="{FF2B5EF4-FFF2-40B4-BE49-F238E27FC236}">
+                <a16:creationId xmlns:a16="http://schemas.microsoft.com/office/drawing/2014/main" id="{DDE5F3E5-59A6-DEF1-5B40-91BED8CC0B8D}"/>
+              </a:ext>
+            </a:extLst>
+          </p:cNvPr>
+          <p:cNvSpPr/>
+          <p:nvPr/>
+        </p:nvSpPr>
+        <p:spPr>
+          <a:xfrm>
+            <a:off x="5486378" y="5520017"/>
+            <a:ext cx="1175549" cy="316523"/>
+          </a:xfrm>
+          <a:prstGeom prst="roundRect">
+            <a:avLst/>
+          </a:prstGeom>
+          <a:ln w="19050"/>
+        </p:spPr>
+        <p:style>
+          <a:lnRef idx="2">
+            <a:schemeClr val="accent1"/>
+          </a:lnRef>
+          <a:fillRef idx="1">
+            <a:schemeClr val="lt1"/>
+          </a:fillRef>
+          <a:effectRef idx="0">
+            <a:schemeClr val="accent1"/>
+          </a:effectRef>
+          <a:fontRef idx="minor">
+            <a:schemeClr val="dk1"/>
+          </a:fontRef>
+        </p:style>
+        <p:txBody>
+          <a:bodyPr rtlCol="0" anchor="ctr"/>
+          <a:lstStyle/>
+          <a:p>
+            <a:pPr algn="ctr"/>
+            <a:r>
+              <a:rPr lang="en-US" dirty="0"/>
+              <a:t>White</a:t>
+            </a:r>
+          </a:p>
+        </p:txBody>
+      </p:sp>
+      <p:sp>
+        <p:nvSpPr>
+          <p:cNvPr id="77" name="Rectangle: Rounded Corners 76">
+            <a:extLst>
+              <a:ext uri="{FF2B5EF4-FFF2-40B4-BE49-F238E27FC236}">
+                <a16:creationId xmlns:a16="http://schemas.microsoft.com/office/drawing/2014/main" id="{2D3D554C-AD80-AEA5-AD6B-021D117B4E23}"/>
+              </a:ext>
+            </a:extLst>
+          </p:cNvPr>
+          <p:cNvSpPr/>
+          <p:nvPr/>
+        </p:nvSpPr>
+        <p:spPr>
+          <a:xfrm>
+            <a:off x="5508225" y="4566606"/>
+            <a:ext cx="1175549" cy="316523"/>
+          </a:xfrm>
+          <a:prstGeom prst="roundRect">
+            <a:avLst/>
+          </a:prstGeom>
+          <a:ln w="19050"/>
+        </p:spPr>
+        <p:style>
+          <a:lnRef idx="2">
+            <a:schemeClr val="accent1"/>
+          </a:lnRef>
+          <a:fillRef idx="1">
+            <a:schemeClr val="lt1"/>
+          </a:fillRef>
+          <a:effectRef idx="0">
+            <a:schemeClr val="accent1"/>
+          </a:effectRef>
+          <a:fontRef idx="minor">
+            <a:schemeClr val="dk1"/>
+          </a:fontRef>
+        </p:style>
+        <p:txBody>
+          <a:bodyPr rtlCol="0" anchor="ctr"/>
+          <a:lstStyle/>
+          <a:p>
+            <a:pPr algn="ctr"/>
+            <a:r>
+              <a:rPr lang="en-US" dirty="0"/>
+              <a:t>Porcupine</a:t>
+            </a:r>
+          </a:p>
+        </p:txBody>
+      </p:sp>
+      <p:cxnSp>
+        <p:nvCxnSpPr>
+          <p:cNvPr id="80" name="Straight Arrow Connector 79">
+            <a:extLst>
+              <a:ext uri="{FF2B5EF4-FFF2-40B4-BE49-F238E27FC236}">
+                <a16:creationId xmlns:a16="http://schemas.microsoft.com/office/drawing/2014/main" id="{3B5F37BA-CB0A-865D-4FA3-880B8BD7F93D}"/>
+              </a:ext>
+            </a:extLst>
+          </p:cNvPr>
+          <p:cNvCxnSpPr>
+            <a:cxnSpLocks/>
+            <a:endCxn id="3" idx="1"/>
+          </p:cNvCxnSpPr>
+          <p:nvPr/>
+        </p:nvCxnSpPr>
+        <p:spPr>
+          <a:xfrm>
+            <a:off x="3830866" y="4906434"/>
+            <a:ext cx="1642510" cy="361564"/>
           </a:xfrm>
           <a:prstGeom prst="straightConnector1">
             <a:avLst/>
@@ -7607,10 +5206,10 @@
       </p:cxnSp>
       <p:sp>
         <p:nvSpPr>
-          <p:cNvPr id="113" name="Rectangle: Rounded Corners 112">
-            <a:extLst>
-              <a:ext uri="{FF2B5EF4-FFF2-40B4-BE49-F238E27FC236}">
-                <a16:creationId xmlns:a16="http://schemas.microsoft.com/office/drawing/2014/main" id="{F83737AF-0639-C3E7-9A17-3AC512CB7A44}"/>
+          <p:cNvPr id="84" name="Rectangle: Rounded Corners 83">
+            <a:extLst>
+              <a:ext uri="{FF2B5EF4-FFF2-40B4-BE49-F238E27FC236}">
+                <a16:creationId xmlns:a16="http://schemas.microsoft.com/office/drawing/2014/main" id="{E44CC388-6C03-2D1C-DA40-259E7E5A82CB}"/>
               </a:ext>
             </a:extLst>
           </p:cNvPr>
@@ -7619,8 +5218,8 @@
         </p:nvSpPr>
         <p:spPr>
           <a:xfrm>
-            <a:off x="5479213" y="3452579"/>
-            <a:ext cx="1295357" cy="338625"/>
+            <a:off x="5478097" y="3884512"/>
+            <a:ext cx="1252349" cy="342477"/>
           </a:xfrm>
           <a:prstGeom prst="roundRect">
             <a:avLst/>
@@ -7648,17 +5247,546 @@
             <a:pPr algn="ctr"/>
             <a:r>
               <a:rPr lang="en-US" dirty="0"/>
-              <a:t>Tanana Fall</a:t>
+              <a:t>Border US</a:t>
             </a:r>
           </a:p>
         </p:txBody>
       </p:sp>
       <p:cxnSp>
         <p:nvCxnSpPr>
-          <p:cNvPr id="114" name="Straight Arrow Connector 113">
-            <a:extLst>
-              <a:ext uri="{FF2B5EF4-FFF2-40B4-BE49-F238E27FC236}">
-                <a16:creationId xmlns:a16="http://schemas.microsoft.com/office/drawing/2014/main" id="{B06A44D9-58DE-B8AE-0350-787EE4AA444E}"/>
+          <p:cNvPr id="85" name="Straight Arrow Connector 84">
+            <a:extLst>
+              <a:ext uri="{FF2B5EF4-FFF2-40B4-BE49-F238E27FC236}">
+                <a16:creationId xmlns:a16="http://schemas.microsoft.com/office/drawing/2014/main" id="{491BC7B2-AC2A-E9C5-81A5-DC032E986FE2}"/>
+              </a:ext>
+            </a:extLst>
+          </p:cNvPr>
+          <p:cNvCxnSpPr>
+            <a:cxnSpLocks/>
+            <a:endCxn id="84" idx="1"/>
+          </p:cNvCxnSpPr>
+          <p:nvPr/>
+        </p:nvCxnSpPr>
+        <p:spPr>
+          <a:xfrm flipV="1">
+            <a:off x="3831026" y="4055751"/>
+            <a:ext cx="1647071" cy="831919"/>
+          </a:xfrm>
+          <a:prstGeom prst="straightConnector1">
+            <a:avLst/>
+          </a:prstGeom>
+          <a:ln w="50800">
+            <a:solidFill>
+              <a:schemeClr val="tx1"/>
+            </a:solidFill>
+            <a:tailEnd type="triangle"/>
+          </a:ln>
+        </p:spPr>
+        <p:style>
+          <a:lnRef idx="1">
+            <a:schemeClr val="dk1"/>
+          </a:lnRef>
+          <a:fillRef idx="0">
+            <a:schemeClr val="dk1"/>
+          </a:fillRef>
+          <a:effectRef idx="0">
+            <a:schemeClr val="dk1"/>
+          </a:effectRef>
+          <a:fontRef idx="minor">
+            <a:schemeClr val="tx1"/>
+          </a:fontRef>
+        </p:style>
+      </p:cxnSp>
+      <p:sp>
+        <p:nvSpPr>
+          <p:cNvPr id="90" name="Rectangle: Rounded Corners 89">
+            <a:extLst>
+              <a:ext uri="{FF2B5EF4-FFF2-40B4-BE49-F238E27FC236}">
+                <a16:creationId xmlns:a16="http://schemas.microsoft.com/office/drawing/2014/main" id="{7A1619F0-4C92-A517-FAC4-A10AEB5A878E}"/>
+              </a:ext>
+            </a:extLst>
+          </p:cNvPr>
+          <p:cNvSpPr/>
+          <p:nvPr/>
+        </p:nvSpPr>
+        <p:spPr>
+          <a:xfrm>
+            <a:off x="8599469" y="5479539"/>
+            <a:ext cx="1175549" cy="316523"/>
+          </a:xfrm>
+          <a:prstGeom prst="roundRect">
+            <a:avLst/>
+          </a:prstGeom>
+          <a:ln w="19050"/>
+        </p:spPr>
+        <p:style>
+          <a:lnRef idx="2">
+            <a:schemeClr val="accent1"/>
+          </a:lnRef>
+          <a:fillRef idx="1">
+            <a:schemeClr val="lt1"/>
+          </a:fillRef>
+          <a:effectRef idx="0">
+            <a:schemeClr val="accent1"/>
+          </a:effectRef>
+          <a:fontRef idx="minor">
+            <a:schemeClr val="dk1"/>
+          </a:fontRef>
+        </p:style>
+        <p:txBody>
+          <a:bodyPr rtlCol="0" anchor="ctr"/>
+          <a:lstStyle/>
+          <a:p>
+            <a:pPr algn="ctr"/>
+            <a:r>
+              <a:rPr lang="en-US" dirty="0"/>
+              <a:t>White</a:t>
+            </a:r>
+          </a:p>
+        </p:txBody>
+      </p:sp>
+      <p:sp>
+        <p:nvSpPr>
+          <p:cNvPr id="91" name="Rectangle: Rounded Corners 90">
+            <a:extLst>
+              <a:ext uri="{FF2B5EF4-FFF2-40B4-BE49-F238E27FC236}">
+                <a16:creationId xmlns:a16="http://schemas.microsoft.com/office/drawing/2014/main" id="{1E07A608-E980-5B8D-57FB-78261FE42F46}"/>
+              </a:ext>
+            </a:extLst>
+          </p:cNvPr>
+          <p:cNvSpPr/>
+          <p:nvPr/>
+        </p:nvSpPr>
+        <p:spPr>
+          <a:xfrm>
+            <a:off x="8628981" y="5799423"/>
+            <a:ext cx="1175549" cy="333561"/>
+          </a:xfrm>
+          <a:prstGeom prst="roundRect">
+            <a:avLst/>
+          </a:prstGeom>
+          <a:ln w="19050"/>
+        </p:spPr>
+        <p:style>
+          <a:lnRef idx="2">
+            <a:schemeClr val="accent1"/>
+          </a:lnRef>
+          <a:fillRef idx="1">
+            <a:schemeClr val="lt1"/>
+          </a:fillRef>
+          <a:effectRef idx="0">
+            <a:schemeClr val="accent1"/>
+          </a:effectRef>
+          <a:fontRef idx="minor">
+            <a:schemeClr val="dk1"/>
+          </a:fontRef>
+        </p:style>
+        <p:txBody>
+          <a:bodyPr rtlCol="0" anchor="ctr"/>
+          <a:lstStyle/>
+          <a:p>
+            <a:pPr algn="ctr"/>
+            <a:r>
+              <a:rPr lang="en-US" dirty="0"/>
+              <a:t>Teslin</a:t>
+            </a:r>
+          </a:p>
+        </p:txBody>
+      </p:sp>
+      <p:sp>
+        <p:nvSpPr>
+          <p:cNvPr id="93" name="Rectangle: Rounded Corners 92">
+            <a:extLst>
+              <a:ext uri="{FF2B5EF4-FFF2-40B4-BE49-F238E27FC236}">
+                <a16:creationId xmlns:a16="http://schemas.microsoft.com/office/drawing/2014/main" id="{081727E2-A230-B997-3AD4-3D96E01BDF1C}"/>
+              </a:ext>
+            </a:extLst>
+          </p:cNvPr>
+          <p:cNvSpPr/>
+          <p:nvPr/>
+        </p:nvSpPr>
+        <p:spPr>
+          <a:xfrm>
+            <a:off x="8663858" y="4527741"/>
+            <a:ext cx="1175549" cy="316523"/>
+          </a:xfrm>
+          <a:prstGeom prst="roundRect">
+            <a:avLst/>
+          </a:prstGeom>
+          <a:ln w="19050"/>
+        </p:spPr>
+        <p:style>
+          <a:lnRef idx="2">
+            <a:schemeClr val="accent1"/>
+          </a:lnRef>
+          <a:fillRef idx="1">
+            <a:schemeClr val="lt1"/>
+          </a:fillRef>
+          <a:effectRef idx="0">
+            <a:schemeClr val="accent1"/>
+          </a:effectRef>
+          <a:fontRef idx="minor">
+            <a:schemeClr val="dk1"/>
+          </a:fontRef>
+        </p:style>
+        <p:txBody>
+          <a:bodyPr rtlCol="0" anchor="ctr"/>
+          <a:lstStyle/>
+          <a:p>
+            <a:pPr algn="ctr"/>
+            <a:r>
+              <a:rPr lang="en-US" dirty="0"/>
+              <a:t>Porcupine</a:t>
+            </a:r>
+          </a:p>
+        </p:txBody>
+      </p:sp>
+      <p:sp>
+        <p:nvSpPr>
+          <p:cNvPr id="97" name="Rectangle: Rounded Corners 96">
+            <a:extLst>
+              <a:ext uri="{FF2B5EF4-FFF2-40B4-BE49-F238E27FC236}">
+                <a16:creationId xmlns:a16="http://schemas.microsoft.com/office/drawing/2014/main" id="{B1D6D6BB-5B67-A452-9967-68E35C0F10BD}"/>
+              </a:ext>
+            </a:extLst>
+          </p:cNvPr>
+          <p:cNvSpPr/>
+          <p:nvPr/>
+        </p:nvSpPr>
+        <p:spPr>
+          <a:xfrm>
+            <a:off x="8714484" y="3793682"/>
+            <a:ext cx="1252349" cy="342477"/>
+          </a:xfrm>
+          <a:prstGeom prst="roundRect">
+            <a:avLst/>
+          </a:prstGeom>
+          <a:ln w="28575"/>
+        </p:spPr>
+        <p:style>
+          <a:lnRef idx="2">
+            <a:schemeClr val="accent2"/>
+          </a:lnRef>
+          <a:fillRef idx="1">
+            <a:schemeClr val="lt1"/>
+          </a:fillRef>
+          <a:effectRef idx="0">
+            <a:schemeClr val="accent2"/>
+          </a:effectRef>
+          <a:fontRef idx="minor">
+            <a:schemeClr val="dk1"/>
+          </a:fontRef>
+        </p:style>
+        <p:txBody>
+          <a:bodyPr rtlCol="0" anchor="ctr"/>
+          <a:lstStyle/>
+          <a:p>
+            <a:pPr algn="ctr"/>
+            <a:r>
+              <a:rPr lang="en-US" dirty="0"/>
+              <a:t>Border US</a:t>
+            </a:r>
+          </a:p>
+        </p:txBody>
+      </p:sp>
+      <p:sp>
+        <p:nvSpPr>
+          <p:cNvPr id="98" name="Rectangle: Rounded Corners 97">
+            <a:extLst>
+              <a:ext uri="{FF2B5EF4-FFF2-40B4-BE49-F238E27FC236}">
+                <a16:creationId xmlns:a16="http://schemas.microsoft.com/office/drawing/2014/main" id="{5AE7F774-A26D-41C4-E5B6-A83F01EC51A8}"/>
+              </a:ext>
+            </a:extLst>
+          </p:cNvPr>
+          <p:cNvSpPr/>
+          <p:nvPr/>
+        </p:nvSpPr>
+        <p:spPr>
+          <a:xfrm>
+            <a:off x="8714484" y="3325271"/>
+            <a:ext cx="1295357" cy="338625"/>
+          </a:xfrm>
+          <a:prstGeom prst="roundRect">
+            <a:avLst/>
+          </a:prstGeom>
+          <a:ln w="28575"/>
+        </p:spPr>
+        <p:style>
+          <a:lnRef idx="2">
+            <a:schemeClr val="accent2"/>
+          </a:lnRef>
+          <a:fillRef idx="1">
+            <a:schemeClr val="lt1"/>
+          </a:fillRef>
+          <a:effectRef idx="0">
+            <a:schemeClr val="accent2"/>
+          </a:effectRef>
+          <a:fontRef idx="minor">
+            <a:schemeClr val="dk1"/>
+          </a:fontRef>
+        </p:style>
+        <p:txBody>
+          <a:bodyPr rtlCol="0" anchor="ctr"/>
+          <a:lstStyle/>
+          <a:p>
+            <a:pPr algn="ctr"/>
+            <a:r>
+              <a:rPr lang="en-US" dirty="0"/>
+              <a:t>Tanana Fall</a:t>
+            </a:r>
+          </a:p>
+        </p:txBody>
+      </p:sp>
+      <p:sp>
+        <p:nvSpPr>
+          <p:cNvPr id="105" name="Rectangle: Rounded Corners 104">
+            <a:extLst>
+              <a:ext uri="{FF2B5EF4-FFF2-40B4-BE49-F238E27FC236}">
+                <a16:creationId xmlns:a16="http://schemas.microsoft.com/office/drawing/2014/main" id="{2EE1070C-90EE-4D01-2C6D-8B2C422085C1}"/>
+              </a:ext>
+            </a:extLst>
+          </p:cNvPr>
+          <p:cNvSpPr/>
+          <p:nvPr/>
+        </p:nvSpPr>
+        <p:spPr>
+          <a:xfrm>
+            <a:off x="8635765" y="2701839"/>
+            <a:ext cx="1730571" cy="327482"/>
+          </a:xfrm>
+          <a:prstGeom prst="roundRect">
+            <a:avLst/>
+          </a:prstGeom>
+          <a:ln w="28575"/>
+        </p:spPr>
+        <p:style>
+          <a:lnRef idx="2">
+            <a:schemeClr val="accent6"/>
+          </a:lnRef>
+          <a:fillRef idx="1">
+            <a:schemeClr val="lt1"/>
+          </a:fillRef>
+          <a:effectRef idx="0">
+            <a:schemeClr val="accent6"/>
+          </a:effectRef>
+          <a:fontRef idx="minor">
+            <a:schemeClr val="dk1"/>
+          </a:fontRef>
+        </p:style>
+        <p:txBody>
+          <a:bodyPr rtlCol="0" anchor="ctr"/>
+          <a:lstStyle/>
+          <a:p>
+            <a:pPr algn="ctr"/>
+            <a:r>
+              <a:rPr lang="en-US" dirty="0"/>
+              <a:t>Tanana Summer</a:t>
+            </a:r>
+          </a:p>
+        </p:txBody>
+      </p:sp>
+      <p:sp>
+        <p:nvSpPr>
+          <p:cNvPr id="112" name="Rectangle: Rounded Corners 111">
+            <a:extLst>
+              <a:ext uri="{FF2B5EF4-FFF2-40B4-BE49-F238E27FC236}">
+                <a16:creationId xmlns:a16="http://schemas.microsoft.com/office/drawing/2014/main" id="{6A6EC170-D286-6F91-A9B4-B03CE7194BEB}"/>
+              </a:ext>
+            </a:extLst>
+          </p:cNvPr>
+          <p:cNvSpPr/>
+          <p:nvPr/>
+        </p:nvSpPr>
+        <p:spPr>
+          <a:xfrm>
+            <a:off x="8635765" y="1593333"/>
+            <a:ext cx="1556275" cy="389174"/>
+          </a:xfrm>
+          <a:prstGeom prst="roundRect">
+            <a:avLst/>
+          </a:prstGeom>
+          <a:ln w="28575">
+            <a:solidFill>
+              <a:srgbClr val="7030A0"/>
+            </a:solidFill>
+          </a:ln>
+        </p:spPr>
+        <p:style>
+          <a:lnRef idx="2">
+            <a:schemeClr val="accent6"/>
+          </a:lnRef>
+          <a:fillRef idx="1">
+            <a:schemeClr val="lt1"/>
+          </a:fillRef>
+          <a:effectRef idx="0">
+            <a:schemeClr val="accent6"/>
+          </a:effectRef>
+          <a:fontRef idx="minor">
+            <a:schemeClr val="dk1"/>
+          </a:fontRef>
+        </p:style>
+        <p:txBody>
+          <a:bodyPr rtlCol="0" anchor="ctr"/>
+          <a:lstStyle/>
+          <a:p>
+            <a:pPr algn="ctr"/>
+            <a:r>
+              <a:rPr lang="en-US" dirty="0"/>
+              <a:t>Lower</a:t>
+            </a:r>
+          </a:p>
+        </p:txBody>
+      </p:sp>
+      <p:cxnSp>
+        <p:nvCxnSpPr>
+          <p:cNvPr id="119" name="Straight Arrow Connector 118">
+            <a:extLst>
+              <a:ext uri="{FF2B5EF4-FFF2-40B4-BE49-F238E27FC236}">
+                <a16:creationId xmlns:a16="http://schemas.microsoft.com/office/drawing/2014/main" id="{E6652B1D-F435-145C-9DF1-ED42D0A435A1}"/>
+              </a:ext>
+            </a:extLst>
+          </p:cNvPr>
+          <p:cNvCxnSpPr>
+            <a:cxnSpLocks/>
+            <a:endCxn id="96" idx="1"/>
+          </p:cNvCxnSpPr>
+          <p:nvPr/>
+        </p:nvCxnSpPr>
+        <p:spPr>
+          <a:xfrm>
+            <a:off x="7251185" y="1899455"/>
+            <a:ext cx="1388452" cy="481592"/>
+          </a:xfrm>
+          <a:prstGeom prst="straightConnector1">
+            <a:avLst/>
+          </a:prstGeom>
+          <a:ln w="50800">
+            <a:solidFill>
+              <a:schemeClr val="tx1"/>
+            </a:solidFill>
+            <a:tailEnd type="triangle"/>
+          </a:ln>
+        </p:spPr>
+        <p:style>
+          <a:lnRef idx="1">
+            <a:schemeClr val="dk1"/>
+          </a:lnRef>
+          <a:fillRef idx="0">
+            <a:schemeClr val="dk1"/>
+          </a:fillRef>
+          <a:effectRef idx="0">
+            <a:schemeClr val="dk1"/>
+          </a:effectRef>
+          <a:fontRef idx="minor">
+            <a:schemeClr val="tx1"/>
+          </a:fontRef>
+        </p:style>
+      </p:cxnSp>
+      <p:sp>
+        <p:nvSpPr>
+          <p:cNvPr id="122" name="Rectangle: Rounded Corners 121">
+            <a:extLst>
+              <a:ext uri="{FF2B5EF4-FFF2-40B4-BE49-F238E27FC236}">
+                <a16:creationId xmlns:a16="http://schemas.microsoft.com/office/drawing/2014/main" id="{48566416-6791-A1D3-7964-AC542E6A533F}"/>
+              </a:ext>
+            </a:extLst>
+          </p:cNvPr>
+          <p:cNvSpPr/>
+          <p:nvPr/>
+        </p:nvSpPr>
+        <p:spPr>
+          <a:xfrm>
+            <a:off x="8569740" y="2064483"/>
+            <a:ext cx="1957862" cy="1111552"/>
+          </a:xfrm>
+          <a:prstGeom prst="roundRect">
+            <a:avLst/>
+          </a:prstGeom>
+          <a:noFill/>
+          <a:ln w="19050">
+            <a:solidFill>
+              <a:schemeClr val="tx1"/>
+            </a:solidFill>
+            <a:prstDash val="sysDash"/>
+          </a:ln>
+        </p:spPr>
+        <p:style>
+          <a:lnRef idx="2">
+            <a:schemeClr val="accent6"/>
+          </a:lnRef>
+          <a:fillRef idx="1">
+            <a:schemeClr val="lt1"/>
+          </a:fillRef>
+          <a:effectRef idx="0">
+            <a:schemeClr val="accent6"/>
+          </a:effectRef>
+          <a:fontRef idx="minor">
+            <a:schemeClr val="dk1"/>
+          </a:fontRef>
+        </p:style>
+        <p:txBody>
+          <a:bodyPr rtlCol="0" anchor="ctr"/>
+          <a:lstStyle/>
+          <a:p>
+            <a:pPr algn="ctr"/>
+            <a:endParaRPr lang="en-US" dirty="0"/>
+          </a:p>
+        </p:txBody>
+      </p:sp>
+      <p:sp>
+        <p:nvSpPr>
+          <p:cNvPr id="3" name="Rectangle: Rounded Corners 2">
+            <a:extLst>
+              <a:ext uri="{FF2B5EF4-FFF2-40B4-BE49-F238E27FC236}">
+                <a16:creationId xmlns:a16="http://schemas.microsoft.com/office/drawing/2014/main" id="{54F94497-020D-3044-26B0-081CC2CA7A1E}"/>
+              </a:ext>
+            </a:extLst>
+          </p:cNvPr>
+          <p:cNvSpPr/>
+          <p:nvPr/>
+        </p:nvSpPr>
+        <p:spPr>
+          <a:xfrm>
+            <a:off x="5473376" y="5109736"/>
+            <a:ext cx="1573296" cy="316523"/>
+          </a:xfrm>
+          <a:prstGeom prst="roundRect">
+            <a:avLst/>
+          </a:prstGeom>
+          <a:ln w="19050"/>
+        </p:spPr>
+        <p:style>
+          <a:lnRef idx="2">
+            <a:schemeClr val="accent1"/>
+          </a:lnRef>
+          <a:fillRef idx="1">
+            <a:schemeClr val="lt1"/>
+          </a:fillRef>
+          <a:effectRef idx="0">
+            <a:schemeClr val="accent1"/>
+          </a:effectRef>
+          <a:fontRef idx="minor">
+            <a:schemeClr val="dk1"/>
+          </a:fontRef>
+        </p:style>
+        <p:txBody>
+          <a:bodyPr rtlCol="0" anchor="ctr"/>
+          <a:lstStyle/>
+          <a:p>
+            <a:pPr algn="ctr"/>
+            <a:r>
+              <a:rPr lang="en-US" dirty="0"/>
+              <a:t>Mainstem CA</a:t>
+            </a:r>
+          </a:p>
+        </p:txBody>
+      </p:sp>
+      <p:cxnSp>
+        <p:nvCxnSpPr>
+          <p:cNvPr id="11" name="Straight Arrow Connector 10">
+            <a:extLst>
+              <a:ext uri="{FF2B5EF4-FFF2-40B4-BE49-F238E27FC236}">
+                <a16:creationId xmlns:a16="http://schemas.microsoft.com/office/drawing/2014/main" id="{A0CC39F7-4D28-B0BE-DBCE-857EFABBA635}"/>
               </a:ext>
             </a:extLst>
           </p:cNvPr>
@@ -7669,8 +5797,582 @@
         </p:nvCxnSpPr>
         <p:spPr>
           <a:xfrm flipV="1">
-            <a:off x="3928454" y="3667760"/>
-            <a:ext cx="1517334" cy="236290"/>
+            <a:off x="3949307" y="4668456"/>
+            <a:ext cx="1537071" cy="184138"/>
+          </a:xfrm>
+          <a:prstGeom prst="straightConnector1">
+            <a:avLst/>
+          </a:prstGeom>
+          <a:ln w="50800">
+            <a:solidFill>
+              <a:schemeClr val="tx1"/>
+            </a:solidFill>
+            <a:tailEnd type="triangle"/>
+          </a:ln>
+        </p:spPr>
+        <p:style>
+          <a:lnRef idx="1">
+            <a:schemeClr val="dk1"/>
+          </a:lnRef>
+          <a:fillRef idx="0">
+            <a:schemeClr val="dk1"/>
+          </a:fillRef>
+          <a:effectRef idx="0">
+            <a:schemeClr val="dk1"/>
+          </a:effectRef>
+          <a:fontRef idx="minor">
+            <a:schemeClr val="tx1"/>
+          </a:fontRef>
+        </p:style>
+      </p:cxnSp>
+      <p:sp>
+        <p:nvSpPr>
+          <p:cNvPr id="13" name="Rectangle: Rounded Corners 12">
+            <a:extLst>
+              <a:ext uri="{FF2B5EF4-FFF2-40B4-BE49-F238E27FC236}">
+                <a16:creationId xmlns:a16="http://schemas.microsoft.com/office/drawing/2014/main" id="{70A2BBBB-28E9-AC0D-59E9-F19A13AF0BA4}"/>
+              </a:ext>
+            </a:extLst>
+          </p:cNvPr>
+          <p:cNvSpPr/>
+          <p:nvPr/>
+        </p:nvSpPr>
+        <p:spPr>
+          <a:xfrm>
+            <a:off x="8575515" y="5106405"/>
+            <a:ext cx="1573296" cy="316523"/>
+          </a:xfrm>
+          <a:prstGeom prst="roundRect">
+            <a:avLst/>
+          </a:prstGeom>
+          <a:ln w="19050"/>
+        </p:spPr>
+        <p:style>
+          <a:lnRef idx="2">
+            <a:schemeClr val="accent1"/>
+          </a:lnRef>
+          <a:fillRef idx="1">
+            <a:schemeClr val="lt1"/>
+          </a:fillRef>
+          <a:effectRef idx="0">
+            <a:schemeClr val="accent1"/>
+          </a:effectRef>
+          <a:fontRef idx="minor">
+            <a:schemeClr val="dk1"/>
+          </a:fontRef>
+        </p:style>
+        <p:txBody>
+          <a:bodyPr rtlCol="0" anchor="ctr"/>
+          <a:lstStyle/>
+          <a:p>
+            <a:pPr algn="ctr"/>
+            <a:r>
+              <a:rPr lang="en-US" dirty="0"/>
+              <a:t>Mainstem CA</a:t>
+            </a:r>
+          </a:p>
+        </p:txBody>
+      </p:sp>
+      <p:cxnSp>
+        <p:nvCxnSpPr>
+          <p:cNvPr id="19" name="Straight Arrow Connector 18">
+            <a:extLst>
+              <a:ext uri="{FF2B5EF4-FFF2-40B4-BE49-F238E27FC236}">
+                <a16:creationId xmlns:a16="http://schemas.microsoft.com/office/drawing/2014/main" id="{56661C67-2E03-9158-E4B4-52CF5A5DB38C}"/>
+              </a:ext>
+            </a:extLst>
+          </p:cNvPr>
+          <p:cNvCxnSpPr>
+            <a:cxnSpLocks/>
+          </p:cNvCxnSpPr>
+          <p:nvPr/>
+        </p:nvCxnSpPr>
+        <p:spPr>
+          <a:xfrm flipV="1">
+            <a:off x="3876468" y="1794911"/>
+            <a:ext cx="1591189" cy="748026"/>
+          </a:xfrm>
+          <a:prstGeom prst="straightConnector1">
+            <a:avLst/>
+          </a:prstGeom>
+          <a:ln w="50800">
+            <a:solidFill>
+              <a:schemeClr val="tx1"/>
+            </a:solidFill>
+            <a:tailEnd type="triangle"/>
+          </a:ln>
+        </p:spPr>
+        <p:style>
+          <a:lnRef idx="1">
+            <a:schemeClr val="dk1"/>
+          </a:lnRef>
+          <a:fillRef idx="0">
+            <a:schemeClr val="dk1"/>
+          </a:fillRef>
+          <a:effectRef idx="0">
+            <a:schemeClr val="dk1"/>
+          </a:effectRef>
+          <a:fontRef idx="minor">
+            <a:schemeClr val="tx1"/>
+          </a:fontRef>
+        </p:style>
+      </p:cxnSp>
+      <p:sp>
+        <p:nvSpPr>
+          <p:cNvPr id="23" name="Right Brace 22">
+            <a:extLst>
+              <a:ext uri="{FF2B5EF4-FFF2-40B4-BE49-F238E27FC236}">
+                <a16:creationId xmlns:a16="http://schemas.microsoft.com/office/drawing/2014/main" id="{91BD409D-F7B3-87B6-17BF-8B1ED095260E}"/>
+              </a:ext>
+            </a:extLst>
+          </p:cNvPr>
+          <p:cNvSpPr/>
+          <p:nvPr/>
+        </p:nvSpPr>
+        <p:spPr>
+          <a:xfrm>
+            <a:off x="10796990" y="5145745"/>
+            <a:ext cx="305146" cy="1044742"/>
+          </a:xfrm>
+          <a:prstGeom prst="rightBrace">
+            <a:avLst/>
+          </a:prstGeom>
+          <a:ln w="25400">
+            <a:solidFill>
+              <a:schemeClr val="tx1"/>
+            </a:solidFill>
+          </a:ln>
+        </p:spPr>
+        <p:style>
+          <a:lnRef idx="1">
+            <a:schemeClr val="accent1"/>
+          </a:lnRef>
+          <a:fillRef idx="0">
+            <a:schemeClr val="accent1"/>
+          </a:fillRef>
+          <a:effectRef idx="0">
+            <a:schemeClr val="accent1"/>
+          </a:effectRef>
+          <a:fontRef idx="minor">
+            <a:schemeClr val="tx1"/>
+          </a:fontRef>
+        </p:style>
+        <p:txBody>
+          <a:bodyPr rtlCol="0" anchor="ctr"/>
+          <a:lstStyle/>
+          <a:p>
+            <a:pPr algn="ctr"/>
+            <a:endParaRPr lang="en-US"/>
+          </a:p>
+        </p:txBody>
+      </p:sp>
+      <p:sp>
+        <p:nvSpPr>
+          <p:cNvPr id="27" name="TextBox 26">
+            <a:extLst>
+              <a:ext uri="{FF2B5EF4-FFF2-40B4-BE49-F238E27FC236}">
+                <a16:creationId xmlns:a16="http://schemas.microsoft.com/office/drawing/2014/main" id="{1FD0D94B-94B1-694B-C6F3-3C8EDBF533DE}"/>
+              </a:ext>
+            </a:extLst>
+          </p:cNvPr>
+          <p:cNvSpPr txBox="1"/>
+          <p:nvPr/>
+        </p:nvSpPr>
+        <p:spPr>
+          <a:xfrm>
+            <a:off x="11102136" y="5479026"/>
+            <a:ext cx="1151979" cy="369332"/>
+          </a:xfrm>
+          <a:prstGeom prst="rect">
+            <a:avLst/>
+          </a:prstGeom>
+          <a:noFill/>
+        </p:spPr>
+        <p:txBody>
+          <a:bodyPr wrap="square" rtlCol="0">
+            <a:spAutoFit/>
+          </a:bodyPr>
+          <a:lstStyle/>
+          <a:p>
+            <a:r>
+              <a:rPr lang="en-US" dirty="0"/>
+              <a:t>Mainstem</a:t>
+            </a:r>
+          </a:p>
+        </p:txBody>
+      </p:sp>
+      <p:sp>
+        <p:nvSpPr>
+          <p:cNvPr id="32" name="Right Brace 31">
+            <a:extLst>
+              <a:ext uri="{FF2B5EF4-FFF2-40B4-BE49-F238E27FC236}">
+                <a16:creationId xmlns:a16="http://schemas.microsoft.com/office/drawing/2014/main" id="{ABF0E4D7-64D4-9FBA-D659-619F39D10F5D}"/>
+              </a:ext>
+            </a:extLst>
+          </p:cNvPr>
+          <p:cNvSpPr/>
+          <p:nvPr/>
+        </p:nvSpPr>
+        <p:spPr>
+          <a:xfrm>
+            <a:off x="10775210" y="4371515"/>
+            <a:ext cx="326926" cy="506220"/>
+          </a:xfrm>
+          <a:prstGeom prst="rightBrace">
+            <a:avLst/>
+          </a:prstGeom>
+          <a:ln w="25400">
+            <a:solidFill>
+              <a:schemeClr val="tx1"/>
+            </a:solidFill>
+          </a:ln>
+        </p:spPr>
+        <p:style>
+          <a:lnRef idx="1">
+            <a:schemeClr val="accent1"/>
+          </a:lnRef>
+          <a:fillRef idx="0">
+            <a:schemeClr val="accent1"/>
+          </a:fillRef>
+          <a:effectRef idx="0">
+            <a:schemeClr val="accent1"/>
+          </a:effectRef>
+          <a:fontRef idx="minor">
+            <a:schemeClr val="tx1"/>
+          </a:fontRef>
+        </p:style>
+        <p:txBody>
+          <a:bodyPr rtlCol="0" anchor="ctr"/>
+          <a:lstStyle/>
+          <a:p>
+            <a:pPr algn="ctr"/>
+            <a:endParaRPr lang="en-US"/>
+          </a:p>
+        </p:txBody>
+      </p:sp>
+      <p:sp>
+        <p:nvSpPr>
+          <p:cNvPr id="33" name="TextBox 32">
+            <a:extLst>
+              <a:ext uri="{FF2B5EF4-FFF2-40B4-BE49-F238E27FC236}">
+                <a16:creationId xmlns:a16="http://schemas.microsoft.com/office/drawing/2014/main" id="{4BEE2B6B-E88B-4147-09CF-EDBD270FB460}"/>
+              </a:ext>
+            </a:extLst>
+          </p:cNvPr>
+          <p:cNvSpPr txBox="1"/>
+          <p:nvPr/>
+        </p:nvSpPr>
+        <p:spPr>
+          <a:xfrm>
+            <a:off x="11089182" y="4434284"/>
+            <a:ext cx="1151979" cy="369332"/>
+          </a:xfrm>
+          <a:prstGeom prst="rect">
+            <a:avLst/>
+          </a:prstGeom>
+          <a:noFill/>
+        </p:spPr>
+        <p:txBody>
+          <a:bodyPr wrap="square" rtlCol="0">
+            <a:spAutoFit/>
+          </a:bodyPr>
+          <a:lstStyle/>
+          <a:p>
+            <a:r>
+              <a:rPr lang="en-US" dirty="0"/>
+              <a:t>Porcupine</a:t>
+            </a:r>
+          </a:p>
+        </p:txBody>
+      </p:sp>
+      <p:sp>
+        <p:nvSpPr>
+          <p:cNvPr id="39" name="Right Brace 38">
+            <a:extLst>
+              <a:ext uri="{FF2B5EF4-FFF2-40B4-BE49-F238E27FC236}">
+                <a16:creationId xmlns:a16="http://schemas.microsoft.com/office/drawing/2014/main" id="{F62F63CD-8E74-6A33-EC7A-22D88FB29729}"/>
+              </a:ext>
+            </a:extLst>
+          </p:cNvPr>
+          <p:cNvSpPr/>
+          <p:nvPr/>
+        </p:nvSpPr>
+        <p:spPr>
+          <a:xfrm>
+            <a:off x="10736240" y="3746754"/>
+            <a:ext cx="326926" cy="449402"/>
+          </a:xfrm>
+          <a:prstGeom prst="rightBrace">
+            <a:avLst/>
+          </a:prstGeom>
+          <a:ln w="25400">
+            <a:solidFill>
+              <a:schemeClr val="tx1"/>
+            </a:solidFill>
+          </a:ln>
+        </p:spPr>
+        <p:style>
+          <a:lnRef idx="1">
+            <a:schemeClr val="accent1"/>
+          </a:lnRef>
+          <a:fillRef idx="0">
+            <a:schemeClr val="accent1"/>
+          </a:fillRef>
+          <a:effectRef idx="0">
+            <a:schemeClr val="accent1"/>
+          </a:effectRef>
+          <a:fontRef idx="minor">
+            <a:schemeClr val="tx1"/>
+          </a:fontRef>
+        </p:style>
+        <p:txBody>
+          <a:bodyPr rtlCol="0" anchor="ctr"/>
+          <a:lstStyle/>
+          <a:p>
+            <a:pPr algn="ctr"/>
+            <a:endParaRPr lang="en-US"/>
+          </a:p>
+        </p:txBody>
+      </p:sp>
+      <p:sp>
+        <p:nvSpPr>
+          <p:cNvPr id="42" name="TextBox 41">
+            <a:extLst>
+              <a:ext uri="{FF2B5EF4-FFF2-40B4-BE49-F238E27FC236}">
+                <a16:creationId xmlns:a16="http://schemas.microsoft.com/office/drawing/2014/main" id="{A5C70087-B064-1138-7858-542AB76AB08C}"/>
+              </a:ext>
+            </a:extLst>
+          </p:cNvPr>
+          <p:cNvSpPr txBox="1"/>
+          <p:nvPr/>
+        </p:nvSpPr>
+        <p:spPr>
+          <a:xfrm>
+            <a:off x="11102136" y="3626031"/>
+            <a:ext cx="886136" cy="646331"/>
+          </a:xfrm>
+          <a:prstGeom prst="rect">
+            <a:avLst/>
+          </a:prstGeom>
+          <a:noFill/>
+        </p:spPr>
+        <p:txBody>
+          <a:bodyPr wrap="square" rtlCol="0">
+            <a:spAutoFit/>
+          </a:bodyPr>
+          <a:lstStyle/>
+          <a:p>
+            <a:r>
+              <a:rPr lang="en-US" dirty="0"/>
+              <a:t>Upper </a:t>
+            </a:r>
+          </a:p>
+          <a:p>
+            <a:r>
+              <a:rPr lang="en-US" dirty="0"/>
+              <a:t>Yukon</a:t>
+            </a:r>
+          </a:p>
+        </p:txBody>
+      </p:sp>
+      <p:sp>
+        <p:nvSpPr>
+          <p:cNvPr id="45" name="Right Brace 44">
+            <a:extLst>
+              <a:ext uri="{FF2B5EF4-FFF2-40B4-BE49-F238E27FC236}">
+                <a16:creationId xmlns:a16="http://schemas.microsoft.com/office/drawing/2014/main" id="{4C45D17F-FDBE-459E-EA9D-FA16235C6EFF}"/>
+              </a:ext>
+            </a:extLst>
+          </p:cNvPr>
+          <p:cNvSpPr/>
+          <p:nvPr/>
+        </p:nvSpPr>
+        <p:spPr>
+          <a:xfrm flipV="1">
+            <a:off x="10760023" y="3310210"/>
+            <a:ext cx="273428" cy="372276"/>
+          </a:xfrm>
+          <a:prstGeom prst="rightBrace">
+            <a:avLst/>
+          </a:prstGeom>
+          <a:ln w="25400">
+            <a:solidFill>
+              <a:schemeClr val="tx1"/>
+            </a:solidFill>
+          </a:ln>
+        </p:spPr>
+        <p:style>
+          <a:lnRef idx="1">
+            <a:schemeClr val="accent1"/>
+          </a:lnRef>
+          <a:fillRef idx="0">
+            <a:schemeClr val="accent1"/>
+          </a:fillRef>
+          <a:effectRef idx="0">
+            <a:schemeClr val="accent1"/>
+          </a:effectRef>
+          <a:fontRef idx="minor">
+            <a:schemeClr val="tx1"/>
+          </a:fontRef>
+        </p:style>
+        <p:txBody>
+          <a:bodyPr rtlCol="0" anchor="ctr"/>
+          <a:lstStyle/>
+          <a:p>
+            <a:pPr algn="ctr"/>
+            <a:endParaRPr lang="en-US"/>
+          </a:p>
+        </p:txBody>
+      </p:sp>
+      <p:sp>
+        <p:nvSpPr>
+          <p:cNvPr id="46" name="TextBox 45">
+            <a:extLst>
+              <a:ext uri="{FF2B5EF4-FFF2-40B4-BE49-F238E27FC236}">
+                <a16:creationId xmlns:a16="http://schemas.microsoft.com/office/drawing/2014/main" id="{E714934D-03C0-0D9A-7109-C18B843249F8}"/>
+              </a:ext>
+            </a:extLst>
+          </p:cNvPr>
+          <p:cNvSpPr txBox="1"/>
+          <p:nvPr/>
+        </p:nvSpPr>
+        <p:spPr>
+          <a:xfrm>
+            <a:off x="11052602" y="3319450"/>
+            <a:ext cx="1151979" cy="369332"/>
+          </a:xfrm>
+          <a:prstGeom prst="rect">
+            <a:avLst/>
+          </a:prstGeom>
+          <a:noFill/>
+        </p:spPr>
+        <p:txBody>
+          <a:bodyPr wrap="square" rtlCol="0">
+            <a:spAutoFit/>
+          </a:bodyPr>
+          <a:lstStyle/>
+          <a:p>
+            <a:r>
+              <a:rPr lang="en-US" dirty="0"/>
+              <a:t>Tanana</a:t>
+            </a:r>
+          </a:p>
+        </p:txBody>
+      </p:sp>
+      <p:sp>
+        <p:nvSpPr>
+          <p:cNvPr id="50" name="Rectangle: Rounded Corners 49">
+            <a:extLst>
+              <a:ext uri="{FF2B5EF4-FFF2-40B4-BE49-F238E27FC236}">
+                <a16:creationId xmlns:a16="http://schemas.microsoft.com/office/drawing/2014/main" id="{A5861132-ADD0-1E3E-79C9-1523B0ACF6EE}"/>
+              </a:ext>
+            </a:extLst>
+          </p:cNvPr>
+          <p:cNvSpPr/>
+          <p:nvPr/>
+        </p:nvSpPr>
+        <p:spPr>
+          <a:xfrm>
+            <a:off x="2401348" y="3476319"/>
+            <a:ext cx="1232513" cy="370440"/>
+          </a:xfrm>
+          <a:prstGeom prst="roundRect">
+            <a:avLst/>
+          </a:prstGeom>
+          <a:ln w="25400"/>
+        </p:spPr>
+        <p:style>
+          <a:lnRef idx="2">
+            <a:schemeClr val="accent2"/>
+          </a:lnRef>
+          <a:fillRef idx="1">
+            <a:schemeClr val="lt1"/>
+          </a:fillRef>
+          <a:effectRef idx="0">
+            <a:schemeClr val="accent2"/>
+          </a:effectRef>
+          <a:fontRef idx="minor">
+            <a:schemeClr val="dk1"/>
+          </a:fontRef>
+        </p:style>
+        <p:txBody>
+          <a:bodyPr rtlCol="0" anchor="ctr"/>
+          <a:lstStyle/>
+          <a:p>
+            <a:pPr algn="ctr"/>
+            <a:r>
+              <a:rPr lang="en-US" dirty="0"/>
+              <a:t>Toklat</a:t>
+            </a:r>
+          </a:p>
+        </p:txBody>
+      </p:sp>
+      <p:sp>
+        <p:nvSpPr>
+          <p:cNvPr id="51" name="Rectangle: Rounded Corners 50">
+            <a:extLst>
+              <a:ext uri="{FF2B5EF4-FFF2-40B4-BE49-F238E27FC236}">
+                <a16:creationId xmlns:a16="http://schemas.microsoft.com/office/drawing/2014/main" id="{345E0B88-DC0A-C635-ECED-DB42D2612F84}"/>
+              </a:ext>
+            </a:extLst>
+          </p:cNvPr>
+          <p:cNvSpPr/>
+          <p:nvPr/>
+        </p:nvSpPr>
+        <p:spPr>
+          <a:xfrm>
+            <a:off x="2284737" y="3930643"/>
+            <a:ext cx="1565334" cy="370440"/>
+          </a:xfrm>
+          <a:prstGeom prst="roundRect">
+            <a:avLst/>
+          </a:prstGeom>
+          <a:ln w="25400"/>
+        </p:spPr>
+        <p:style>
+          <a:lnRef idx="2">
+            <a:schemeClr val="accent2"/>
+          </a:lnRef>
+          <a:fillRef idx="1">
+            <a:schemeClr val="lt1"/>
+          </a:fillRef>
+          <a:effectRef idx="0">
+            <a:schemeClr val="accent2"/>
+          </a:effectRef>
+          <a:fontRef idx="minor">
+            <a:schemeClr val="dk1"/>
+          </a:fontRef>
+        </p:style>
+        <p:txBody>
+          <a:bodyPr rtlCol="0" anchor="ctr"/>
+          <a:lstStyle/>
+          <a:p>
+            <a:pPr algn="ctr"/>
+            <a:r>
+              <a:rPr lang="en-US" dirty="0"/>
+              <a:t>Upper Tanana</a:t>
+            </a:r>
+          </a:p>
+        </p:txBody>
+      </p:sp>
+      <p:cxnSp>
+        <p:nvCxnSpPr>
+          <p:cNvPr id="114" name="Straight Arrow Connector 113">
+            <a:extLst>
+              <a:ext uri="{FF2B5EF4-FFF2-40B4-BE49-F238E27FC236}">
+                <a16:creationId xmlns:a16="http://schemas.microsoft.com/office/drawing/2014/main" id="{B06A44D9-58DE-B8AE-0350-787EE4AA444E}"/>
+              </a:ext>
+            </a:extLst>
+          </p:cNvPr>
+          <p:cNvCxnSpPr>
+            <a:cxnSpLocks/>
+          </p:cNvCxnSpPr>
+          <p:nvPr/>
+        </p:nvCxnSpPr>
+        <p:spPr>
+          <a:xfrm>
+            <a:off x="3702546" y="3667760"/>
+            <a:ext cx="1743242" cy="0"/>
           </a:xfrm>
           <a:prstGeom prst="straightConnector1">
             <a:avLst/>
@@ -7699,10 +6401,10 @@
       </p:cxnSp>
       <p:cxnSp>
         <p:nvCxnSpPr>
-          <p:cNvPr id="123" name="Straight Connector 122">
-            <a:extLst>
-              <a:ext uri="{FF2B5EF4-FFF2-40B4-BE49-F238E27FC236}">
-                <a16:creationId xmlns:a16="http://schemas.microsoft.com/office/drawing/2014/main" id="{789C1B69-502A-CC2F-0290-1B69C94FCBDF}"/>
+          <p:cNvPr id="53" name="Straight Arrow Connector 52">
+            <a:extLst>
+              <a:ext uri="{FF2B5EF4-FFF2-40B4-BE49-F238E27FC236}">
+                <a16:creationId xmlns:a16="http://schemas.microsoft.com/office/drawing/2014/main" id="{0E552CEF-004E-7E4C-F315-2525293A890A}"/>
               </a:ext>
             </a:extLst>
           </p:cNvPr>
@@ -7713,576 +6415,8 @@
         </p:nvCxnSpPr>
         <p:spPr>
           <a:xfrm flipV="1">
-            <a:off x="166464" y="3212947"/>
-            <a:ext cx="11785600" cy="88498"/>
-          </a:xfrm>
-          <a:prstGeom prst="line">
-            <a:avLst/>
-          </a:prstGeom>
-          <a:ln w="50800">
-            <a:solidFill>
-              <a:schemeClr val="tx1"/>
-            </a:solidFill>
-            <a:prstDash val="lgDash"/>
-          </a:ln>
-        </p:spPr>
-        <p:style>
-          <a:lnRef idx="1">
-            <a:schemeClr val="accent1"/>
-          </a:lnRef>
-          <a:fillRef idx="0">
-            <a:schemeClr val="accent1"/>
-          </a:fillRef>
-          <a:effectRef idx="0">
-            <a:schemeClr val="accent1"/>
-          </a:effectRef>
-          <a:fontRef idx="minor">
-            <a:schemeClr val="tx1"/>
-          </a:fontRef>
-        </p:style>
-      </p:cxnSp>
-      <p:sp>
-        <p:nvSpPr>
-          <p:cNvPr id="127" name="TextBox 126">
-            <a:extLst>
-              <a:ext uri="{FF2B5EF4-FFF2-40B4-BE49-F238E27FC236}">
-                <a16:creationId xmlns:a16="http://schemas.microsoft.com/office/drawing/2014/main" id="{B2724AC9-E2A3-2726-8E17-3AF4893A482F}"/>
-              </a:ext>
-            </a:extLst>
-          </p:cNvPr>
-          <p:cNvSpPr txBox="1"/>
-          <p:nvPr/>
-        </p:nvSpPr>
-        <p:spPr>
-          <a:xfrm>
-            <a:off x="131009" y="983872"/>
-            <a:ext cx="1593706" cy="584775"/>
-          </a:xfrm>
-          <a:prstGeom prst="rect">
-            <a:avLst/>
-          </a:prstGeom>
-          <a:noFill/>
-        </p:spPr>
-        <p:txBody>
-          <a:bodyPr wrap="none" rtlCol="0">
-            <a:spAutoFit/>
-          </a:bodyPr>
-          <a:lstStyle/>
-          <a:p>
-            <a:r>
-              <a:rPr lang="en-US" sz="3200" dirty="0"/>
-              <a:t>Summer</a:t>
-            </a:r>
-          </a:p>
-        </p:txBody>
-      </p:sp>
-      <p:sp>
-        <p:nvSpPr>
-          <p:cNvPr id="128" name="TextBox 127">
-            <a:extLst>
-              <a:ext uri="{FF2B5EF4-FFF2-40B4-BE49-F238E27FC236}">
-                <a16:creationId xmlns:a16="http://schemas.microsoft.com/office/drawing/2014/main" id="{73244D75-7B12-60F4-94DE-033E87AA87AA}"/>
-              </a:ext>
-            </a:extLst>
-          </p:cNvPr>
-          <p:cNvSpPr txBox="1"/>
-          <p:nvPr/>
-        </p:nvSpPr>
-        <p:spPr>
-          <a:xfrm>
-            <a:off x="604415" y="4681594"/>
-            <a:ext cx="816698" cy="646331"/>
-          </a:xfrm>
-          <a:prstGeom prst="rect">
-            <a:avLst/>
-          </a:prstGeom>
-          <a:noFill/>
-        </p:spPr>
-        <p:txBody>
-          <a:bodyPr wrap="none" rtlCol="0">
-            <a:spAutoFit/>
-          </a:bodyPr>
-          <a:lstStyle/>
-          <a:p>
-            <a:r>
-              <a:rPr lang="en-US" sz="3600" dirty="0"/>
-              <a:t>Fall</a:t>
-            </a:r>
-          </a:p>
-        </p:txBody>
-      </p:sp>
-      <p:sp>
-        <p:nvSpPr>
-          <p:cNvPr id="149" name="Rectangle: Rounded Corners 148">
-            <a:extLst>
-              <a:ext uri="{FF2B5EF4-FFF2-40B4-BE49-F238E27FC236}">
-                <a16:creationId xmlns:a16="http://schemas.microsoft.com/office/drawing/2014/main" id="{CEAF3456-E149-3325-BA30-C3377D928448}"/>
-              </a:ext>
-            </a:extLst>
-          </p:cNvPr>
-          <p:cNvSpPr/>
-          <p:nvPr/>
-        </p:nvSpPr>
-        <p:spPr>
-          <a:xfrm>
-            <a:off x="5349794" y="2053274"/>
-            <a:ext cx="1957862" cy="1111552"/>
-          </a:xfrm>
-          <a:prstGeom prst="roundRect">
-            <a:avLst/>
-          </a:prstGeom>
-          <a:noFill/>
-          <a:ln w="19050">
-            <a:solidFill>
-              <a:schemeClr val="tx1"/>
-            </a:solidFill>
-            <a:prstDash val="sysDash"/>
-          </a:ln>
-        </p:spPr>
-        <p:style>
-          <a:lnRef idx="2">
-            <a:schemeClr val="accent6"/>
-          </a:lnRef>
-          <a:fillRef idx="1">
-            <a:schemeClr val="lt1"/>
-          </a:fillRef>
-          <a:effectRef idx="0">
-            <a:schemeClr val="accent6"/>
-          </a:effectRef>
-          <a:fontRef idx="minor">
-            <a:schemeClr val="dk1"/>
-          </a:fontRef>
-        </p:style>
-        <p:txBody>
-          <a:bodyPr rtlCol="0" anchor="ctr"/>
-          <a:lstStyle/>
-          <a:p>
-            <a:pPr algn="ctr"/>
-            <a:endParaRPr lang="en-US" dirty="0"/>
-          </a:p>
-        </p:txBody>
-      </p:sp>
-      <p:sp>
-        <p:nvSpPr>
-          <p:cNvPr id="2" name="Rectangle: Rounded Corners 1">
-            <a:extLst>
-              <a:ext uri="{FF2B5EF4-FFF2-40B4-BE49-F238E27FC236}">
-                <a16:creationId xmlns:a16="http://schemas.microsoft.com/office/drawing/2014/main" id="{30B9341B-00F6-33E7-12A8-8FEBDF61CD43}"/>
-              </a:ext>
-            </a:extLst>
-          </p:cNvPr>
-          <p:cNvSpPr/>
-          <p:nvPr/>
-        </p:nvSpPr>
-        <p:spPr>
-          <a:xfrm>
-            <a:off x="2351067" y="5799423"/>
-            <a:ext cx="1175549" cy="333561"/>
-          </a:xfrm>
-          <a:prstGeom prst="roundRect">
-            <a:avLst/>
-          </a:prstGeom>
-          <a:ln w="19050"/>
-        </p:spPr>
-        <p:style>
-          <a:lnRef idx="2">
-            <a:schemeClr val="accent1"/>
-          </a:lnRef>
-          <a:fillRef idx="1">
-            <a:schemeClr val="lt1"/>
-          </a:fillRef>
-          <a:effectRef idx="0">
-            <a:schemeClr val="accent1"/>
-          </a:effectRef>
-          <a:fontRef idx="minor">
-            <a:schemeClr val="dk1"/>
-          </a:fontRef>
-        </p:style>
-        <p:txBody>
-          <a:bodyPr rtlCol="0" anchor="ctr"/>
-          <a:lstStyle/>
-          <a:p>
-            <a:pPr algn="ctr"/>
-            <a:r>
-              <a:rPr lang="en-US" dirty="0"/>
-              <a:t>Teslin</a:t>
-            </a:r>
-          </a:p>
-        </p:txBody>
-      </p:sp>
-      <p:sp>
-        <p:nvSpPr>
-          <p:cNvPr id="10" name="Rectangle: Rounded Corners 9">
-            <a:extLst>
-              <a:ext uri="{FF2B5EF4-FFF2-40B4-BE49-F238E27FC236}">
-                <a16:creationId xmlns:a16="http://schemas.microsoft.com/office/drawing/2014/main" id="{64C1C636-4F89-06C1-4E67-CF7ECADE2BD9}"/>
-              </a:ext>
-            </a:extLst>
-          </p:cNvPr>
-          <p:cNvSpPr/>
-          <p:nvPr/>
-        </p:nvSpPr>
-        <p:spPr>
-          <a:xfrm>
-            <a:off x="5508225" y="5874765"/>
-            <a:ext cx="1175549" cy="333561"/>
-          </a:xfrm>
-          <a:prstGeom prst="roundRect">
-            <a:avLst/>
-          </a:prstGeom>
-          <a:ln w="19050"/>
-        </p:spPr>
-        <p:style>
-          <a:lnRef idx="2">
-            <a:schemeClr val="accent1"/>
-          </a:lnRef>
-          <a:fillRef idx="1">
-            <a:schemeClr val="lt1"/>
-          </a:fillRef>
-          <a:effectRef idx="0">
-            <a:schemeClr val="accent1"/>
-          </a:effectRef>
-          <a:fontRef idx="minor">
-            <a:schemeClr val="dk1"/>
-          </a:fontRef>
-        </p:style>
-        <p:txBody>
-          <a:bodyPr rtlCol="0" anchor="ctr"/>
-          <a:lstStyle/>
-          <a:p>
-            <a:pPr algn="ctr"/>
-            <a:r>
-              <a:rPr lang="en-US" dirty="0"/>
-              <a:t>Teslin</a:t>
-            </a:r>
-          </a:p>
-        </p:txBody>
-      </p:sp>
-      <p:sp>
-        <p:nvSpPr>
-          <p:cNvPr id="35" name="Rectangle: Rounded Corners 34">
-            <a:extLst>
-              <a:ext uri="{FF2B5EF4-FFF2-40B4-BE49-F238E27FC236}">
-                <a16:creationId xmlns:a16="http://schemas.microsoft.com/office/drawing/2014/main" id="{4ADE7DA0-4A2F-4239-436D-3E18D4B662B8}"/>
-              </a:ext>
-            </a:extLst>
-          </p:cNvPr>
-          <p:cNvSpPr/>
-          <p:nvPr/>
-        </p:nvSpPr>
-        <p:spPr>
-          <a:xfrm>
-            <a:off x="2356418" y="5411403"/>
-            <a:ext cx="1175549" cy="316523"/>
-          </a:xfrm>
-          <a:prstGeom prst="roundRect">
-            <a:avLst/>
-          </a:prstGeom>
-          <a:ln w="19050"/>
-        </p:spPr>
-        <p:style>
-          <a:lnRef idx="2">
-            <a:schemeClr val="accent1"/>
-          </a:lnRef>
-          <a:fillRef idx="1">
-            <a:schemeClr val="lt1"/>
-          </a:fillRef>
-          <a:effectRef idx="0">
-            <a:schemeClr val="accent1"/>
-          </a:effectRef>
-          <a:fontRef idx="minor">
-            <a:schemeClr val="dk1"/>
-          </a:fontRef>
-        </p:style>
-        <p:txBody>
-          <a:bodyPr rtlCol="0" anchor="ctr"/>
-          <a:lstStyle/>
-          <a:p>
-            <a:pPr algn="ctr"/>
-            <a:r>
-              <a:rPr lang="en-US" dirty="0"/>
-              <a:t>White</a:t>
-            </a:r>
-          </a:p>
-        </p:txBody>
-      </p:sp>
-      <p:sp>
-        <p:nvSpPr>
-          <p:cNvPr id="41" name="Rectangle: Rounded Corners 40">
-            <a:extLst>
-              <a:ext uri="{FF2B5EF4-FFF2-40B4-BE49-F238E27FC236}">
-                <a16:creationId xmlns:a16="http://schemas.microsoft.com/office/drawing/2014/main" id="{17D50926-94F8-CA0B-8B57-E73F7D5E66C5}"/>
-              </a:ext>
-            </a:extLst>
-          </p:cNvPr>
-          <p:cNvSpPr/>
-          <p:nvPr/>
-        </p:nvSpPr>
-        <p:spPr>
-          <a:xfrm>
-            <a:off x="2131394" y="3401877"/>
-            <a:ext cx="1784603" cy="1001469"/>
-          </a:xfrm>
-          <a:prstGeom prst="roundRect">
-            <a:avLst/>
-          </a:prstGeom>
-          <a:ln w="28575">
-            <a:solidFill>
-              <a:srgbClr val="FFC000"/>
-            </a:solidFill>
-          </a:ln>
-        </p:spPr>
-        <p:style>
-          <a:lnRef idx="2">
-            <a:schemeClr val="accent6"/>
-          </a:lnRef>
-          <a:fillRef idx="1">
-            <a:schemeClr val="lt1"/>
-          </a:fillRef>
-          <a:effectRef idx="0">
-            <a:schemeClr val="accent6"/>
-          </a:effectRef>
-          <a:fontRef idx="minor">
-            <a:schemeClr val="dk1"/>
-          </a:fontRef>
-        </p:style>
-        <p:txBody>
-          <a:bodyPr rtlCol="0" anchor="ctr"/>
-          <a:lstStyle/>
-          <a:p>
-            <a:pPr algn="ctr"/>
-            <a:r>
-              <a:rPr lang="en-US" sz="2400" dirty="0"/>
-              <a:t>Tanana</a:t>
-            </a:r>
-          </a:p>
-          <a:p>
-            <a:pPr algn="ctr"/>
-            <a:r>
-              <a:rPr lang="en-US" dirty="0"/>
-              <a:t>Toklat </a:t>
-            </a:r>
-          </a:p>
-          <a:p>
-            <a:pPr algn="ctr"/>
-            <a:r>
-              <a:rPr lang="en-US" dirty="0"/>
-              <a:t>Upper Tanana</a:t>
-            </a:r>
-          </a:p>
-        </p:txBody>
-      </p:sp>
-      <p:sp>
-        <p:nvSpPr>
-          <p:cNvPr id="48" name="Rectangle: Rounded Corners 47">
-            <a:extLst>
-              <a:ext uri="{FF2B5EF4-FFF2-40B4-BE49-F238E27FC236}">
-                <a16:creationId xmlns:a16="http://schemas.microsoft.com/office/drawing/2014/main" id="{13C4F5B7-B239-9D45-D50B-6E11A8C6FFDD}"/>
-              </a:ext>
-            </a:extLst>
-          </p:cNvPr>
-          <p:cNvSpPr/>
-          <p:nvPr/>
-        </p:nvSpPr>
-        <p:spPr>
-          <a:xfrm>
-            <a:off x="2255546" y="4652451"/>
-            <a:ext cx="1574774" cy="612560"/>
-          </a:xfrm>
-          <a:prstGeom prst="roundRect">
-            <a:avLst/>
-          </a:prstGeom>
-        </p:spPr>
-        <p:style>
-          <a:lnRef idx="2">
-            <a:schemeClr val="accent1">
-              <a:shade val="15000"/>
-            </a:schemeClr>
-          </a:lnRef>
-          <a:fillRef idx="1">
-            <a:schemeClr val="accent1"/>
-          </a:fillRef>
-          <a:effectRef idx="0">
-            <a:schemeClr val="accent1"/>
-          </a:effectRef>
-          <a:fontRef idx="minor">
-            <a:schemeClr val="lt1"/>
-          </a:fontRef>
-        </p:style>
-        <p:txBody>
-          <a:bodyPr rtlCol="0" anchor="ctr"/>
-          <a:lstStyle/>
-          <a:p>
-            <a:pPr algn="ctr"/>
-            <a:r>
-              <a:rPr lang="en-US" dirty="0"/>
-              <a:t>Border US+CA</a:t>
-            </a:r>
-          </a:p>
-        </p:txBody>
-      </p:sp>
-      <p:sp>
-        <p:nvSpPr>
-          <p:cNvPr id="64" name="Rectangle: Rounded Corners 63">
-            <a:extLst>
-              <a:ext uri="{FF2B5EF4-FFF2-40B4-BE49-F238E27FC236}">
-                <a16:creationId xmlns:a16="http://schemas.microsoft.com/office/drawing/2014/main" id="{DDE5F3E5-59A6-DEF1-5B40-91BED8CC0B8D}"/>
-              </a:ext>
-            </a:extLst>
-          </p:cNvPr>
-          <p:cNvSpPr/>
-          <p:nvPr/>
-        </p:nvSpPr>
-        <p:spPr>
-          <a:xfrm>
-            <a:off x="5486378" y="5520017"/>
-            <a:ext cx="1175549" cy="316523"/>
-          </a:xfrm>
-          <a:prstGeom prst="roundRect">
-            <a:avLst/>
-          </a:prstGeom>
-          <a:ln w="19050"/>
-        </p:spPr>
-        <p:style>
-          <a:lnRef idx="2">
-            <a:schemeClr val="accent1"/>
-          </a:lnRef>
-          <a:fillRef idx="1">
-            <a:schemeClr val="lt1"/>
-          </a:fillRef>
-          <a:effectRef idx="0">
-            <a:schemeClr val="accent1"/>
-          </a:effectRef>
-          <a:fontRef idx="minor">
-            <a:schemeClr val="dk1"/>
-          </a:fontRef>
-        </p:style>
-        <p:txBody>
-          <a:bodyPr rtlCol="0" anchor="ctr"/>
-          <a:lstStyle/>
-          <a:p>
-            <a:pPr algn="ctr"/>
-            <a:r>
-              <a:rPr lang="en-US" dirty="0"/>
-              <a:t>White</a:t>
-            </a:r>
-          </a:p>
-        </p:txBody>
-      </p:sp>
-      <p:sp>
-        <p:nvSpPr>
-          <p:cNvPr id="75" name="Rectangle: Rounded Corners 74">
-            <a:extLst>
-              <a:ext uri="{FF2B5EF4-FFF2-40B4-BE49-F238E27FC236}">
-                <a16:creationId xmlns:a16="http://schemas.microsoft.com/office/drawing/2014/main" id="{F02BBDC2-3B98-17F2-6A47-01D049DF58E8}"/>
-              </a:ext>
-            </a:extLst>
-          </p:cNvPr>
-          <p:cNvSpPr/>
-          <p:nvPr/>
-        </p:nvSpPr>
-        <p:spPr>
-          <a:xfrm>
-            <a:off x="5489665" y="5165269"/>
-            <a:ext cx="1175549" cy="316523"/>
-          </a:xfrm>
-          <a:prstGeom prst="roundRect">
-            <a:avLst/>
-          </a:prstGeom>
-          <a:ln w="19050"/>
-        </p:spPr>
-        <p:style>
-          <a:lnRef idx="2">
-            <a:schemeClr val="accent1"/>
-          </a:lnRef>
-          <a:fillRef idx="1">
-            <a:schemeClr val="lt1"/>
-          </a:fillRef>
-          <a:effectRef idx="0">
-            <a:schemeClr val="accent1"/>
-          </a:effectRef>
-          <a:fontRef idx="minor">
-            <a:schemeClr val="dk1"/>
-          </a:fontRef>
-        </p:style>
-        <p:txBody>
-          <a:bodyPr rtlCol="0" anchor="ctr"/>
-          <a:lstStyle/>
-          <a:p>
-            <a:pPr algn="ctr"/>
-            <a:r>
-              <a:rPr lang="en-US" dirty="0"/>
-              <a:t>Border CA</a:t>
-            </a:r>
-          </a:p>
-        </p:txBody>
-      </p:sp>
-      <p:sp>
-        <p:nvSpPr>
-          <p:cNvPr id="77" name="Rectangle: Rounded Corners 76">
-            <a:extLst>
-              <a:ext uri="{FF2B5EF4-FFF2-40B4-BE49-F238E27FC236}">
-                <a16:creationId xmlns:a16="http://schemas.microsoft.com/office/drawing/2014/main" id="{2D3D554C-AD80-AEA5-AD6B-021D117B4E23}"/>
-              </a:ext>
-            </a:extLst>
-          </p:cNvPr>
-          <p:cNvSpPr/>
-          <p:nvPr/>
-        </p:nvSpPr>
-        <p:spPr>
-          <a:xfrm>
-            <a:off x="5516496" y="4782423"/>
-            <a:ext cx="1175549" cy="316523"/>
-          </a:xfrm>
-          <a:prstGeom prst="roundRect">
-            <a:avLst/>
-          </a:prstGeom>
-          <a:ln w="19050"/>
-        </p:spPr>
-        <p:style>
-          <a:lnRef idx="2">
-            <a:schemeClr val="accent1"/>
-          </a:lnRef>
-          <a:fillRef idx="1">
-            <a:schemeClr val="lt1"/>
-          </a:fillRef>
-          <a:effectRef idx="0">
-            <a:schemeClr val="accent1"/>
-          </a:effectRef>
-          <a:fontRef idx="minor">
-            <a:schemeClr val="dk1"/>
-          </a:fontRef>
-        </p:style>
-        <p:txBody>
-          <a:bodyPr rtlCol="0" anchor="ctr"/>
-          <a:lstStyle/>
-          <a:p>
-            <a:pPr algn="ctr"/>
-            <a:r>
-              <a:rPr lang="en-US" dirty="0"/>
-              <a:t>Porcupine</a:t>
-            </a:r>
-          </a:p>
-        </p:txBody>
-      </p:sp>
-      <p:cxnSp>
-        <p:nvCxnSpPr>
-          <p:cNvPr id="80" name="Straight Arrow Connector 79">
-            <a:extLst>
-              <a:ext uri="{FF2B5EF4-FFF2-40B4-BE49-F238E27FC236}">
-                <a16:creationId xmlns:a16="http://schemas.microsoft.com/office/drawing/2014/main" id="{3B5F37BA-CB0A-865D-4FA3-880B8BD7F93D}"/>
-              </a:ext>
-            </a:extLst>
-          </p:cNvPr>
-          <p:cNvCxnSpPr>
-            <a:cxnSpLocks/>
-          </p:cNvCxnSpPr>
-          <p:nvPr/>
-        </p:nvCxnSpPr>
-        <p:spPr>
-          <a:xfrm>
-            <a:off x="3830866" y="4906434"/>
-            <a:ext cx="1665034" cy="1"/>
+            <a:off x="3845542" y="3682486"/>
+            <a:ext cx="1588213" cy="389460"/>
           </a:xfrm>
           <a:prstGeom prst="straightConnector1">
             <a:avLst/>
@@ -8309,723 +6443,6 @@
           </a:fontRef>
         </p:style>
       </p:cxnSp>
-      <p:sp>
-        <p:nvSpPr>
-          <p:cNvPr id="84" name="Rectangle: Rounded Corners 83">
-            <a:extLst>
-              <a:ext uri="{FF2B5EF4-FFF2-40B4-BE49-F238E27FC236}">
-                <a16:creationId xmlns:a16="http://schemas.microsoft.com/office/drawing/2014/main" id="{E44CC388-6C03-2D1C-DA40-259E7E5A82CB}"/>
-              </a:ext>
-            </a:extLst>
-          </p:cNvPr>
-          <p:cNvSpPr/>
-          <p:nvPr/>
-        </p:nvSpPr>
-        <p:spPr>
-          <a:xfrm>
-            <a:off x="5478097" y="3884512"/>
-            <a:ext cx="1252349" cy="342477"/>
-          </a:xfrm>
-          <a:prstGeom prst="roundRect">
-            <a:avLst/>
-          </a:prstGeom>
-          <a:ln w="28575"/>
-        </p:spPr>
-        <p:style>
-          <a:lnRef idx="2">
-            <a:schemeClr val="accent2"/>
-          </a:lnRef>
-          <a:fillRef idx="1">
-            <a:schemeClr val="lt1"/>
-          </a:fillRef>
-          <a:effectRef idx="0">
-            <a:schemeClr val="accent2"/>
-          </a:effectRef>
-          <a:fontRef idx="minor">
-            <a:schemeClr val="dk1"/>
-          </a:fontRef>
-        </p:style>
-        <p:txBody>
-          <a:bodyPr rtlCol="0" anchor="ctr"/>
-          <a:lstStyle/>
-          <a:p>
-            <a:pPr algn="ctr"/>
-            <a:r>
-              <a:rPr lang="en-US" dirty="0"/>
-              <a:t>Border US</a:t>
-            </a:r>
-          </a:p>
-        </p:txBody>
-      </p:sp>
-      <p:cxnSp>
-        <p:nvCxnSpPr>
-          <p:cNvPr id="85" name="Straight Arrow Connector 84">
-            <a:extLst>
-              <a:ext uri="{FF2B5EF4-FFF2-40B4-BE49-F238E27FC236}">
-                <a16:creationId xmlns:a16="http://schemas.microsoft.com/office/drawing/2014/main" id="{491BC7B2-AC2A-E9C5-81A5-DC032E986FE2}"/>
-              </a:ext>
-            </a:extLst>
-          </p:cNvPr>
-          <p:cNvCxnSpPr>
-            <a:cxnSpLocks/>
-            <a:endCxn id="84" idx="1"/>
-          </p:cNvCxnSpPr>
-          <p:nvPr/>
-        </p:nvCxnSpPr>
-        <p:spPr>
-          <a:xfrm flipV="1">
-            <a:off x="3831026" y="4055751"/>
-            <a:ext cx="1647071" cy="831919"/>
-          </a:xfrm>
-          <a:prstGeom prst="straightConnector1">
-            <a:avLst/>
-          </a:prstGeom>
-          <a:ln w="50800">
-            <a:solidFill>
-              <a:schemeClr val="tx1"/>
-            </a:solidFill>
-            <a:tailEnd type="triangle"/>
-          </a:ln>
-        </p:spPr>
-        <p:style>
-          <a:lnRef idx="1">
-            <a:schemeClr val="dk1"/>
-          </a:lnRef>
-          <a:fillRef idx="0">
-            <a:schemeClr val="dk1"/>
-          </a:fillRef>
-          <a:effectRef idx="0">
-            <a:schemeClr val="dk1"/>
-          </a:effectRef>
-          <a:fontRef idx="minor">
-            <a:schemeClr val="tx1"/>
-          </a:fontRef>
-        </p:style>
-      </p:cxnSp>
-      <p:sp>
-        <p:nvSpPr>
-          <p:cNvPr id="90" name="Rectangle: Rounded Corners 89">
-            <a:extLst>
-              <a:ext uri="{FF2B5EF4-FFF2-40B4-BE49-F238E27FC236}">
-                <a16:creationId xmlns:a16="http://schemas.microsoft.com/office/drawing/2014/main" id="{7A1619F0-4C92-A517-FAC4-A10AEB5A878E}"/>
-              </a:ext>
-            </a:extLst>
-          </p:cNvPr>
-          <p:cNvSpPr/>
-          <p:nvPr/>
-        </p:nvSpPr>
-        <p:spPr>
-          <a:xfrm>
-            <a:off x="8599469" y="5479539"/>
-            <a:ext cx="1175549" cy="316523"/>
-          </a:xfrm>
-          <a:prstGeom prst="roundRect">
-            <a:avLst/>
-          </a:prstGeom>
-          <a:ln w="19050"/>
-        </p:spPr>
-        <p:style>
-          <a:lnRef idx="2">
-            <a:schemeClr val="accent1"/>
-          </a:lnRef>
-          <a:fillRef idx="1">
-            <a:schemeClr val="lt1"/>
-          </a:fillRef>
-          <a:effectRef idx="0">
-            <a:schemeClr val="accent1"/>
-          </a:effectRef>
-          <a:fontRef idx="minor">
-            <a:schemeClr val="dk1"/>
-          </a:fontRef>
-        </p:style>
-        <p:txBody>
-          <a:bodyPr rtlCol="0" anchor="ctr"/>
-          <a:lstStyle/>
-          <a:p>
-            <a:pPr algn="ctr"/>
-            <a:r>
-              <a:rPr lang="en-US" dirty="0"/>
-              <a:t>White</a:t>
-            </a:r>
-          </a:p>
-        </p:txBody>
-      </p:sp>
-      <p:sp>
-        <p:nvSpPr>
-          <p:cNvPr id="91" name="Rectangle: Rounded Corners 90">
-            <a:extLst>
-              <a:ext uri="{FF2B5EF4-FFF2-40B4-BE49-F238E27FC236}">
-                <a16:creationId xmlns:a16="http://schemas.microsoft.com/office/drawing/2014/main" id="{1E07A608-E980-5B8D-57FB-78261FE42F46}"/>
-              </a:ext>
-            </a:extLst>
-          </p:cNvPr>
-          <p:cNvSpPr/>
-          <p:nvPr/>
-        </p:nvSpPr>
-        <p:spPr>
-          <a:xfrm>
-            <a:off x="8628981" y="5799423"/>
-            <a:ext cx="1175549" cy="333561"/>
-          </a:xfrm>
-          <a:prstGeom prst="roundRect">
-            <a:avLst/>
-          </a:prstGeom>
-          <a:ln w="19050"/>
-        </p:spPr>
-        <p:style>
-          <a:lnRef idx="2">
-            <a:schemeClr val="accent1"/>
-          </a:lnRef>
-          <a:fillRef idx="1">
-            <a:schemeClr val="lt1"/>
-          </a:fillRef>
-          <a:effectRef idx="0">
-            <a:schemeClr val="accent1"/>
-          </a:effectRef>
-          <a:fontRef idx="minor">
-            <a:schemeClr val="dk1"/>
-          </a:fontRef>
-        </p:style>
-        <p:txBody>
-          <a:bodyPr rtlCol="0" anchor="ctr"/>
-          <a:lstStyle/>
-          <a:p>
-            <a:pPr algn="ctr"/>
-            <a:r>
-              <a:rPr lang="en-US" dirty="0"/>
-              <a:t>Teslin</a:t>
-            </a:r>
-          </a:p>
-        </p:txBody>
-      </p:sp>
-      <p:sp>
-        <p:nvSpPr>
-          <p:cNvPr id="92" name="Rectangle: Rounded Corners 91">
-            <a:extLst>
-              <a:ext uri="{FF2B5EF4-FFF2-40B4-BE49-F238E27FC236}">
-                <a16:creationId xmlns:a16="http://schemas.microsoft.com/office/drawing/2014/main" id="{817802AC-5D0F-1FA7-ED84-107DBCD1C609}"/>
-              </a:ext>
-            </a:extLst>
-          </p:cNvPr>
-          <p:cNvSpPr/>
-          <p:nvPr/>
-        </p:nvSpPr>
-        <p:spPr>
-          <a:xfrm>
-            <a:off x="8591548" y="5121355"/>
-            <a:ext cx="1175549" cy="316523"/>
-          </a:xfrm>
-          <a:prstGeom prst="roundRect">
-            <a:avLst/>
-          </a:prstGeom>
-          <a:ln w="19050"/>
-        </p:spPr>
-        <p:style>
-          <a:lnRef idx="2">
-            <a:schemeClr val="accent1"/>
-          </a:lnRef>
-          <a:fillRef idx="1">
-            <a:schemeClr val="lt1"/>
-          </a:fillRef>
-          <a:effectRef idx="0">
-            <a:schemeClr val="accent1"/>
-          </a:effectRef>
-          <a:fontRef idx="minor">
-            <a:schemeClr val="dk1"/>
-          </a:fontRef>
-        </p:style>
-        <p:txBody>
-          <a:bodyPr rtlCol="0" anchor="ctr"/>
-          <a:lstStyle/>
-          <a:p>
-            <a:pPr algn="ctr"/>
-            <a:r>
-              <a:rPr lang="en-US" dirty="0"/>
-              <a:t>Border CA</a:t>
-            </a:r>
-          </a:p>
-        </p:txBody>
-      </p:sp>
-      <p:sp>
-        <p:nvSpPr>
-          <p:cNvPr id="93" name="Rectangle: Rounded Corners 92">
-            <a:extLst>
-              <a:ext uri="{FF2B5EF4-FFF2-40B4-BE49-F238E27FC236}">
-                <a16:creationId xmlns:a16="http://schemas.microsoft.com/office/drawing/2014/main" id="{081727E2-A230-B997-3AD4-3D96E01BDF1C}"/>
-              </a:ext>
-            </a:extLst>
-          </p:cNvPr>
-          <p:cNvSpPr/>
-          <p:nvPr/>
-        </p:nvSpPr>
-        <p:spPr>
-          <a:xfrm>
-            <a:off x="8599469" y="4782424"/>
-            <a:ext cx="1175549" cy="316523"/>
-          </a:xfrm>
-          <a:prstGeom prst="roundRect">
-            <a:avLst/>
-          </a:prstGeom>
-          <a:ln w="19050"/>
-        </p:spPr>
-        <p:style>
-          <a:lnRef idx="2">
-            <a:schemeClr val="accent1"/>
-          </a:lnRef>
-          <a:fillRef idx="1">
-            <a:schemeClr val="lt1"/>
-          </a:fillRef>
-          <a:effectRef idx="0">
-            <a:schemeClr val="accent1"/>
-          </a:effectRef>
-          <a:fontRef idx="minor">
-            <a:schemeClr val="dk1"/>
-          </a:fontRef>
-        </p:style>
-        <p:txBody>
-          <a:bodyPr rtlCol="0" anchor="ctr"/>
-          <a:lstStyle/>
-          <a:p>
-            <a:pPr algn="ctr"/>
-            <a:r>
-              <a:rPr lang="en-US" dirty="0"/>
-              <a:t>Porcupine</a:t>
-            </a:r>
-          </a:p>
-        </p:txBody>
-      </p:sp>
-      <p:sp>
-        <p:nvSpPr>
-          <p:cNvPr id="97" name="Rectangle: Rounded Corners 96">
-            <a:extLst>
-              <a:ext uri="{FF2B5EF4-FFF2-40B4-BE49-F238E27FC236}">
-                <a16:creationId xmlns:a16="http://schemas.microsoft.com/office/drawing/2014/main" id="{B1D6D6BB-5B67-A452-9967-68E35C0F10BD}"/>
-              </a:ext>
-            </a:extLst>
-          </p:cNvPr>
-          <p:cNvSpPr/>
-          <p:nvPr/>
-        </p:nvSpPr>
-        <p:spPr>
-          <a:xfrm>
-            <a:off x="8635765" y="3823848"/>
-            <a:ext cx="1252349" cy="342477"/>
-          </a:xfrm>
-          <a:prstGeom prst="roundRect">
-            <a:avLst/>
-          </a:prstGeom>
-          <a:ln w="28575"/>
-        </p:spPr>
-        <p:style>
-          <a:lnRef idx="2">
-            <a:schemeClr val="accent2"/>
-          </a:lnRef>
-          <a:fillRef idx="1">
-            <a:schemeClr val="lt1"/>
-          </a:fillRef>
-          <a:effectRef idx="0">
-            <a:schemeClr val="accent2"/>
-          </a:effectRef>
-          <a:fontRef idx="minor">
-            <a:schemeClr val="dk1"/>
-          </a:fontRef>
-        </p:style>
-        <p:txBody>
-          <a:bodyPr rtlCol="0" anchor="ctr"/>
-          <a:lstStyle/>
-          <a:p>
-            <a:pPr algn="ctr"/>
-            <a:r>
-              <a:rPr lang="en-US" dirty="0"/>
-              <a:t>Border US</a:t>
-            </a:r>
-          </a:p>
-        </p:txBody>
-      </p:sp>
-      <p:sp>
-        <p:nvSpPr>
-          <p:cNvPr id="98" name="Rectangle: Rounded Corners 97">
-            <a:extLst>
-              <a:ext uri="{FF2B5EF4-FFF2-40B4-BE49-F238E27FC236}">
-                <a16:creationId xmlns:a16="http://schemas.microsoft.com/office/drawing/2014/main" id="{5AE7F774-A26D-41C4-E5B6-A83F01EC51A8}"/>
-              </a:ext>
-            </a:extLst>
-          </p:cNvPr>
-          <p:cNvSpPr/>
-          <p:nvPr/>
-        </p:nvSpPr>
-        <p:spPr>
-          <a:xfrm>
-            <a:off x="8642099" y="3401773"/>
-            <a:ext cx="1295357" cy="338625"/>
-          </a:xfrm>
-          <a:prstGeom prst="roundRect">
-            <a:avLst/>
-          </a:prstGeom>
-          <a:ln w="28575"/>
-        </p:spPr>
-        <p:style>
-          <a:lnRef idx="2">
-            <a:schemeClr val="accent2"/>
-          </a:lnRef>
-          <a:fillRef idx="1">
-            <a:schemeClr val="lt1"/>
-          </a:fillRef>
-          <a:effectRef idx="0">
-            <a:schemeClr val="accent2"/>
-          </a:effectRef>
-          <a:fontRef idx="minor">
-            <a:schemeClr val="dk1"/>
-          </a:fontRef>
-        </p:style>
-        <p:txBody>
-          <a:bodyPr rtlCol="0" anchor="ctr"/>
-          <a:lstStyle/>
-          <a:p>
-            <a:pPr algn="ctr"/>
-            <a:r>
-              <a:rPr lang="en-US" dirty="0"/>
-              <a:t>Tanana Fall</a:t>
-            </a:r>
-          </a:p>
-        </p:txBody>
-      </p:sp>
-      <p:sp>
-        <p:nvSpPr>
-          <p:cNvPr id="105" name="Rectangle: Rounded Corners 104">
-            <a:extLst>
-              <a:ext uri="{FF2B5EF4-FFF2-40B4-BE49-F238E27FC236}">
-                <a16:creationId xmlns:a16="http://schemas.microsoft.com/office/drawing/2014/main" id="{2EE1070C-90EE-4D01-2C6D-8B2C422085C1}"/>
-              </a:ext>
-            </a:extLst>
-          </p:cNvPr>
-          <p:cNvSpPr/>
-          <p:nvPr/>
-        </p:nvSpPr>
-        <p:spPr>
-          <a:xfrm>
-            <a:off x="8635765" y="2701839"/>
-            <a:ext cx="1730571" cy="327482"/>
-          </a:xfrm>
-          <a:prstGeom prst="roundRect">
-            <a:avLst/>
-          </a:prstGeom>
-          <a:ln w="28575"/>
-        </p:spPr>
-        <p:style>
-          <a:lnRef idx="2">
-            <a:schemeClr val="accent6"/>
-          </a:lnRef>
-          <a:fillRef idx="1">
-            <a:schemeClr val="lt1"/>
-          </a:fillRef>
-          <a:effectRef idx="0">
-            <a:schemeClr val="accent6"/>
-          </a:effectRef>
-          <a:fontRef idx="minor">
-            <a:schemeClr val="dk1"/>
-          </a:fontRef>
-        </p:style>
-        <p:txBody>
-          <a:bodyPr rtlCol="0" anchor="ctr"/>
-          <a:lstStyle/>
-          <a:p>
-            <a:pPr algn="ctr"/>
-            <a:r>
-              <a:rPr lang="en-US" dirty="0"/>
-              <a:t>Tanana Summer</a:t>
-            </a:r>
-          </a:p>
-        </p:txBody>
-      </p:sp>
-      <p:sp>
-        <p:nvSpPr>
-          <p:cNvPr id="112" name="Rectangle: Rounded Corners 111">
-            <a:extLst>
-              <a:ext uri="{FF2B5EF4-FFF2-40B4-BE49-F238E27FC236}">
-                <a16:creationId xmlns:a16="http://schemas.microsoft.com/office/drawing/2014/main" id="{6A6EC170-D286-6F91-A9B4-B03CE7194BEB}"/>
-              </a:ext>
-            </a:extLst>
-          </p:cNvPr>
-          <p:cNvSpPr/>
-          <p:nvPr/>
-        </p:nvSpPr>
-        <p:spPr>
-          <a:xfrm>
-            <a:off x="8635765" y="1593333"/>
-            <a:ext cx="1556275" cy="389174"/>
-          </a:xfrm>
-          <a:prstGeom prst="roundRect">
-            <a:avLst/>
-          </a:prstGeom>
-          <a:ln w="28575">
-            <a:solidFill>
-              <a:srgbClr val="7030A0"/>
-            </a:solidFill>
-          </a:ln>
-        </p:spPr>
-        <p:style>
-          <a:lnRef idx="2">
-            <a:schemeClr val="accent6"/>
-          </a:lnRef>
-          <a:fillRef idx="1">
-            <a:schemeClr val="lt1"/>
-          </a:fillRef>
-          <a:effectRef idx="0">
-            <a:schemeClr val="accent6"/>
-          </a:effectRef>
-          <a:fontRef idx="minor">
-            <a:schemeClr val="dk1"/>
-          </a:fontRef>
-        </p:style>
-        <p:txBody>
-          <a:bodyPr rtlCol="0" anchor="ctr"/>
-          <a:lstStyle/>
-          <a:p>
-            <a:pPr algn="ctr"/>
-            <a:r>
-              <a:rPr lang="en-US" dirty="0"/>
-              <a:t>Lower</a:t>
-            </a:r>
-          </a:p>
-        </p:txBody>
-      </p:sp>
-      <p:cxnSp>
-        <p:nvCxnSpPr>
-          <p:cNvPr id="119" name="Straight Arrow Connector 118">
-            <a:extLst>
-              <a:ext uri="{FF2B5EF4-FFF2-40B4-BE49-F238E27FC236}">
-                <a16:creationId xmlns:a16="http://schemas.microsoft.com/office/drawing/2014/main" id="{E6652B1D-F435-145C-9DF1-ED42D0A435A1}"/>
-              </a:ext>
-            </a:extLst>
-          </p:cNvPr>
-          <p:cNvCxnSpPr>
-            <a:cxnSpLocks/>
-            <a:endCxn id="96" idx="1"/>
-          </p:cNvCxnSpPr>
-          <p:nvPr/>
-        </p:nvCxnSpPr>
-        <p:spPr>
-          <a:xfrm>
-            <a:off x="7251185" y="1899455"/>
-            <a:ext cx="1388452" cy="481592"/>
-          </a:xfrm>
-          <a:prstGeom prst="straightConnector1">
-            <a:avLst/>
-          </a:prstGeom>
-          <a:ln w="50800">
-            <a:solidFill>
-              <a:schemeClr val="tx1"/>
-            </a:solidFill>
-            <a:tailEnd type="triangle"/>
-          </a:ln>
-        </p:spPr>
-        <p:style>
-          <a:lnRef idx="1">
-            <a:schemeClr val="dk1"/>
-          </a:lnRef>
-          <a:fillRef idx="0">
-            <a:schemeClr val="dk1"/>
-          </a:fillRef>
-          <a:effectRef idx="0">
-            <a:schemeClr val="dk1"/>
-          </a:effectRef>
-          <a:fontRef idx="minor">
-            <a:schemeClr val="tx1"/>
-          </a:fontRef>
-        </p:style>
-      </p:cxnSp>
-      <p:sp>
-        <p:nvSpPr>
-          <p:cNvPr id="122" name="Rectangle: Rounded Corners 121">
-            <a:extLst>
-              <a:ext uri="{FF2B5EF4-FFF2-40B4-BE49-F238E27FC236}">
-                <a16:creationId xmlns:a16="http://schemas.microsoft.com/office/drawing/2014/main" id="{48566416-6791-A1D3-7964-AC542E6A533F}"/>
-              </a:ext>
-            </a:extLst>
-          </p:cNvPr>
-          <p:cNvSpPr/>
-          <p:nvPr/>
-        </p:nvSpPr>
-        <p:spPr>
-          <a:xfrm>
-            <a:off x="8569740" y="2064483"/>
-            <a:ext cx="1957862" cy="1111552"/>
-          </a:xfrm>
-          <a:prstGeom prst="roundRect">
-            <a:avLst/>
-          </a:prstGeom>
-          <a:noFill/>
-          <a:ln w="19050">
-            <a:solidFill>
-              <a:schemeClr val="tx1"/>
-            </a:solidFill>
-            <a:prstDash val="sysDash"/>
-          </a:ln>
-        </p:spPr>
-        <p:style>
-          <a:lnRef idx="2">
-            <a:schemeClr val="accent6"/>
-          </a:lnRef>
-          <a:fillRef idx="1">
-            <a:schemeClr val="lt1"/>
-          </a:fillRef>
-          <a:effectRef idx="0">
-            <a:schemeClr val="accent6"/>
-          </a:effectRef>
-          <a:fontRef idx="minor">
-            <a:schemeClr val="dk1"/>
-          </a:fontRef>
-        </p:style>
-        <p:txBody>
-          <a:bodyPr rtlCol="0" anchor="ctr"/>
-          <a:lstStyle/>
-          <a:p>
-            <a:pPr algn="ctr"/>
-            <a:endParaRPr lang="en-US" dirty="0"/>
-          </a:p>
-        </p:txBody>
-      </p:sp>
-      <p:sp>
-        <p:nvSpPr>
-          <p:cNvPr id="3" name="Rectangle: Rounded Corners 2">
-            <a:extLst>
-              <a:ext uri="{FF2B5EF4-FFF2-40B4-BE49-F238E27FC236}">
-                <a16:creationId xmlns:a16="http://schemas.microsoft.com/office/drawing/2014/main" id="{54F94497-020D-3044-26B0-081CC2CA7A1E}"/>
-              </a:ext>
-            </a:extLst>
-          </p:cNvPr>
-          <p:cNvSpPr/>
-          <p:nvPr/>
-        </p:nvSpPr>
-        <p:spPr>
-          <a:xfrm>
-            <a:off x="5508224" y="4468119"/>
-            <a:ext cx="1573296" cy="316523"/>
-          </a:xfrm>
-          <a:prstGeom prst="roundRect">
-            <a:avLst/>
-          </a:prstGeom>
-          <a:ln w="19050"/>
-        </p:spPr>
-        <p:style>
-          <a:lnRef idx="2">
-            <a:schemeClr val="accent1"/>
-          </a:lnRef>
-          <a:fillRef idx="1">
-            <a:schemeClr val="lt1"/>
-          </a:fillRef>
-          <a:effectRef idx="0">
-            <a:schemeClr val="accent1"/>
-          </a:effectRef>
-          <a:fontRef idx="minor">
-            <a:schemeClr val="dk1"/>
-          </a:fontRef>
-        </p:style>
-        <p:txBody>
-          <a:bodyPr rtlCol="0" anchor="ctr"/>
-          <a:lstStyle/>
-          <a:p>
-            <a:pPr algn="ctr"/>
-            <a:r>
-              <a:rPr lang="en-US" dirty="0"/>
-              <a:t>Mainstem CA</a:t>
-            </a:r>
-          </a:p>
-        </p:txBody>
-      </p:sp>
-      <p:cxnSp>
-        <p:nvCxnSpPr>
-          <p:cNvPr id="11" name="Straight Arrow Connector 10">
-            <a:extLst>
-              <a:ext uri="{FF2B5EF4-FFF2-40B4-BE49-F238E27FC236}">
-                <a16:creationId xmlns:a16="http://schemas.microsoft.com/office/drawing/2014/main" id="{A0CC39F7-4D28-B0BE-DBCE-857EFABBA635}"/>
-              </a:ext>
-            </a:extLst>
-          </p:cNvPr>
-          <p:cNvCxnSpPr>
-            <a:cxnSpLocks/>
-          </p:cNvCxnSpPr>
-          <p:nvPr/>
-        </p:nvCxnSpPr>
-        <p:spPr>
-          <a:xfrm flipV="1">
-            <a:off x="3949307" y="4649064"/>
-            <a:ext cx="1537071" cy="203530"/>
-          </a:xfrm>
-          <a:prstGeom prst="straightConnector1">
-            <a:avLst/>
-          </a:prstGeom>
-          <a:ln w="50800">
-            <a:solidFill>
-              <a:schemeClr val="tx1"/>
-            </a:solidFill>
-            <a:tailEnd type="triangle"/>
-          </a:ln>
-        </p:spPr>
-        <p:style>
-          <a:lnRef idx="1">
-            <a:schemeClr val="dk1"/>
-          </a:lnRef>
-          <a:fillRef idx="0">
-            <a:schemeClr val="dk1"/>
-          </a:fillRef>
-          <a:effectRef idx="0">
-            <a:schemeClr val="dk1"/>
-          </a:effectRef>
-          <a:fontRef idx="minor">
-            <a:schemeClr val="tx1"/>
-          </a:fontRef>
-        </p:style>
-      </p:cxnSp>
-      <p:sp>
-        <p:nvSpPr>
-          <p:cNvPr id="13" name="Rectangle: Rounded Corners 12">
-            <a:extLst>
-              <a:ext uri="{FF2B5EF4-FFF2-40B4-BE49-F238E27FC236}">
-                <a16:creationId xmlns:a16="http://schemas.microsoft.com/office/drawing/2014/main" id="{70A2BBBB-28E9-AC0D-59E9-F19A13AF0BA4}"/>
-              </a:ext>
-            </a:extLst>
-          </p:cNvPr>
-          <p:cNvSpPr/>
-          <p:nvPr/>
-        </p:nvSpPr>
-        <p:spPr>
-          <a:xfrm>
-            <a:off x="8575403" y="4468119"/>
-            <a:ext cx="1573296" cy="316523"/>
-          </a:xfrm>
-          <a:prstGeom prst="roundRect">
-            <a:avLst/>
-          </a:prstGeom>
-          <a:ln w="19050"/>
-        </p:spPr>
-        <p:style>
-          <a:lnRef idx="2">
-            <a:schemeClr val="accent1"/>
-          </a:lnRef>
-          <a:fillRef idx="1">
-            <a:schemeClr val="lt1"/>
-          </a:fillRef>
-          <a:effectRef idx="0">
-            <a:schemeClr val="accent1"/>
-          </a:effectRef>
-          <a:fontRef idx="minor">
-            <a:schemeClr val="dk1"/>
-          </a:fontRef>
-        </p:style>
-        <p:txBody>
-          <a:bodyPr rtlCol="0" anchor="ctr"/>
-          <a:lstStyle/>
-          <a:p>
-            <a:pPr algn="ctr"/>
-            <a:r>
-              <a:rPr lang="en-US" dirty="0"/>
-              <a:t>Mainstem CA</a:t>
-            </a:r>
-          </a:p>
-        </p:txBody>
-      </p:sp>
     </p:spTree>
     <p:extLst>
       <p:ext uri="{BB962C8B-B14F-4D97-AF65-F5344CB8AC3E}">
